--- a/templates/posts/october/05-10-2026-mon-ig-teachers-day-option-3-wreath.pptx
+++ b/templates/posts/october/05-10-2026-mon-ig-teachers-day-option-3-wreath.pptx
@@ -503,7 +503,7 @@
           <a:lstStyle/>
           <a:p>
             <a:r>
-              <a:t>Option 3, slide 1: the fourteen mentors in a ring around the title. Mentor photos: Linnea's Drive folder (5 Oct 2026) and assets/mentors-teachers-day/; written consent per the folder README.</a:t>
+              <a:t>Option 3, slide 1: title above a 4 x 4 grid of the fourteen mentors. Mentor photos: Linnea's Drive folder (5 Oct 2026) and assets/mentors-teachers-day/; written consent per the folder README.</a:t>
             </a:r>
           </a:p>
         </p:txBody>
@@ -3587,9 +3587,87 @@
         <p:nvPr/>
       </p:nvGrpSpPr>
       <p:grpSpPr/>
+      <p:sp>
+        <p:nvSpPr>
+          <p:cNvPr id="2" name="TextBox 1"/>
+          <p:cNvSpPr txBox="1"/>
+          <p:nvPr/>
+        </p:nvSpPr>
+        <p:spPr>
+          <a:xfrm>
+            <a:off x="457200" y="571500"/>
+            <a:ext cx="9372600" cy="381000"/>
+          </a:xfrm>
+          <a:prstGeom prst="rect">
+            <a:avLst/>
+          </a:prstGeom>
+          <a:noFill/>
+        </p:spPr>
+        <p:txBody>
+          <a:bodyPr wrap="square" lIns="0" rIns="0" tIns="0" bIns="0" anchor="t">
+            <a:spAutoFit/>
+          </a:bodyPr>
+          <a:lstStyle/>
+          <a:p>
+            <a:pPr algn="l">
+              <a:lnSpc>
+                <a:spcPct val="120000"/>
+              </a:lnSpc>
+            </a:pPr>
+            <a:r>
+              <a:rPr sz="2200" b="1" i="0" spc="400">
+                <a:solidFill>
+                  <a:srgbClr val="31662F"/>
+                </a:solidFill>
+                <a:latin typeface="Montserrat"/>
+              </a:rPr>
+              <a:t>OCTOBER 5</a:t>
+            </a:r>
+          </a:p>
+        </p:txBody>
+      </p:sp>
+      <p:sp>
+        <p:nvSpPr>
+          <p:cNvPr id="3" name="TextBox 2"/>
+          <p:cNvSpPr txBox="1"/>
+          <p:nvPr/>
+        </p:nvSpPr>
+        <p:spPr>
+          <a:xfrm>
+            <a:off x="457200" y="1000125"/>
+            <a:ext cx="9372600" cy="1143000"/>
+          </a:xfrm>
+          <a:prstGeom prst="rect">
+            <a:avLst/>
+          </a:prstGeom>
+          <a:noFill/>
+        </p:spPr>
+        <p:txBody>
+          <a:bodyPr wrap="square" lIns="0" rIns="0" tIns="0" bIns="0" anchor="t">
+            <a:spAutoFit/>
+          </a:bodyPr>
+          <a:lstStyle/>
+          <a:p>
+            <a:pPr algn="l">
+              <a:lnSpc>
+                <a:spcPct val="100000"/>
+              </a:lnSpc>
+            </a:pPr>
+            <a:r>
+              <a:rPr sz="4800" b="1" i="0">
+                <a:solidFill>
+                  <a:srgbClr val="31662F"/>
+                </a:solidFill>
+                <a:latin typeface="Montserrat"/>
+              </a:rPr>
+              <a:t>Happy World Teachers' Day</a:t>
+            </a:r>
+          </a:p>
+        </p:txBody>
+      </p:sp>
       <p:pic>
         <p:nvPicPr>
-          <p:cNvPr id="2" name="Picture 1" descr="6783385444693527963.jpg"/>
+          <p:cNvPr id="4" name="Picture 3" descr="894524731619023401.jpg"/>
           <p:cNvPicPr>
             <a:picLocks noChangeAspect="1"/>
           </p:cNvPicPr>
@@ -3603,17 +3681,102 @@
         </p:blipFill>
         <p:spPr>
           <a:xfrm>
-            <a:off x="4429125" y="1762125"/>
-            <a:ext cx="1428750" cy="1428750"/>
-          </a:xfrm>
-          <a:prstGeom prst="ellipse">
+            <a:off x="457200" y="2190750"/>
+            <a:ext cx="2286000" cy="2286000"/>
+          </a:xfrm>
+          <a:prstGeom prst="rect">
             <a:avLst/>
           </a:prstGeom>
         </p:spPr>
       </p:pic>
+      <p:sp>
+        <p:nvSpPr>
+          <p:cNvPr id="5" name="Rectangle 4"/>
+          <p:cNvSpPr/>
+          <p:nvPr/>
+        </p:nvSpPr>
+        <p:spPr>
+          <a:xfrm>
+            <a:off x="457200" y="4057650"/>
+            <a:ext cx="2286000" cy="419100"/>
+          </a:xfrm>
+          <a:prstGeom prst="rect">
+            <a:avLst/>
+          </a:prstGeom>
+          <a:solidFill>
+            <a:srgbClr val="F3F1EA">
+              <a:alpha val="88000"/>
+            </a:srgbClr>
+          </a:solidFill>
+          <a:ln>
+            <a:noFill/>
+          </a:ln>
+          <a:effectLst/>
+        </p:spPr>
+        <p:style>
+          <a:lnRef idx="1">
+            <a:schemeClr val="accent1"/>
+          </a:lnRef>
+          <a:fillRef idx="3">
+            <a:schemeClr val="accent1"/>
+          </a:fillRef>
+          <a:effectRef idx="2">
+            <a:schemeClr val="accent1"/>
+          </a:effectRef>
+          <a:fontRef idx="minor">
+            <a:schemeClr val="lt1"/>
+          </a:fontRef>
+        </p:style>
+        <p:txBody>
+          <a:bodyPr rtlCol="0" anchor="ctr"/>
+          <a:lstStyle/>
+          <a:p>
+            <a:pPr algn="ctr"/>
+          </a:p>
+        </p:txBody>
+      </p:sp>
+      <p:sp>
+        <p:nvSpPr>
+          <p:cNvPr id="6" name="TextBox 5"/>
+          <p:cNvSpPr txBox="1"/>
+          <p:nvPr/>
+        </p:nvSpPr>
+        <p:spPr>
+          <a:xfrm>
+            <a:off x="514350" y="4057650"/>
+            <a:ext cx="2171700" cy="419100"/>
+          </a:xfrm>
+          <a:prstGeom prst="rect">
+            <a:avLst/>
+          </a:prstGeom>
+          <a:noFill/>
+        </p:spPr>
+        <p:txBody>
+          <a:bodyPr wrap="square" lIns="0" rIns="0" tIns="0" bIns="0" anchor="ctr">
+            <a:spAutoFit/>
+          </a:bodyPr>
+          <a:lstStyle/>
+          <a:p>
+            <a:pPr algn="ctr">
+              <a:lnSpc>
+                <a:spcPct val="120000"/>
+              </a:lnSpc>
+            </a:pPr>
+            <a:r>
+              <a:rPr sz="1500" b="1" i="0">
+                <a:solidFill>
+                  <a:srgbClr val="31662F"/>
+                </a:solidFill>
+                <a:latin typeface="Montserrat"/>
+              </a:rPr>
+              <a:t>Tommy Tepper</a:t>
+            </a:r>
+          </a:p>
+        </p:txBody>
+      </p:sp>
       <p:pic>
         <p:nvPicPr>
-          <p:cNvPr id="3" name="Picture 2" descr="270839184274801550.jpg"/>
+          <p:cNvPr id="7" name="Picture 6" descr="7427239733233723794.jpg"/>
           <p:cNvPicPr>
             <a:picLocks noChangeAspect="1"/>
           </p:cNvPicPr>
@@ -3627,17 +3790,102 @@
         </p:blipFill>
         <p:spPr>
           <a:xfrm>
-            <a:off x="6082222" y="2139433"/>
-            <a:ext cx="1428750" cy="1428750"/>
-          </a:xfrm>
-          <a:prstGeom prst="ellipse">
+            <a:off x="2819400" y="2190750"/>
+            <a:ext cx="2286000" cy="2286000"/>
+          </a:xfrm>
+          <a:prstGeom prst="rect">
             <a:avLst/>
           </a:prstGeom>
         </p:spPr>
       </p:pic>
+      <p:sp>
+        <p:nvSpPr>
+          <p:cNvPr id="8" name="Rectangle 7"/>
+          <p:cNvSpPr/>
+          <p:nvPr/>
+        </p:nvSpPr>
+        <p:spPr>
+          <a:xfrm>
+            <a:off x="2819400" y="4057650"/>
+            <a:ext cx="2286000" cy="419100"/>
+          </a:xfrm>
+          <a:prstGeom prst="rect">
+            <a:avLst/>
+          </a:prstGeom>
+          <a:solidFill>
+            <a:srgbClr val="F3F1EA">
+              <a:alpha val="88000"/>
+            </a:srgbClr>
+          </a:solidFill>
+          <a:ln>
+            <a:noFill/>
+          </a:ln>
+          <a:effectLst/>
+        </p:spPr>
+        <p:style>
+          <a:lnRef idx="1">
+            <a:schemeClr val="accent1"/>
+          </a:lnRef>
+          <a:fillRef idx="3">
+            <a:schemeClr val="accent1"/>
+          </a:fillRef>
+          <a:effectRef idx="2">
+            <a:schemeClr val="accent1"/>
+          </a:effectRef>
+          <a:fontRef idx="minor">
+            <a:schemeClr val="lt1"/>
+          </a:fontRef>
+        </p:style>
+        <p:txBody>
+          <a:bodyPr rtlCol="0" anchor="ctr"/>
+          <a:lstStyle/>
+          <a:p>
+            <a:pPr algn="ctr"/>
+          </a:p>
+        </p:txBody>
+      </p:sp>
+      <p:sp>
+        <p:nvSpPr>
+          <p:cNvPr id="9" name="TextBox 8"/>
+          <p:cNvSpPr txBox="1"/>
+          <p:nvPr/>
+        </p:nvSpPr>
+        <p:spPr>
+          <a:xfrm>
+            <a:off x="2876550" y="4057650"/>
+            <a:ext cx="2171700" cy="419100"/>
+          </a:xfrm>
+          <a:prstGeom prst="rect">
+            <a:avLst/>
+          </a:prstGeom>
+          <a:noFill/>
+        </p:spPr>
+        <p:txBody>
+          <a:bodyPr wrap="square" lIns="0" rIns="0" tIns="0" bIns="0" anchor="ctr">
+            <a:spAutoFit/>
+          </a:bodyPr>
+          <a:lstStyle/>
+          <a:p>
+            <a:pPr algn="ctr">
+              <a:lnSpc>
+                <a:spcPct val="120000"/>
+              </a:lnSpc>
+            </a:pPr>
+            <a:r>
+              <a:rPr sz="1500" b="1" i="0">
+                <a:solidFill>
+                  <a:srgbClr val="31662F"/>
+                </a:solidFill>
+                <a:latin typeface="Montserrat"/>
+              </a:rPr>
+              <a:t>Loida Vasquez</a:t>
+            </a:r>
+          </a:p>
+        </p:txBody>
+      </p:sp>
       <p:pic>
         <p:nvPicPr>
-          <p:cNvPr id="4" name="Picture 3" descr="8965205448481223204.jpg"/>
+          <p:cNvPr id="10" name="Picture 9" descr="6023360388099870640.jpg"/>
           <p:cNvPicPr>
             <a:picLocks noChangeAspect="1"/>
           </p:cNvPicPr>
@@ -3651,17 +3899,102 @@
         </p:blipFill>
         <p:spPr>
           <a:xfrm>
-            <a:off x="7407902" y="3196628"/>
-            <a:ext cx="1428750" cy="1428750"/>
-          </a:xfrm>
-          <a:prstGeom prst="ellipse">
+            <a:off x="5181600" y="2190750"/>
+            <a:ext cx="2286000" cy="2286000"/>
+          </a:xfrm>
+          <a:prstGeom prst="rect">
             <a:avLst/>
           </a:prstGeom>
         </p:spPr>
       </p:pic>
+      <p:sp>
+        <p:nvSpPr>
+          <p:cNvPr id="11" name="Rectangle 10"/>
+          <p:cNvSpPr/>
+          <p:nvPr/>
+        </p:nvSpPr>
+        <p:spPr>
+          <a:xfrm>
+            <a:off x="5181600" y="4057650"/>
+            <a:ext cx="2286000" cy="419100"/>
+          </a:xfrm>
+          <a:prstGeom prst="rect">
+            <a:avLst/>
+          </a:prstGeom>
+          <a:solidFill>
+            <a:srgbClr val="F3F1EA">
+              <a:alpha val="88000"/>
+            </a:srgbClr>
+          </a:solidFill>
+          <a:ln>
+            <a:noFill/>
+          </a:ln>
+          <a:effectLst/>
+        </p:spPr>
+        <p:style>
+          <a:lnRef idx="1">
+            <a:schemeClr val="accent1"/>
+          </a:lnRef>
+          <a:fillRef idx="3">
+            <a:schemeClr val="accent1"/>
+          </a:fillRef>
+          <a:effectRef idx="2">
+            <a:schemeClr val="accent1"/>
+          </a:effectRef>
+          <a:fontRef idx="minor">
+            <a:schemeClr val="lt1"/>
+          </a:fontRef>
+        </p:style>
+        <p:txBody>
+          <a:bodyPr rtlCol="0" anchor="ctr"/>
+          <a:lstStyle/>
+          <a:p>
+            <a:pPr algn="ctr"/>
+          </a:p>
+        </p:txBody>
+      </p:sp>
+      <p:sp>
+        <p:nvSpPr>
+          <p:cNvPr id="12" name="TextBox 11"/>
+          <p:cNvSpPr txBox="1"/>
+          <p:nvPr/>
+        </p:nvSpPr>
+        <p:spPr>
+          <a:xfrm>
+            <a:off x="5238750" y="4057650"/>
+            <a:ext cx="2171700" cy="419100"/>
+          </a:xfrm>
+          <a:prstGeom prst="rect">
+            <a:avLst/>
+          </a:prstGeom>
+          <a:noFill/>
+        </p:spPr>
+        <p:txBody>
+          <a:bodyPr wrap="square" lIns="0" rIns="0" tIns="0" bIns="0" anchor="ctr">
+            <a:spAutoFit/>
+          </a:bodyPr>
+          <a:lstStyle/>
+          <a:p>
+            <a:pPr algn="ctr">
+              <a:lnSpc>
+                <a:spcPct val="120000"/>
+              </a:lnSpc>
+            </a:pPr>
+            <a:r>
+              <a:rPr sz="1500" b="1" i="0">
+                <a:solidFill>
+                  <a:srgbClr val="31662F"/>
+                </a:solidFill>
+                <a:latin typeface="Montserrat"/>
+              </a:rPr>
+              <a:t>Carla Portugal</a:t>
+            </a:r>
+          </a:p>
+        </p:txBody>
+      </p:sp>
       <p:pic>
         <p:nvPicPr>
-          <p:cNvPr id="5" name="Picture 4" descr="285763652331973787.jpg"/>
+          <p:cNvPr id="13" name="Picture 12" descr="8080359357829165426.jpg"/>
           <p:cNvPicPr>
             <a:picLocks noChangeAspect="1"/>
           </p:cNvPicPr>
@@ -3675,17 +4008,102 @@
         </p:blipFill>
         <p:spPr>
           <a:xfrm>
-            <a:off x="8143600" y="4724320"/>
-            <a:ext cx="1428750" cy="1428750"/>
-          </a:xfrm>
-          <a:prstGeom prst="ellipse">
+            <a:off x="7543800" y="2190750"/>
+            <a:ext cx="2286000" cy="2286000"/>
+          </a:xfrm>
+          <a:prstGeom prst="rect">
             <a:avLst/>
           </a:prstGeom>
         </p:spPr>
       </p:pic>
+      <p:sp>
+        <p:nvSpPr>
+          <p:cNvPr id="14" name="Rectangle 13"/>
+          <p:cNvSpPr/>
+          <p:nvPr/>
+        </p:nvSpPr>
+        <p:spPr>
+          <a:xfrm>
+            <a:off x="7543800" y="4057650"/>
+            <a:ext cx="2286000" cy="419100"/>
+          </a:xfrm>
+          <a:prstGeom prst="rect">
+            <a:avLst/>
+          </a:prstGeom>
+          <a:solidFill>
+            <a:srgbClr val="F3F1EA">
+              <a:alpha val="88000"/>
+            </a:srgbClr>
+          </a:solidFill>
+          <a:ln>
+            <a:noFill/>
+          </a:ln>
+          <a:effectLst/>
+        </p:spPr>
+        <p:style>
+          <a:lnRef idx="1">
+            <a:schemeClr val="accent1"/>
+          </a:lnRef>
+          <a:fillRef idx="3">
+            <a:schemeClr val="accent1"/>
+          </a:fillRef>
+          <a:effectRef idx="2">
+            <a:schemeClr val="accent1"/>
+          </a:effectRef>
+          <a:fontRef idx="minor">
+            <a:schemeClr val="lt1"/>
+          </a:fontRef>
+        </p:style>
+        <p:txBody>
+          <a:bodyPr rtlCol="0" anchor="ctr"/>
+          <a:lstStyle/>
+          <a:p>
+            <a:pPr algn="ctr"/>
+          </a:p>
+        </p:txBody>
+      </p:sp>
+      <p:sp>
+        <p:nvSpPr>
+          <p:cNvPr id="15" name="TextBox 14"/>
+          <p:cNvSpPr txBox="1"/>
+          <p:nvPr/>
+        </p:nvSpPr>
+        <p:spPr>
+          <a:xfrm>
+            <a:off x="7600950" y="4057650"/>
+            <a:ext cx="2171700" cy="419100"/>
+          </a:xfrm>
+          <a:prstGeom prst="rect">
+            <a:avLst/>
+          </a:prstGeom>
+          <a:noFill/>
+        </p:spPr>
+        <p:txBody>
+          <a:bodyPr wrap="square" lIns="0" rIns="0" tIns="0" bIns="0" anchor="ctr">
+            <a:spAutoFit/>
+          </a:bodyPr>
+          <a:lstStyle/>
+          <a:p>
+            <a:pPr algn="ctr">
+              <a:lnSpc>
+                <a:spcPct val="120000"/>
+              </a:lnSpc>
+            </a:pPr>
+            <a:r>
+              <a:rPr sz="1500" b="1" i="0">
+                <a:solidFill>
+                  <a:srgbClr val="31662F"/>
+                </a:solidFill>
+                <a:latin typeface="Montserrat"/>
+              </a:rPr>
+              <a:t>Wesley Sanders</a:t>
+            </a:r>
+          </a:p>
+        </p:txBody>
+      </p:sp>
       <p:pic>
         <p:nvPicPr>
-          <p:cNvPr id="6" name="Picture 5" descr="7991381838209824102.jpg"/>
+          <p:cNvPr id="16" name="Picture 15" descr="1974356426881197837.jpg"/>
           <p:cNvPicPr>
             <a:picLocks noChangeAspect="1"/>
           </p:cNvPicPr>
@@ -3699,17 +4117,102 @@
         </p:blipFill>
         <p:spPr>
           <a:xfrm>
-            <a:off x="8143600" y="6419929"/>
-            <a:ext cx="1428750" cy="1428750"/>
-          </a:xfrm>
-          <a:prstGeom prst="ellipse">
+            <a:off x="457200" y="4552950"/>
+            <a:ext cx="2286000" cy="2286000"/>
+          </a:xfrm>
+          <a:prstGeom prst="rect">
             <a:avLst/>
           </a:prstGeom>
         </p:spPr>
       </p:pic>
+      <p:sp>
+        <p:nvSpPr>
+          <p:cNvPr id="17" name="Rectangle 16"/>
+          <p:cNvSpPr/>
+          <p:nvPr/>
+        </p:nvSpPr>
+        <p:spPr>
+          <a:xfrm>
+            <a:off x="457200" y="6419850"/>
+            <a:ext cx="2286000" cy="419100"/>
+          </a:xfrm>
+          <a:prstGeom prst="rect">
+            <a:avLst/>
+          </a:prstGeom>
+          <a:solidFill>
+            <a:srgbClr val="F3F1EA">
+              <a:alpha val="88000"/>
+            </a:srgbClr>
+          </a:solidFill>
+          <a:ln>
+            <a:noFill/>
+          </a:ln>
+          <a:effectLst/>
+        </p:spPr>
+        <p:style>
+          <a:lnRef idx="1">
+            <a:schemeClr val="accent1"/>
+          </a:lnRef>
+          <a:fillRef idx="3">
+            <a:schemeClr val="accent1"/>
+          </a:fillRef>
+          <a:effectRef idx="2">
+            <a:schemeClr val="accent1"/>
+          </a:effectRef>
+          <a:fontRef idx="minor">
+            <a:schemeClr val="lt1"/>
+          </a:fontRef>
+        </p:style>
+        <p:txBody>
+          <a:bodyPr rtlCol="0" anchor="ctr"/>
+          <a:lstStyle/>
+          <a:p>
+            <a:pPr algn="ctr"/>
+          </a:p>
+        </p:txBody>
+      </p:sp>
+      <p:sp>
+        <p:nvSpPr>
+          <p:cNvPr id="18" name="TextBox 17"/>
+          <p:cNvSpPr txBox="1"/>
+          <p:nvPr/>
+        </p:nvSpPr>
+        <p:spPr>
+          <a:xfrm>
+            <a:off x="514350" y="6419850"/>
+            <a:ext cx="2171700" cy="419100"/>
+          </a:xfrm>
+          <a:prstGeom prst="rect">
+            <a:avLst/>
+          </a:prstGeom>
+          <a:noFill/>
+        </p:spPr>
+        <p:txBody>
+          <a:bodyPr wrap="square" lIns="0" rIns="0" tIns="0" bIns="0" anchor="ctr">
+            <a:spAutoFit/>
+          </a:bodyPr>
+          <a:lstStyle/>
+          <a:p>
+            <a:pPr algn="ctr">
+              <a:lnSpc>
+                <a:spcPct val="120000"/>
+              </a:lnSpc>
+            </a:pPr>
+            <a:r>
+              <a:rPr sz="1500" b="1" i="0">
+                <a:solidFill>
+                  <a:srgbClr val="31662F"/>
+                </a:solidFill>
+                <a:latin typeface="Montserrat"/>
+              </a:rPr>
+              <a:t>Casey Williams</a:t>
+            </a:r>
+          </a:p>
+        </p:txBody>
+      </p:sp>
       <p:pic>
         <p:nvPicPr>
-          <p:cNvPr id="7" name="Picture 6" descr="2189288300182337968.jpg"/>
+          <p:cNvPr id="19" name="Picture 18" descr="3027816981463207685.jpg"/>
           <p:cNvPicPr>
             <a:picLocks noChangeAspect="1"/>
           </p:cNvPicPr>
@@ -3723,17 +4226,102 @@
         </p:blipFill>
         <p:spPr>
           <a:xfrm>
-            <a:off x="7407902" y="7947621"/>
-            <a:ext cx="1428750" cy="1428750"/>
-          </a:xfrm>
-          <a:prstGeom prst="ellipse">
+            <a:off x="2819400" y="4552950"/>
+            <a:ext cx="2286000" cy="2286000"/>
+          </a:xfrm>
+          <a:prstGeom prst="rect">
             <a:avLst/>
           </a:prstGeom>
         </p:spPr>
       </p:pic>
+      <p:sp>
+        <p:nvSpPr>
+          <p:cNvPr id="20" name="Rectangle 19"/>
+          <p:cNvSpPr/>
+          <p:nvPr/>
+        </p:nvSpPr>
+        <p:spPr>
+          <a:xfrm>
+            <a:off x="2819400" y="6419850"/>
+            <a:ext cx="2286000" cy="419100"/>
+          </a:xfrm>
+          <a:prstGeom prst="rect">
+            <a:avLst/>
+          </a:prstGeom>
+          <a:solidFill>
+            <a:srgbClr val="F3F1EA">
+              <a:alpha val="88000"/>
+            </a:srgbClr>
+          </a:solidFill>
+          <a:ln>
+            <a:noFill/>
+          </a:ln>
+          <a:effectLst/>
+        </p:spPr>
+        <p:style>
+          <a:lnRef idx="1">
+            <a:schemeClr val="accent1"/>
+          </a:lnRef>
+          <a:fillRef idx="3">
+            <a:schemeClr val="accent1"/>
+          </a:fillRef>
+          <a:effectRef idx="2">
+            <a:schemeClr val="accent1"/>
+          </a:effectRef>
+          <a:fontRef idx="minor">
+            <a:schemeClr val="lt1"/>
+          </a:fontRef>
+        </p:style>
+        <p:txBody>
+          <a:bodyPr rtlCol="0" anchor="ctr"/>
+          <a:lstStyle/>
+          <a:p>
+            <a:pPr algn="ctr"/>
+          </a:p>
+        </p:txBody>
+      </p:sp>
+      <p:sp>
+        <p:nvSpPr>
+          <p:cNvPr id="21" name="TextBox 20"/>
+          <p:cNvSpPr txBox="1"/>
+          <p:nvPr/>
+        </p:nvSpPr>
+        <p:spPr>
+          <a:xfrm>
+            <a:off x="2876550" y="6419850"/>
+            <a:ext cx="2171700" cy="419100"/>
+          </a:xfrm>
+          <a:prstGeom prst="rect">
+            <a:avLst/>
+          </a:prstGeom>
+          <a:noFill/>
+        </p:spPr>
+        <p:txBody>
+          <a:bodyPr wrap="square" lIns="0" rIns="0" tIns="0" bIns="0" anchor="ctr">
+            <a:spAutoFit/>
+          </a:bodyPr>
+          <a:lstStyle/>
+          <a:p>
+            <a:pPr algn="ctr">
+              <a:lnSpc>
+                <a:spcPct val="120000"/>
+              </a:lnSpc>
+            </a:pPr>
+            <a:r>
+              <a:rPr sz="1500" b="1" i="0">
+                <a:solidFill>
+                  <a:srgbClr val="31662F"/>
+                </a:solidFill>
+                <a:latin typeface="Montserrat"/>
+              </a:rPr>
+              <a:t>Brian Daubenspeck</a:t>
+            </a:r>
+          </a:p>
+        </p:txBody>
+      </p:sp>
       <p:pic>
         <p:nvPicPr>
-          <p:cNvPr id="8" name="Picture 7" descr="7321021237568053018.jpg"/>
+          <p:cNvPr id="22" name="Picture 21" descr="6422877592201863816.jpg"/>
           <p:cNvPicPr>
             <a:picLocks noChangeAspect="1"/>
           </p:cNvPicPr>
@@ -3747,17 +4335,102 @@
         </p:blipFill>
         <p:spPr>
           <a:xfrm>
-            <a:off x="6082222" y="9004816"/>
-            <a:ext cx="1428750" cy="1428750"/>
-          </a:xfrm>
-          <a:prstGeom prst="ellipse">
+            <a:off x="5181600" y="4552950"/>
+            <a:ext cx="2286000" cy="2286000"/>
+          </a:xfrm>
+          <a:prstGeom prst="rect">
             <a:avLst/>
           </a:prstGeom>
         </p:spPr>
       </p:pic>
+      <p:sp>
+        <p:nvSpPr>
+          <p:cNvPr id="23" name="Rectangle 22"/>
+          <p:cNvSpPr/>
+          <p:nvPr/>
+        </p:nvSpPr>
+        <p:spPr>
+          <a:xfrm>
+            <a:off x="5181600" y="6419850"/>
+            <a:ext cx="2286000" cy="419100"/>
+          </a:xfrm>
+          <a:prstGeom prst="rect">
+            <a:avLst/>
+          </a:prstGeom>
+          <a:solidFill>
+            <a:srgbClr val="F3F1EA">
+              <a:alpha val="88000"/>
+            </a:srgbClr>
+          </a:solidFill>
+          <a:ln>
+            <a:noFill/>
+          </a:ln>
+          <a:effectLst/>
+        </p:spPr>
+        <p:style>
+          <a:lnRef idx="1">
+            <a:schemeClr val="accent1"/>
+          </a:lnRef>
+          <a:fillRef idx="3">
+            <a:schemeClr val="accent1"/>
+          </a:fillRef>
+          <a:effectRef idx="2">
+            <a:schemeClr val="accent1"/>
+          </a:effectRef>
+          <a:fontRef idx="minor">
+            <a:schemeClr val="lt1"/>
+          </a:fontRef>
+        </p:style>
+        <p:txBody>
+          <a:bodyPr rtlCol="0" anchor="ctr"/>
+          <a:lstStyle/>
+          <a:p>
+            <a:pPr algn="ctr"/>
+          </a:p>
+        </p:txBody>
+      </p:sp>
+      <p:sp>
+        <p:nvSpPr>
+          <p:cNvPr id="24" name="TextBox 23"/>
+          <p:cNvSpPr txBox="1"/>
+          <p:nvPr/>
+        </p:nvSpPr>
+        <p:spPr>
+          <a:xfrm>
+            <a:off x="5238750" y="6419850"/>
+            <a:ext cx="2171700" cy="419100"/>
+          </a:xfrm>
+          <a:prstGeom prst="rect">
+            <a:avLst/>
+          </a:prstGeom>
+          <a:noFill/>
+        </p:spPr>
+        <p:txBody>
+          <a:bodyPr wrap="square" lIns="0" rIns="0" tIns="0" bIns="0" anchor="ctr">
+            <a:spAutoFit/>
+          </a:bodyPr>
+          <a:lstStyle/>
+          <a:p>
+            <a:pPr algn="ctr">
+              <a:lnSpc>
+                <a:spcPct val="120000"/>
+              </a:lnSpc>
+            </a:pPr>
+            <a:r>
+              <a:rPr sz="1500" b="1" i="0">
+                <a:solidFill>
+                  <a:srgbClr val="31662F"/>
+                </a:solidFill>
+                <a:latin typeface="Montserrat"/>
+              </a:rPr>
+              <a:t>Isadora Schmidt</a:t>
+            </a:r>
+          </a:p>
+        </p:txBody>
+      </p:sp>
       <p:pic>
         <p:nvPicPr>
-          <p:cNvPr id="9" name="Picture 8" descr="5135599096327703520.jpg"/>
+          <p:cNvPr id="25" name="Picture 24" descr="5196354255928742527.jpg"/>
           <p:cNvPicPr>
             <a:picLocks noChangeAspect="1"/>
           </p:cNvPicPr>
@@ -3771,17 +4444,102 @@
         </p:blipFill>
         <p:spPr>
           <a:xfrm>
-            <a:off x="4429125" y="9382125"/>
-            <a:ext cx="1428750" cy="1428750"/>
-          </a:xfrm>
-          <a:prstGeom prst="ellipse">
+            <a:off x="7543800" y="4552950"/>
+            <a:ext cx="2286000" cy="2286000"/>
+          </a:xfrm>
+          <a:prstGeom prst="rect">
             <a:avLst/>
           </a:prstGeom>
         </p:spPr>
       </p:pic>
+      <p:sp>
+        <p:nvSpPr>
+          <p:cNvPr id="26" name="Rectangle 25"/>
+          <p:cNvSpPr/>
+          <p:nvPr/>
+        </p:nvSpPr>
+        <p:spPr>
+          <a:xfrm>
+            <a:off x="7543800" y="6419850"/>
+            <a:ext cx="2286000" cy="419100"/>
+          </a:xfrm>
+          <a:prstGeom prst="rect">
+            <a:avLst/>
+          </a:prstGeom>
+          <a:solidFill>
+            <a:srgbClr val="F3F1EA">
+              <a:alpha val="88000"/>
+            </a:srgbClr>
+          </a:solidFill>
+          <a:ln>
+            <a:noFill/>
+          </a:ln>
+          <a:effectLst/>
+        </p:spPr>
+        <p:style>
+          <a:lnRef idx="1">
+            <a:schemeClr val="accent1"/>
+          </a:lnRef>
+          <a:fillRef idx="3">
+            <a:schemeClr val="accent1"/>
+          </a:fillRef>
+          <a:effectRef idx="2">
+            <a:schemeClr val="accent1"/>
+          </a:effectRef>
+          <a:fontRef idx="minor">
+            <a:schemeClr val="lt1"/>
+          </a:fontRef>
+        </p:style>
+        <p:txBody>
+          <a:bodyPr rtlCol="0" anchor="ctr"/>
+          <a:lstStyle/>
+          <a:p>
+            <a:pPr algn="ctr"/>
+          </a:p>
+        </p:txBody>
+      </p:sp>
+      <p:sp>
+        <p:nvSpPr>
+          <p:cNvPr id="27" name="TextBox 26"/>
+          <p:cNvSpPr txBox="1"/>
+          <p:nvPr/>
+        </p:nvSpPr>
+        <p:spPr>
+          <a:xfrm>
+            <a:off x="7600950" y="6419850"/>
+            <a:ext cx="2171700" cy="419100"/>
+          </a:xfrm>
+          <a:prstGeom prst="rect">
+            <a:avLst/>
+          </a:prstGeom>
+          <a:noFill/>
+        </p:spPr>
+        <p:txBody>
+          <a:bodyPr wrap="square" lIns="0" rIns="0" tIns="0" bIns="0" anchor="ctr">
+            <a:spAutoFit/>
+          </a:bodyPr>
+          <a:lstStyle/>
+          <a:p>
+            <a:pPr algn="ctr">
+              <a:lnSpc>
+                <a:spcPct val="120000"/>
+              </a:lnSpc>
+            </a:pPr>
+            <a:r>
+              <a:rPr sz="1500" b="1" i="0">
+                <a:solidFill>
+                  <a:srgbClr val="31662F"/>
+                </a:solidFill>
+                <a:latin typeface="Montserrat"/>
+              </a:rPr>
+              <a:t>Aysen Ustunay</a:t>
+            </a:r>
+          </a:p>
+        </p:txBody>
+      </p:sp>
       <p:pic>
         <p:nvPicPr>
-          <p:cNvPr id="10" name="Picture 9" descr="6736482620531132686.jpg"/>
+          <p:cNvPr id="28" name="Picture 27" descr="1839049045767413403.jpg"/>
           <p:cNvPicPr>
             <a:picLocks noChangeAspect="1"/>
           </p:cNvPicPr>
@@ -3795,17 +4553,102 @@
         </p:blipFill>
         <p:spPr>
           <a:xfrm>
-            <a:off x="2776027" y="9004816"/>
-            <a:ext cx="1428750" cy="1428750"/>
-          </a:xfrm>
-          <a:prstGeom prst="ellipse">
+            <a:off x="457200" y="6915150"/>
+            <a:ext cx="2286000" cy="2286000"/>
+          </a:xfrm>
+          <a:prstGeom prst="rect">
             <a:avLst/>
           </a:prstGeom>
         </p:spPr>
       </p:pic>
+      <p:sp>
+        <p:nvSpPr>
+          <p:cNvPr id="29" name="Rectangle 28"/>
+          <p:cNvSpPr/>
+          <p:nvPr/>
+        </p:nvSpPr>
+        <p:spPr>
+          <a:xfrm>
+            <a:off x="457200" y="8782050"/>
+            <a:ext cx="2286000" cy="419100"/>
+          </a:xfrm>
+          <a:prstGeom prst="rect">
+            <a:avLst/>
+          </a:prstGeom>
+          <a:solidFill>
+            <a:srgbClr val="F3F1EA">
+              <a:alpha val="88000"/>
+            </a:srgbClr>
+          </a:solidFill>
+          <a:ln>
+            <a:noFill/>
+          </a:ln>
+          <a:effectLst/>
+        </p:spPr>
+        <p:style>
+          <a:lnRef idx="1">
+            <a:schemeClr val="accent1"/>
+          </a:lnRef>
+          <a:fillRef idx="3">
+            <a:schemeClr val="accent1"/>
+          </a:fillRef>
+          <a:effectRef idx="2">
+            <a:schemeClr val="accent1"/>
+          </a:effectRef>
+          <a:fontRef idx="minor">
+            <a:schemeClr val="lt1"/>
+          </a:fontRef>
+        </p:style>
+        <p:txBody>
+          <a:bodyPr rtlCol="0" anchor="ctr"/>
+          <a:lstStyle/>
+          <a:p>
+            <a:pPr algn="ctr"/>
+          </a:p>
+        </p:txBody>
+      </p:sp>
+      <p:sp>
+        <p:nvSpPr>
+          <p:cNvPr id="30" name="TextBox 29"/>
+          <p:cNvSpPr txBox="1"/>
+          <p:nvPr/>
+        </p:nvSpPr>
+        <p:spPr>
+          <a:xfrm>
+            <a:off x="514350" y="8782050"/>
+            <a:ext cx="2171700" cy="419100"/>
+          </a:xfrm>
+          <a:prstGeom prst="rect">
+            <a:avLst/>
+          </a:prstGeom>
+          <a:noFill/>
+        </p:spPr>
+        <p:txBody>
+          <a:bodyPr wrap="square" lIns="0" rIns="0" tIns="0" bIns="0" anchor="ctr">
+            <a:spAutoFit/>
+          </a:bodyPr>
+          <a:lstStyle/>
+          <a:p>
+            <a:pPr algn="ctr">
+              <a:lnSpc>
+                <a:spcPct val="120000"/>
+              </a:lnSpc>
+            </a:pPr>
+            <a:r>
+              <a:rPr sz="1500" b="1" i="0">
+                <a:solidFill>
+                  <a:srgbClr val="31662F"/>
+                </a:solidFill>
+                <a:latin typeface="Montserrat"/>
+              </a:rPr>
+              <a:t>Dora Tkalec</a:t>
+            </a:r>
+          </a:p>
+        </p:txBody>
+      </p:sp>
       <p:pic>
         <p:nvPicPr>
-          <p:cNvPr id="11" name="Picture 10" descr="5937994128790662582.jpg"/>
+          <p:cNvPr id="31" name="Picture 30" descr="3635735852169036292.jpg"/>
           <p:cNvPicPr>
             <a:picLocks noChangeAspect="1"/>
           </p:cNvPicPr>
@@ -3819,17 +4662,102 @@
         </p:blipFill>
         <p:spPr>
           <a:xfrm>
-            <a:off x="1450347" y="7947621"/>
-            <a:ext cx="1428750" cy="1428750"/>
-          </a:xfrm>
-          <a:prstGeom prst="ellipse">
+            <a:off x="2819400" y="6915150"/>
+            <a:ext cx="2286000" cy="2286000"/>
+          </a:xfrm>
+          <a:prstGeom prst="rect">
             <a:avLst/>
           </a:prstGeom>
         </p:spPr>
       </p:pic>
+      <p:sp>
+        <p:nvSpPr>
+          <p:cNvPr id="32" name="Rectangle 31"/>
+          <p:cNvSpPr/>
+          <p:nvPr/>
+        </p:nvSpPr>
+        <p:spPr>
+          <a:xfrm>
+            <a:off x="2819400" y="8782050"/>
+            <a:ext cx="2286000" cy="419100"/>
+          </a:xfrm>
+          <a:prstGeom prst="rect">
+            <a:avLst/>
+          </a:prstGeom>
+          <a:solidFill>
+            <a:srgbClr val="F3F1EA">
+              <a:alpha val="88000"/>
+            </a:srgbClr>
+          </a:solidFill>
+          <a:ln>
+            <a:noFill/>
+          </a:ln>
+          <a:effectLst/>
+        </p:spPr>
+        <p:style>
+          <a:lnRef idx="1">
+            <a:schemeClr val="accent1"/>
+          </a:lnRef>
+          <a:fillRef idx="3">
+            <a:schemeClr val="accent1"/>
+          </a:fillRef>
+          <a:effectRef idx="2">
+            <a:schemeClr val="accent1"/>
+          </a:effectRef>
+          <a:fontRef idx="minor">
+            <a:schemeClr val="lt1"/>
+          </a:fontRef>
+        </p:style>
+        <p:txBody>
+          <a:bodyPr rtlCol="0" anchor="ctr"/>
+          <a:lstStyle/>
+          <a:p>
+            <a:pPr algn="ctr"/>
+          </a:p>
+        </p:txBody>
+      </p:sp>
+      <p:sp>
+        <p:nvSpPr>
+          <p:cNvPr id="33" name="TextBox 32"/>
+          <p:cNvSpPr txBox="1"/>
+          <p:nvPr/>
+        </p:nvSpPr>
+        <p:spPr>
+          <a:xfrm>
+            <a:off x="2876550" y="8782050"/>
+            <a:ext cx="2171700" cy="419100"/>
+          </a:xfrm>
+          <a:prstGeom prst="rect">
+            <a:avLst/>
+          </a:prstGeom>
+          <a:noFill/>
+        </p:spPr>
+        <p:txBody>
+          <a:bodyPr wrap="square" lIns="0" rIns="0" tIns="0" bIns="0" anchor="ctr">
+            <a:spAutoFit/>
+          </a:bodyPr>
+          <a:lstStyle/>
+          <a:p>
+            <a:pPr algn="ctr">
+              <a:lnSpc>
+                <a:spcPct val="120000"/>
+              </a:lnSpc>
+            </a:pPr>
+            <a:r>
+              <a:rPr sz="1500" b="1" i="0">
+                <a:solidFill>
+                  <a:srgbClr val="31662F"/>
+                </a:solidFill>
+                <a:latin typeface="Montserrat"/>
+              </a:rPr>
+              <a:t>Gerald Ramirez</a:t>
+            </a:r>
+          </a:p>
+        </p:txBody>
+      </p:sp>
       <p:pic>
         <p:nvPicPr>
-          <p:cNvPr id="12" name="Picture 11" descr="5464189418951635024.jpg"/>
+          <p:cNvPr id="34" name="Picture 33" descr="5747755529844054742.jpg"/>
           <p:cNvPicPr>
             <a:picLocks noChangeAspect="1"/>
           </p:cNvPicPr>
@@ -3843,17 +4771,102 @@
         </p:blipFill>
         <p:spPr>
           <a:xfrm>
-            <a:off x="714649" y="6419929"/>
-            <a:ext cx="1428750" cy="1428750"/>
-          </a:xfrm>
-          <a:prstGeom prst="ellipse">
+            <a:off x="5181600" y="6915150"/>
+            <a:ext cx="2286000" cy="2286000"/>
+          </a:xfrm>
+          <a:prstGeom prst="rect">
             <a:avLst/>
           </a:prstGeom>
         </p:spPr>
       </p:pic>
+      <p:sp>
+        <p:nvSpPr>
+          <p:cNvPr id="35" name="Rectangle 34"/>
+          <p:cNvSpPr/>
+          <p:nvPr/>
+        </p:nvSpPr>
+        <p:spPr>
+          <a:xfrm>
+            <a:off x="5181600" y="8782050"/>
+            <a:ext cx="2286000" cy="419100"/>
+          </a:xfrm>
+          <a:prstGeom prst="rect">
+            <a:avLst/>
+          </a:prstGeom>
+          <a:solidFill>
+            <a:srgbClr val="F3F1EA">
+              <a:alpha val="88000"/>
+            </a:srgbClr>
+          </a:solidFill>
+          <a:ln>
+            <a:noFill/>
+          </a:ln>
+          <a:effectLst/>
+        </p:spPr>
+        <p:style>
+          <a:lnRef idx="1">
+            <a:schemeClr val="accent1"/>
+          </a:lnRef>
+          <a:fillRef idx="3">
+            <a:schemeClr val="accent1"/>
+          </a:fillRef>
+          <a:effectRef idx="2">
+            <a:schemeClr val="accent1"/>
+          </a:effectRef>
+          <a:fontRef idx="minor">
+            <a:schemeClr val="lt1"/>
+          </a:fontRef>
+        </p:style>
+        <p:txBody>
+          <a:bodyPr rtlCol="0" anchor="ctr"/>
+          <a:lstStyle/>
+          <a:p>
+            <a:pPr algn="ctr"/>
+          </a:p>
+        </p:txBody>
+      </p:sp>
+      <p:sp>
+        <p:nvSpPr>
+          <p:cNvPr id="36" name="TextBox 35"/>
+          <p:cNvSpPr txBox="1"/>
+          <p:nvPr/>
+        </p:nvSpPr>
+        <p:spPr>
+          <a:xfrm>
+            <a:off x="5238750" y="8782050"/>
+            <a:ext cx="2171700" cy="419100"/>
+          </a:xfrm>
+          <a:prstGeom prst="rect">
+            <a:avLst/>
+          </a:prstGeom>
+          <a:noFill/>
+        </p:spPr>
+        <p:txBody>
+          <a:bodyPr wrap="square" lIns="0" rIns="0" tIns="0" bIns="0" anchor="ctr">
+            <a:spAutoFit/>
+          </a:bodyPr>
+          <a:lstStyle/>
+          <a:p>
+            <a:pPr algn="ctr">
+              <a:lnSpc>
+                <a:spcPct val="120000"/>
+              </a:lnSpc>
+            </a:pPr>
+            <a:r>
+              <a:rPr sz="1500" b="1" i="0">
+                <a:solidFill>
+                  <a:srgbClr val="31662F"/>
+                </a:solidFill>
+                <a:latin typeface="Montserrat"/>
+              </a:rPr>
+              <a:t>Elena Kalli</a:t>
+            </a:r>
+          </a:p>
+        </p:txBody>
+      </p:sp>
       <p:pic>
         <p:nvPicPr>
-          <p:cNvPr id="13" name="Picture 12" descr="1225087912104719970.jpg"/>
+          <p:cNvPr id="37" name="Picture 36" descr="8399190351064505002.jpg"/>
           <p:cNvPicPr>
             <a:picLocks noChangeAspect="1"/>
           </p:cNvPicPr>
@@ -3867,17 +4880,102 @@
         </p:blipFill>
         <p:spPr>
           <a:xfrm>
-            <a:off x="714649" y="4724320"/>
-            <a:ext cx="1428750" cy="1428750"/>
-          </a:xfrm>
-          <a:prstGeom prst="ellipse">
+            <a:off x="7543800" y="6915150"/>
+            <a:ext cx="2286000" cy="2286000"/>
+          </a:xfrm>
+          <a:prstGeom prst="rect">
             <a:avLst/>
           </a:prstGeom>
         </p:spPr>
       </p:pic>
+      <p:sp>
+        <p:nvSpPr>
+          <p:cNvPr id="38" name="Rectangle 37"/>
+          <p:cNvSpPr/>
+          <p:nvPr/>
+        </p:nvSpPr>
+        <p:spPr>
+          <a:xfrm>
+            <a:off x="7543800" y="8782050"/>
+            <a:ext cx="2286000" cy="419100"/>
+          </a:xfrm>
+          <a:prstGeom prst="rect">
+            <a:avLst/>
+          </a:prstGeom>
+          <a:solidFill>
+            <a:srgbClr val="F3F1EA">
+              <a:alpha val="88000"/>
+            </a:srgbClr>
+          </a:solidFill>
+          <a:ln>
+            <a:noFill/>
+          </a:ln>
+          <a:effectLst/>
+        </p:spPr>
+        <p:style>
+          <a:lnRef idx="1">
+            <a:schemeClr val="accent1"/>
+          </a:lnRef>
+          <a:fillRef idx="3">
+            <a:schemeClr val="accent1"/>
+          </a:fillRef>
+          <a:effectRef idx="2">
+            <a:schemeClr val="accent1"/>
+          </a:effectRef>
+          <a:fontRef idx="minor">
+            <a:schemeClr val="lt1"/>
+          </a:fontRef>
+        </p:style>
+        <p:txBody>
+          <a:bodyPr rtlCol="0" anchor="ctr"/>
+          <a:lstStyle/>
+          <a:p>
+            <a:pPr algn="ctr"/>
+          </a:p>
+        </p:txBody>
+      </p:sp>
+      <p:sp>
+        <p:nvSpPr>
+          <p:cNvPr id="39" name="TextBox 38"/>
+          <p:cNvSpPr txBox="1"/>
+          <p:nvPr/>
+        </p:nvSpPr>
+        <p:spPr>
+          <a:xfrm>
+            <a:off x="7600950" y="8782050"/>
+            <a:ext cx="2171700" cy="419100"/>
+          </a:xfrm>
+          <a:prstGeom prst="rect">
+            <a:avLst/>
+          </a:prstGeom>
+          <a:noFill/>
+        </p:spPr>
+        <p:txBody>
+          <a:bodyPr wrap="square" lIns="0" rIns="0" tIns="0" bIns="0" anchor="ctr">
+            <a:spAutoFit/>
+          </a:bodyPr>
+          <a:lstStyle/>
+          <a:p>
+            <a:pPr algn="ctr">
+              <a:lnSpc>
+                <a:spcPct val="120000"/>
+              </a:lnSpc>
+            </a:pPr>
+            <a:r>
+              <a:rPr sz="1500" b="1" i="0">
+                <a:solidFill>
+                  <a:srgbClr val="31662F"/>
+                </a:solidFill>
+                <a:latin typeface="Montserrat"/>
+              </a:rPr>
+              <a:t>Ib Borup Pederson</a:t>
+            </a:r>
+          </a:p>
+        </p:txBody>
+      </p:sp>
       <p:pic>
         <p:nvPicPr>
-          <p:cNvPr id="14" name="Picture 13" descr="3998957130580120792.jpg"/>
+          <p:cNvPr id="40" name="Picture 39" descr="5842563647999390999.jpg"/>
           <p:cNvPicPr>
             <a:picLocks noChangeAspect="1"/>
           </p:cNvPicPr>
@@ -3891,17 +4989,102 @@
         </p:blipFill>
         <p:spPr>
           <a:xfrm>
-            <a:off x="1450347" y="3196628"/>
-            <a:ext cx="1428750" cy="1428750"/>
-          </a:xfrm>
-          <a:prstGeom prst="ellipse">
+            <a:off x="457200" y="9277350"/>
+            <a:ext cx="2286000" cy="2286000"/>
+          </a:xfrm>
+          <a:prstGeom prst="rect">
             <a:avLst/>
           </a:prstGeom>
         </p:spPr>
       </p:pic>
+      <p:sp>
+        <p:nvSpPr>
+          <p:cNvPr id="41" name="Rectangle 40"/>
+          <p:cNvSpPr/>
+          <p:nvPr/>
+        </p:nvSpPr>
+        <p:spPr>
+          <a:xfrm>
+            <a:off x="457200" y="11144250"/>
+            <a:ext cx="2286000" cy="419100"/>
+          </a:xfrm>
+          <a:prstGeom prst="rect">
+            <a:avLst/>
+          </a:prstGeom>
+          <a:solidFill>
+            <a:srgbClr val="F3F1EA">
+              <a:alpha val="88000"/>
+            </a:srgbClr>
+          </a:solidFill>
+          <a:ln>
+            <a:noFill/>
+          </a:ln>
+          <a:effectLst/>
+        </p:spPr>
+        <p:style>
+          <a:lnRef idx="1">
+            <a:schemeClr val="accent1"/>
+          </a:lnRef>
+          <a:fillRef idx="3">
+            <a:schemeClr val="accent1"/>
+          </a:fillRef>
+          <a:effectRef idx="2">
+            <a:schemeClr val="accent1"/>
+          </a:effectRef>
+          <a:fontRef idx="minor">
+            <a:schemeClr val="lt1"/>
+          </a:fontRef>
+        </p:style>
+        <p:txBody>
+          <a:bodyPr rtlCol="0" anchor="ctr"/>
+          <a:lstStyle/>
+          <a:p>
+            <a:pPr algn="ctr"/>
+          </a:p>
+        </p:txBody>
+      </p:sp>
+      <p:sp>
+        <p:nvSpPr>
+          <p:cNvPr id="42" name="TextBox 41"/>
+          <p:cNvSpPr txBox="1"/>
+          <p:nvPr/>
+        </p:nvSpPr>
+        <p:spPr>
+          <a:xfrm>
+            <a:off x="514350" y="11144250"/>
+            <a:ext cx="2171700" cy="419100"/>
+          </a:xfrm>
+          <a:prstGeom prst="rect">
+            <a:avLst/>
+          </a:prstGeom>
+          <a:noFill/>
+        </p:spPr>
+        <p:txBody>
+          <a:bodyPr wrap="square" lIns="0" rIns="0" tIns="0" bIns="0" anchor="ctr">
+            <a:spAutoFit/>
+          </a:bodyPr>
+          <a:lstStyle/>
+          <a:p>
+            <a:pPr algn="ctr">
+              <a:lnSpc>
+                <a:spcPct val="120000"/>
+              </a:lnSpc>
+            </a:pPr>
+            <a:r>
+              <a:rPr sz="1500" b="1" i="0">
+                <a:solidFill>
+                  <a:srgbClr val="31662F"/>
+                </a:solidFill>
+                <a:latin typeface="Montserrat"/>
+              </a:rPr>
+              <a:t>Nick Padwick</a:t>
+            </a:r>
+          </a:p>
+        </p:txBody>
+      </p:sp>
       <p:pic>
         <p:nvPicPr>
-          <p:cNvPr id="15" name="Picture 14" descr="4098890409906302713.jpg"/>
+          <p:cNvPr id="43" name="Picture 42" descr="1503839733146406453.jpg"/>
           <p:cNvPicPr>
             <a:picLocks noChangeAspect="1"/>
           </p:cNvPicPr>
@@ -3915,24 +5098,70 @@
         </p:blipFill>
         <p:spPr>
           <a:xfrm>
-            <a:off x="2776027" y="2139433"/>
-            <a:ext cx="1428750" cy="1428750"/>
-          </a:xfrm>
-          <a:prstGeom prst="ellipse">
+            <a:off x="2819400" y="9277350"/>
+            <a:ext cx="2286000" cy="2286000"/>
+          </a:xfrm>
+          <a:prstGeom prst="rect">
             <a:avLst/>
           </a:prstGeom>
         </p:spPr>
       </p:pic>
       <p:sp>
         <p:nvSpPr>
-          <p:cNvPr id="16" name="TextBox 15"/>
+          <p:cNvPr id="44" name="Rectangle 43"/>
+          <p:cNvSpPr/>
+          <p:nvPr/>
+        </p:nvSpPr>
+        <p:spPr>
+          <a:xfrm>
+            <a:off x="2819400" y="11144250"/>
+            <a:ext cx="2286000" cy="419100"/>
+          </a:xfrm>
+          <a:prstGeom prst="rect">
+            <a:avLst/>
+          </a:prstGeom>
+          <a:solidFill>
+            <a:srgbClr val="F3F1EA">
+              <a:alpha val="88000"/>
+            </a:srgbClr>
+          </a:solidFill>
+          <a:ln>
+            <a:noFill/>
+          </a:ln>
+          <a:effectLst/>
+        </p:spPr>
+        <p:style>
+          <a:lnRef idx="1">
+            <a:schemeClr val="accent1"/>
+          </a:lnRef>
+          <a:fillRef idx="3">
+            <a:schemeClr val="accent1"/>
+          </a:fillRef>
+          <a:effectRef idx="2">
+            <a:schemeClr val="accent1"/>
+          </a:effectRef>
+          <a:fontRef idx="minor">
+            <a:schemeClr val="lt1"/>
+          </a:fontRef>
+        </p:style>
+        <p:txBody>
+          <a:bodyPr rtlCol="0" anchor="ctr"/>
+          <a:lstStyle/>
+          <a:p>
+            <a:pPr algn="ctr"/>
+          </a:p>
+        </p:txBody>
+      </p:sp>
+      <p:sp>
+        <p:nvSpPr>
+          <p:cNvPr id="45" name="TextBox 44"/>
           <p:cNvSpPr txBox="1"/>
           <p:nvPr/>
         </p:nvSpPr>
         <p:spPr>
           <a:xfrm>
-            <a:off x="2667000" y="4857750"/>
-            <a:ext cx="4953000" cy="381000"/>
+            <a:off x="2876550" y="11144250"/>
+            <a:ext cx="2171700" cy="419100"/>
           </a:xfrm>
           <a:prstGeom prst="rect">
             <a:avLst/>
@@ -3940,7 +5169,7 @@
           <a:noFill/>
         </p:spPr>
         <p:txBody>
-          <a:bodyPr wrap="square" lIns="0" rIns="0" tIns="0" bIns="0" anchor="t">
+          <a:bodyPr wrap="square" lIns="0" rIns="0" tIns="0" bIns="0" anchor="ctr">
             <a:spAutoFit/>
           </a:bodyPr>
           <a:lstStyle/>
@@ -3951,27 +5180,71 @@
               </a:lnSpc>
             </a:pPr>
             <a:r>
-              <a:rPr sz="2200" b="1" i="0" spc="400">
+              <a:rPr sz="1500" b="1" i="0">
                 <a:solidFill>
                   <a:srgbClr val="31662F"/>
                 </a:solidFill>
                 <a:latin typeface="Montserrat"/>
               </a:rPr>
-              <a:t>OCTOBER 5</a:t>
-            </a:r>
-          </a:p>
-        </p:txBody>
-      </p:sp>
-      <p:sp>
-        <p:nvSpPr>
-          <p:cNvPr id="17" name="TextBox 16"/>
+              <a:t>Delvin Solkinson</a:t>
+            </a:r>
+          </a:p>
+        </p:txBody>
+      </p:sp>
+      <p:sp>
+        <p:nvSpPr>
+          <p:cNvPr id="46" name="Rectangle 45"/>
+          <p:cNvSpPr/>
+          <p:nvPr/>
+        </p:nvSpPr>
+        <p:spPr>
+          <a:xfrm>
+            <a:off x="5181600" y="9277350"/>
+            <a:ext cx="2286000" cy="2286000"/>
+          </a:xfrm>
+          <a:prstGeom prst="rect">
+            <a:avLst/>
+          </a:prstGeom>
+          <a:solidFill>
+            <a:srgbClr val="31662F"/>
+          </a:solidFill>
+          <a:ln>
+            <a:noFill/>
+          </a:ln>
+          <a:effectLst/>
+        </p:spPr>
+        <p:style>
+          <a:lnRef idx="1">
+            <a:schemeClr val="accent1"/>
+          </a:lnRef>
+          <a:fillRef idx="3">
+            <a:schemeClr val="accent1"/>
+          </a:fillRef>
+          <a:effectRef idx="2">
+            <a:schemeClr val="accent1"/>
+          </a:effectRef>
+          <a:fontRef idx="minor">
+            <a:schemeClr val="lt1"/>
+          </a:fontRef>
+        </p:style>
+        <p:txBody>
+          <a:bodyPr rtlCol="0" anchor="ctr"/>
+          <a:lstStyle/>
+          <a:p>
+            <a:pPr algn="ctr"/>
+          </a:p>
+        </p:txBody>
+      </p:sp>
+      <p:sp>
+        <p:nvSpPr>
+          <p:cNvPr id="47" name="TextBox 46"/>
           <p:cNvSpPr txBox="1"/>
           <p:nvPr/>
         </p:nvSpPr>
         <p:spPr>
           <a:xfrm>
-            <a:off x="2667000" y="5334000"/>
-            <a:ext cx="4953000" cy="1905000"/>
+            <a:off x="5353050" y="9277350"/>
+            <a:ext cx="1943100" cy="2286000"/>
           </a:xfrm>
           <a:prstGeom prst="rect">
             <a:avLst/>
@@ -3979,70 +5252,75 @@
           <a:noFill/>
         </p:spPr>
         <p:txBody>
-          <a:bodyPr wrap="square" lIns="0" rIns="0" tIns="0" bIns="0" anchor="t">
+          <a:bodyPr wrap="square" lIns="0" rIns="0" tIns="0" bIns="0" anchor="ctr">
             <a:spAutoFit/>
           </a:bodyPr>
           <a:lstStyle/>
           <a:p>
             <a:pPr algn="ctr">
               <a:lnSpc>
-                <a:spcPct val="100000"/>
+                <a:spcPct val="105000"/>
               </a:lnSpc>
             </a:pPr>
             <a:r>
-              <a:rPr sz="5000" b="1" i="0">
+              <a:rPr sz="2400" b="1" i="0">
                 <a:solidFill>
-                  <a:srgbClr val="31662F"/>
+                  <a:srgbClr val="F3F1EA"/>
                 </a:solidFill>
                 <a:latin typeface="Montserrat"/>
               </a:rPr>
-              <a:t>Happy World Teachers' Day</a:t>
-            </a:r>
-          </a:p>
-        </p:txBody>
-      </p:sp>
-      <p:sp>
-        <p:nvSpPr>
-          <p:cNvPr id="18" name="TextBox 17"/>
-          <p:cNvSpPr txBox="1"/>
-          <p:nvPr/>
-        </p:nvSpPr>
-        <p:spPr>
-          <a:xfrm>
-            <a:off x="2952750" y="7143750"/>
-            <a:ext cx="4381500" cy="857250"/>
-          </a:xfrm>
-          <a:prstGeom prst="rect">
-            <a:avLst/>
-          </a:prstGeom>
-          <a:noFill/>
-        </p:spPr>
-        <p:txBody>
-          <a:bodyPr wrap="square" lIns="0" rIns="0" tIns="0" bIns="0" anchor="t">
-            <a:spAutoFit/>
-          </a:bodyPr>
-          <a:lstStyle/>
-          <a:p>
-            <a:pPr algn="ctr">
-              <a:lnSpc>
-                <a:spcPct val="115000"/>
-              </a:lnSpc>
-            </a:pPr>
-            <a:r>
-              <a:rPr sz="2200" b="0" i="1">
-                <a:solidFill>
-                  <a:srgbClr val="1A1A1A"/>
-                </a:solidFill>
-                <a:latin typeface="EB Garamond"/>
-              </a:rPr>
-              <a:t>To the mentors who teach our students to see soil.</a:t>
-            </a:r>
+              <a:t>Thank you, mentors!</a:t>
+            </a:r>
+          </a:p>
+        </p:txBody>
+      </p:sp>
+      <p:sp>
+        <p:nvSpPr>
+          <p:cNvPr id="48" name="Rectangle 47"/>
+          <p:cNvSpPr/>
+          <p:nvPr/>
+        </p:nvSpPr>
+        <p:spPr>
+          <a:xfrm>
+            <a:off x="7543800" y="9277350"/>
+            <a:ext cx="2286000" cy="2286000"/>
+          </a:xfrm>
+          <a:prstGeom prst="rect">
+            <a:avLst/>
+          </a:prstGeom>
+          <a:solidFill>
+            <a:srgbClr val="C09D7F"/>
+          </a:solidFill>
+          <a:ln>
+            <a:noFill/>
+          </a:ln>
+          <a:effectLst/>
+        </p:spPr>
+        <p:style>
+          <a:lnRef idx="1">
+            <a:schemeClr val="accent1"/>
+          </a:lnRef>
+          <a:fillRef idx="3">
+            <a:schemeClr val="accent1"/>
+          </a:fillRef>
+          <a:effectRef idx="2">
+            <a:schemeClr val="accent1"/>
+          </a:effectRef>
+          <a:fontRef idx="minor">
+            <a:schemeClr val="lt1"/>
+          </a:fontRef>
+        </p:style>
+        <p:txBody>
+          <a:bodyPr rtlCol="0" anchor="ctr"/>
+          <a:lstStyle/>
+          <a:p>
+            <a:pPr algn="ctr"/>
           </a:p>
         </p:txBody>
       </p:sp>
       <p:pic>
         <p:nvPicPr>
-          <p:cNvPr id="19" name="Picture 18" descr="foundation-logo-color.png"/>
+          <p:cNvPr id="49" name="Picture 48" descr="foundation-logo-white.png"/>
           <p:cNvPicPr>
             <a:picLocks noChangeAspect="1"/>
           </p:cNvPicPr>
@@ -4056,8 +5334,8 @@
         </p:blipFill>
         <p:spPr>
           <a:xfrm>
-            <a:off x="4667250" y="11430897"/>
-            <a:ext cx="952500" cy="856352"/>
+            <a:off x="8020050" y="9820903"/>
+            <a:ext cx="1333500" cy="1198893"/>
           </a:xfrm>
           <a:prstGeom prst="rect">
             <a:avLst/>

--- a/templates/posts/october/05-10-2026-mon-ig-teachers-day-option-3-wreath.pptx
+++ b/templates/posts/october/05-10-2026-mon-ig-teachers-day-option-3-wreath.pptx
@@ -3667,7 +3667,7 @@
       </p:sp>
       <p:pic>
         <p:nvPicPr>
-          <p:cNvPr id="4" name="Picture 3" descr="894524731619023401.jpg"/>
+          <p:cNvPr id="4" name="Picture 3" descr="2434527820232444417.jpg"/>
           <p:cNvPicPr>
             <a:picLocks noChangeAspect="1"/>
           </p:cNvPicPr>
@@ -3776,7 +3776,7 @@
       </p:sp>
       <p:pic>
         <p:nvPicPr>
-          <p:cNvPr id="7" name="Picture 6" descr="7427239733233723794.jpg"/>
+          <p:cNvPr id="7" name="Picture 6" descr="1000714845004509693.jpg"/>
           <p:cNvPicPr>
             <a:picLocks noChangeAspect="1"/>
           </p:cNvPicPr>
@@ -3885,7 +3885,7 @@
       </p:sp>
       <p:pic>
         <p:nvPicPr>
-          <p:cNvPr id="10" name="Picture 9" descr="6023360388099870640.jpg"/>
+          <p:cNvPr id="10" name="Picture 9" descr="4555583047526390395.jpg"/>
           <p:cNvPicPr>
             <a:picLocks noChangeAspect="1"/>
           </p:cNvPicPr>
@@ -3994,7 +3994,7 @@
       </p:sp>
       <p:pic>
         <p:nvPicPr>
-          <p:cNvPr id="13" name="Picture 12" descr="8080359357829165426.jpg"/>
+          <p:cNvPr id="13" name="Picture 12" descr="3404798177016875823.jpg"/>
           <p:cNvPicPr>
             <a:picLocks noChangeAspect="1"/>
           </p:cNvPicPr>
@@ -4103,7 +4103,7 @@
       </p:sp>
       <p:pic>
         <p:nvPicPr>
-          <p:cNvPr id="16" name="Picture 15" descr="1974356426881197837.jpg"/>
+          <p:cNvPr id="16" name="Picture 15" descr="2211596369159362971.jpg"/>
           <p:cNvPicPr>
             <a:picLocks noChangeAspect="1"/>
           </p:cNvPicPr>
@@ -4212,7 +4212,7 @@
       </p:sp>
       <p:pic>
         <p:nvPicPr>
-          <p:cNvPr id="19" name="Picture 18" descr="3027816981463207685.jpg"/>
+          <p:cNvPr id="19" name="Picture 18" descr="4958046341648927289.jpg"/>
           <p:cNvPicPr>
             <a:picLocks noChangeAspect="1"/>
           </p:cNvPicPr>
@@ -4321,7 +4321,7 @@
       </p:sp>
       <p:pic>
         <p:nvPicPr>
-          <p:cNvPr id="22" name="Picture 21" descr="6422877592201863816.jpg"/>
+          <p:cNvPr id="22" name="Picture 21" descr="8688420958633461341.jpg"/>
           <p:cNvPicPr>
             <a:picLocks noChangeAspect="1"/>
           </p:cNvPicPr>
@@ -4430,7 +4430,7 @@
       </p:sp>
       <p:pic>
         <p:nvPicPr>
-          <p:cNvPr id="25" name="Picture 24" descr="5196354255928742527.jpg"/>
+          <p:cNvPr id="25" name="Picture 24" descr="4546600180924043180.jpg"/>
           <p:cNvPicPr>
             <a:picLocks noChangeAspect="1"/>
           </p:cNvPicPr>
@@ -4539,7 +4539,7 @@
       </p:sp>
       <p:pic>
         <p:nvPicPr>
-          <p:cNvPr id="28" name="Picture 27" descr="1839049045767413403.jpg"/>
+          <p:cNvPr id="28" name="Picture 27" descr="1419517534166441101.jpg"/>
           <p:cNvPicPr>
             <a:picLocks noChangeAspect="1"/>
           </p:cNvPicPr>
@@ -4648,7 +4648,7 @@
       </p:sp>
       <p:pic>
         <p:nvPicPr>
-          <p:cNvPr id="31" name="Picture 30" descr="3635735852169036292.jpg"/>
+          <p:cNvPr id="31" name="Picture 30" descr="376603766941083699.jpg"/>
           <p:cNvPicPr>
             <a:picLocks noChangeAspect="1"/>
           </p:cNvPicPr>
@@ -4757,7 +4757,7 @@
       </p:sp>
       <p:pic>
         <p:nvPicPr>
-          <p:cNvPr id="34" name="Picture 33" descr="5747755529844054742.jpg"/>
+          <p:cNvPr id="34" name="Picture 33" descr="2247470644392744674.jpg"/>
           <p:cNvPicPr>
             <a:picLocks noChangeAspect="1"/>
           </p:cNvPicPr>
@@ -4866,7 +4866,7 @@
       </p:sp>
       <p:pic>
         <p:nvPicPr>
-          <p:cNvPr id="37" name="Picture 36" descr="8399190351064505002.jpg"/>
+          <p:cNvPr id="37" name="Picture 36" descr="9158947755014907440.jpg"/>
           <p:cNvPicPr>
             <a:picLocks noChangeAspect="1"/>
           </p:cNvPicPr>
@@ -4975,7 +4975,7 @@
       </p:sp>
       <p:pic>
         <p:nvPicPr>
-          <p:cNvPr id="40" name="Picture 39" descr="5842563647999390999.jpg"/>
+          <p:cNvPr id="40" name="Picture 39" descr="175810135765887123.jpg"/>
           <p:cNvPicPr>
             <a:picLocks noChangeAspect="1"/>
           </p:cNvPicPr>
@@ -5084,7 +5084,7 @@
       </p:sp>
       <p:pic>
         <p:nvPicPr>
-          <p:cNvPr id="43" name="Picture 42" descr="1503839733146406453.jpg"/>
+          <p:cNvPr id="43" name="Picture 42" descr="8454356666220585455.jpg"/>
           <p:cNvPicPr>
             <a:picLocks noChangeAspect="1"/>
           </p:cNvPicPr>

--- a/templates/posts/october/05-10-2026-mon-ig-teachers-day-option-3-wreath.pptx
+++ b/templates/posts/october/05-10-2026-mon-ig-teachers-day-option-3-wreath.pptx
@@ -3667,7 +3667,7 @@
       </p:sp>
       <p:pic>
         <p:nvPicPr>
-          <p:cNvPr id="4" name="Picture 3" descr="2434527820232444417.jpg"/>
+          <p:cNvPr id="4" name="Picture 3" descr="2270990918217472394.jpg"/>
           <p:cNvPicPr>
             <a:picLocks noChangeAspect="1"/>
           </p:cNvPicPr>
@@ -3776,7 +3776,7 @@
       </p:sp>
       <p:pic>
         <p:nvPicPr>
-          <p:cNvPr id="7" name="Picture 6" descr="1000714845004509693.jpg"/>
+          <p:cNvPr id="7" name="Picture 6" descr="7392069005057952215.jpg"/>
           <p:cNvPicPr>
             <a:picLocks noChangeAspect="1"/>
           </p:cNvPicPr>
@@ -3885,7 +3885,7 @@
       </p:sp>
       <p:pic>
         <p:nvPicPr>
-          <p:cNvPr id="10" name="Picture 9" descr="4555583047526390395.jpg"/>
+          <p:cNvPr id="10" name="Picture 9" descr="2120264185869255123.jpg"/>
           <p:cNvPicPr>
             <a:picLocks noChangeAspect="1"/>
           </p:cNvPicPr>
@@ -3994,7 +3994,7 @@
       </p:sp>
       <p:pic>
         <p:nvPicPr>
-          <p:cNvPr id="13" name="Picture 12" descr="3404798177016875823.jpg"/>
+          <p:cNvPr id="13" name="Picture 12" descr="9218185789869299862.jpg"/>
           <p:cNvPicPr>
             <a:picLocks noChangeAspect="1"/>
           </p:cNvPicPr>
@@ -4103,7 +4103,7 @@
       </p:sp>
       <p:pic>
         <p:nvPicPr>
-          <p:cNvPr id="16" name="Picture 15" descr="2211596369159362971.jpg"/>
+          <p:cNvPr id="16" name="Picture 15" descr="764028230434961015.jpg"/>
           <p:cNvPicPr>
             <a:picLocks noChangeAspect="1"/>
           </p:cNvPicPr>
@@ -4117,7 +4117,7 @@
         </p:blipFill>
         <p:spPr>
           <a:xfrm>
-            <a:off x="457200" y="4552950"/>
+            <a:off x="1638300" y="4552950"/>
             <a:ext cx="2286000" cy="2286000"/>
           </a:xfrm>
           <a:prstGeom prst="rect">
@@ -4133,7 +4133,7 @@
         </p:nvSpPr>
         <p:spPr>
           <a:xfrm>
-            <a:off x="457200" y="6419850"/>
+            <a:off x="1638300" y="6419850"/>
             <a:ext cx="2286000" cy="419100"/>
           </a:xfrm>
           <a:prstGeom prst="rect">
@@ -4179,7 +4179,7 @@
         </p:nvSpPr>
         <p:spPr>
           <a:xfrm>
-            <a:off x="514350" y="6419850"/>
+            <a:off x="1695450" y="6419850"/>
             <a:ext cx="2171700" cy="419100"/>
           </a:xfrm>
           <a:prstGeom prst="rect">
@@ -4212,7 +4212,7 @@
       </p:sp>
       <p:pic>
         <p:nvPicPr>
-          <p:cNvPr id="19" name="Picture 18" descr="4958046341648927289.jpg"/>
+          <p:cNvPr id="19" name="Picture 18" descr="3872467728124968485.jpg"/>
           <p:cNvPicPr>
             <a:picLocks noChangeAspect="1"/>
           </p:cNvPicPr>
@@ -4226,7 +4226,7 @@
         </p:blipFill>
         <p:spPr>
           <a:xfrm>
-            <a:off x="2819400" y="4552950"/>
+            <a:off x="4000500" y="4552950"/>
             <a:ext cx="2286000" cy="2286000"/>
           </a:xfrm>
           <a:prstGeom prst="rect">
@@ -4242,7 +4242,7 @@
         </p:nvSpPr>
         <p:spPr>
           <a:xfrm>
-            <a:off x="2819400" y="6419850"/>
+            <a:off x="4000500" y="6419850"/>
             <a:ext cx="2286000" cy="419100"/>
           </a:xfrm>
           <a:prstGeom prst="rect">
@@ -4288,7 +4288,7 @@
         </p:nvSpPr>
         <p:spPr>
           <a:xfrm>
-            <a:off x="2876550" y="6419850"/>
+            <a:off x="4057650" y="6419850"/>
             <a:ext cx="2171700" cy="419100"/>
           </a:xfrm>
           <a:prstGeom prst="rect">
@@ -4321,7 +4321,7 @@
       </p:sp>
       <p:pic>
         <p:nvPicPr>
-          <p:cNvPr id="22" name="Picture 21" descr="8688420958633461341.jpg"/>
+          <p:cNvPr id="22" name="Picture 21" descr="7768563020045296748.jpg"/>
           <p:cNvPicPr>
             <a:picLocks noChangeAspect="1"/>
           </p:cNvPicPr>
@@ -4335,7 +4335,7 @@
         </p:blipFill>
         <p:spPr>
           <a:xfrm>
-            <a:off x="5181600" y="4552950"/>
+            <a:off x="6362700" y="4552950"/>
             <a:ext cx="2286000" cy="2286000"/>
           </a:xfrm>
           <a:prstGeom prst="rect">
@@ -4351,7 +4351,7 @@
         </p:nvSpPr>
         <p:spPr>
           <a:xfrm>
-            <a:off x="5181600" y="6419850"/>
+            <a:off x="6362700" y="6419850"/>
             <a:ext cx="2286000" cy="419100"/>
           </a:xfrm>
           <a:prstGeom prst="rect">
@@ -4397,7 +4397,7 @@
         </p:nvSpPr>
         <p:spPr>
           <a:xfrm>
-            <a:off x="5238750" y="6419850"/>
+            <a:off x="6419850" y="6419850"/>
             <a:ext cx="2171700" cy="419100"/>
           </a:xfrm>
           <a:prstGeom prst="rect">
@@ -4430,7 +4430,7 @@
       </p:sp>
       <p:pic>
         <p:nvPicPr>
-          <p:cNvPr id="25" name="Picture 24" descr="4546600180924043180.jpg"/>
+          <p:cNvPr id="25" name="Picture 24" descr="188478169412812041.jpg"/>
           <p:cNvPicPr>
             <a:picLocks noChangeAspect="1"/>
           </p:cNvPicPr>
@@ -4444,7 +4444,7 @@
         </p:blipFill>
         <p:spPr>
           <a:xfrm>
-            <a:off x="7543800" y="4552950"/>
+            <a:off x="457200" y="6915150"/>
             <a:ext cx="2286000" cy="2286000"/>
           </a:xfrm>
           <a:prstGeom prst="rect">
@@ -4460,7 +4460,7 @@
         </p:nvSpPr>
         <p:spPr>
           <a:xfrm>
-            <a:off x="7543800" y="6419850"/>
+            <a:off x="457200" y="8782050"/>
             <a:ext cx="2286000" cy="419100"/>
           </a:xfrm>
           <a:prstGeom prst="rect">
@@ -4506,7 +4506,7 @@
         </p:nvSpPr>
         <p:spPr>
           <a:xfrm>
-            <a:off x="7600950" y="6419850"/>
+            <a:off x="514350" y="8782050"/>
             <a:ext cx="2171700" cy="419100"/>
           </a:xfrm>
           <a:prstGeom prst="rect">
@@ -4539,7 +4539,7 @@
       </p:sp>
       <p:pic>
         <p:nvPicPr>
-          <p:cNvPr id="28" name="Picture 27" descr="1419517534166441101.jpg"/>
+          <p:cNvPr id="28" name="Picture 27" descr="7285083055156648169.jpg"/>
           <p:cNvPicPr>
             <a:picLocks noChangeAspect="1"/>
           </p:cNvPicPr>
@@ -4553,7 +4553,7 @@
         </p:blipFill>
         <p:spPr>
           <a:xfrm>
-            <a:off x="457200" y="6915150"/>
+            <a:off x="2819400" y="6915150"/>
             <a:ext cx="2286000" cy="2286000"/>
           </a:xfrm>
           <a:prstGeom prst="rect">
@@ -4569,7 +4569,7 @@
         </p:nvSpPr>
         <p:spPr>
           <a:xfrm>
-            <a:off x="457200" y="8782050"/>
+            <a:off x="2819400" y="8782050"/>
             <a:ext cx="2286000" cy="419100"/>
           </a:xfrm>
           <a:prstGeom prst="rect">
@@ -4615,7 +4615,7 @@
         </p:nvSpPr>
         <p:spPr>
           <a:xfrm>
-            <a:off x="514350" y="8782050"/>
+            <a:off x="2876550" y="8782050"/>
             <a:ext cx="2171700" cy="419100"/>
           </a:xfrm>
           <a:prstGeom prst="rect">
@@ -4648,7 +4648,7 @@
       </p:sp>
       <p:pic>
         <p:nvPicPr>
-          <p:cNvPr id="31" name="Picture 30" descr="376603766941083699.jpg"/>
+          <p:cNvPr id="31" name="Picture 30" descr="3298387358523767450.jpg"/>
           <p:cNvPicPr>
             <a:picLocks noChangeAspect="1"/>
           </p:cNvPicPr>
@@ -4662,7 +4662,7 @@
         </p:blipFill>
         <p:spPr>
           <a:xfrm>
-            <a:off x="2819400" y="6915150"/>
+            <a:off x="5181600" y="6915150"/>
             <a:ext cx="2286000" cy="2286000"/>
           </a:xfrm>
           <a:prstGeom prst="rect">
@@ -4678,7 +4678,7 @@
         </p:nvSpPr>
         <p:spPr>
           <a:xfrm>
-            <a:off x="2819400" y="8782050"/>
+            <a:off x="5181600" y="8782050"/>
             <a:ext cx="2286000" cy="419100"/>
           </a:xfrm>
           <a:prstGeom prst="rect">
@@ -4724,7 +4724,7 @@
         </p:nvSpPr>
         <p:spPr>
           <a:xfrm>
-            <a:off x="2876550" y="8782050"/>
+            <a:off x="5238750" y="8782050"/>
             <a:ext cx="2171700" cy="419100"/>
           </a:xfrm>
           <a:prstGeom prst="rect">
@@ -4757,7 +4757,7 @@
       </p:sp>
       <p:pic>
         <p:nvPicPr>
-          <p:cNvPr id="34" name="Picture 33" descr="2247470644392744674.jpg"/>
+          <p:cNvPr id="34" name="Picture 33" descr="2984603724377360682.jpg"/>
           <p:cNvPicPr>
             <a:picLocks noChangeAspect="1"/>
           </p:cNvPicPr>
@@ -4771,7 +4771,7 @@
         </p:blipFill>
         <p:spPr>
           <a:xfrm>
-            <a:off x="5181600" y="6915150"/>
+            <a:off x="7543800" y="6915150"/>
             <a:ext cx="2286000" cy="2286000"/>
           </a:xfrm>
           <a:prstGeom prst="rect">
@@ -4787,7 +4787,7 @@
         </p:nvSpPr>
         <p:spPr>
           <a:xfrm>
-            <a:off x="5181600" y="8782050"/>
+            <a:off x="7543800" y="8782050"/>
             <a:ext cx="2286000" cy="419100"/>
           </a:xfrm>
           <a:prstGeom prst="rect">
@@ -4833,7 +4833,7 @@
         </p:nvSpPr>
         <p:spPr>
           <a:xfrm>
-            <a:off x="5238750" y="8782050"/>
+            <a:off x="7600950" y="8782050"/>
             <a:ext cx="2171700" cy="419100"/>
           </a:xfrm>
           <a:prstGeom prst="rect">
@@ -4866,7 +4866,7 @@
       </p:sp>
       <p:pic>
         <p:nvPicPr>
-          <p:cNvPr id="37" name="Picture 36" descr="9158947755014907440.jpg"/>
+          <p:cNvPr id="37" name="Picture 36" descr="3815489264604009436.jpg"/>
           <p:cNvPicPr>
             <a:picLocks noChangeAspect="1"/>
           </p:cNvPicPr>
@@ -4880,7 +4880,7 @@
         </p:blipFill>
         <p:spPr>
           <a:xfrm>
-            <a:off x="7543800" y="6915150"/>
+            <a:off x="1638300" y="9277350"/>
             <a:ext cx="2286000" cy="2286000"/>
           </a:xfrm>
           <a:prstGeom prst="rect">
@@ -4896,7 +4896,7 @@
         </p:nvSpPr>
         <p:spPr>
           <a:xfrm>
-            <a:off x="7543800" y="8782050"/>
+            <a:off x="1638300" y="11144250"/>
             <a:ext cx="2286000" cy="419100"/>
           </a:xfrm>
           <a:prstGeom prst="rect">
@@ -4942,7 +4942,7 @@
         </p:nvSpPr>
         <p:spPr>
           <a:xfrm>
-            <a:off x="7600950" y="8782050"/>
+            <a:off x="1695450" y="11144250"/>
             <a:ext cx="2171700" cy="419100"/>
           </a:xfrm>
           <a:prstGeom prst="rect">
@@ -4975,7 +4975,7 @@
       </p:sp>
       <p:pic>
         <p:nvPicPr>
-          <p:cNvPr id="40" name="Picture 39" descr="175810135765887123.jpg"/>
+          <p:cNvPr id="40" name="Picture 39" descr="6333570285111628965.jpg"/>
           <p:cNvPicPr>
             <a:picLocks noChangeAspect="1"/>
           </p:cNvPicPr>
@@ -4989,7 +4989,7 @@
         </p:blipFill>
         <p:spPr>
           <a:xfrm>
-            <a:off x="457200" y="9277350"/>
+            <a:off x="4000500" y="9277350"/>
             <a:ext cx="2286000" cy="2286000"/>
           </a:xfrm>
           <a:prstGeom prst="rect">
@@ -5005,7 +5005,7 @@
         </p:nvSpPr>
         <p:spPr>
           <a:xfrm>
-            <a:off x="457200" y="11144250"/>
+            <a:off x="4000500" y="11144250"/>
             <a:ext cx="2286000" cy="419100"/>
           </a:xfrm>
           <a:prstGeom prst="rect">
@@ -5051,7 +5051,7 @@
         </p:nvSpPr>
         <p:spPr>
           <a:xfrm>
-            <a:off x="514350" y="11144250"/>
+            <a:off x="4057650" y="11144250"/>
             <a:ext cx="2171700" cy="419100"/>
           </a:xfrm>
           <a:prstGeom prst="rect">
@@ -5084,7 +5084,7 @@
       </p:sp>
       <p:pic>
         <p:nvPicPr>
-          <p:cNvPr id="43" name="Picture 42" descr="8454356666220585455.jpg"/>
+          <p:cNvPr id="43" name="Picture 42" descr="4832778074727187405.jpg"/>
           <p:cNvPicPr>
             <a:picLocks noChangeAspect="1"/>
           </p:cNvPicPr>
@@ -5098,7 +5098,7 @@
         </p:blipFill>
         <p:spPr>
           <a:xfrm>
-            <a:off x="2819400" y="9277350"/>
+            <a:off x="6362700" y="9277350"/>
             <a:ext cx="2286000" cy="2286000"/>
           </a:xfrm>
           <a:prstGeom prst="rect">
@@ -5114,7 +5114,7 @@
         </p:nvSpPr>
         <p:spPr>
           <a:xfrm>
-            <a:off x="2819400" y="11144250"/>
+            <a:off x="6362700" y="11144250"/>
             <a:ext cx="2286000" cy="419100"/>
           </a:xfrm>
           <a:prstGeom prst="rect">
@@ -5160,7 +5160,7 @@
         </p:nvSpPr>
         <p:spPr>
           <a:xfrm>
-            <a:off x="2876550" y="11144250"/>
+            <a:off x="6419850" y="11144250"/>
             <a:ext cx="2171700" cy="419100"/>
           </a:xfrm>
           <a:prstGeom prst="rect">
@@ -5191,157 +5191,6 @@
           </a:p>
         </p:txBody>
       </p:sp>
-      <p:sp>
-        <p:nvSpPr>
-          <p:cNvPr id="46" name="Rectangle 45"/>
-          <p:cNvSpPr/>
-          <p:nvPr/>
-        </p:nvSpPr>
-        <p:spPr>
-          <a:xfrm>
-            <a:off x="5181600" y="9277350"/>
-            <a:ext cx="2286000" cy="2286000"/>
-          </a:xfrm>
-          <a:prstGeom prst="rect">
-            <a:avLst/>
-          </a:prstGeom>
-          <a:solidFill>
-            <a:srgbClr val="31662F"/>
-          </a:solidFill>
-          <a:ln>
-            <a:noFill/>
-          </a:ln>
-          <a:effectLst/>
-        </p:spPr>
-        <p:style>
-          <a:lnRef idx="1">
-            <a:schemeClr val="accent1"/>
-          </a:lnRef>
-          <a:fillRef idx="3">
-            <a:schemeClr val="accent1"/>
-          </a:fillRef>
-          <a:effectRef idx="2">
-            <a:schemeClr val="accent1"/>
-          </a:effectRef>
-          <a:fontRef idx="minor">
-            <a:schemeClr val="lt1"/>
-          </a:fontRef>
-        </p:style>
-        <p:txBody>
-          <a:bodyPr rtlCol="0" anchor="ctr"/>
-          <a:lstStyle/>
-          <a:p>
-            <a:pPr algn="ctr"/>
-          </a:p>
-        </p:txBody>
-      </p:sp>
-      <p:sp>
-        <p:nvSpPr>
-          <p:cNvPr id="47" name="TextBox 46"/>
-          <p:cNvSpPr txBox="1"/>
-          <p:nvPr/>
-        </p:nvSpPr>
-        <p:spPr>
-          <a:xfrm>
-            <a:off x="5353050" y="9277350"/>
-            <a:ext cx="1943100" cy="2286000"/>
-          </a:xfrm>
-          <a:prstGeom prst="rect">
-            <a:avLst/>
-          </a:prstGeom>
-          <a:noFill/>
-        </p:spPr>
-        <p:txBody>
-          <a:bodyPr wrap="square" lIns="0" rIns="0" tIns="0" bIns="0" anchor="ctr">
-            <a:spAutoFit/>
-          </a:bodyPr>
-          <a:lstStyle/>
-          <a:p>
-            <a:pPr algn="ctr">
-              <a:lnSpc>
-                <a:spcPct val="105000"/>
-              </a:lnSpc>
-            </a:pPr>
-            <a:r>
-              <a:rPr sz="2400" b="1" i="0">
-                <a:solidFill>
-                  <a:srgbClr val="F3F1EA"/>
-                </a:solidFill>
-                <a:latin typeface="Montserrat"/>
-              </a:rPr>
-              <a:t>Thank you, mentors!</a:t>
-            </a:r>
-          </a:p>
-        </p:txBody>
-      </p:sp>
-      <p:sp>
-        <p:nvSpPr>
-          <p:cNvPr id="48" name="Rectangle 47"/>
-          <p:cNvSpPr/>
-          <p:nvPr/>
-        </p:nvSpPr>
-        <p:spPr>
-          <a:xfrm>
-            <a:off x="7543800" y="9277350"/>
-            <a:ext cx="2286000" cy="2286000"/>
-          </a:xfrm>
-          <a:prstGeom prst="rect">
-            <a:avLst/>
-          </a:prstGeom>
-          <a:solidFill>
-            <a:srgbClr val="C09D7F"/>
-          </a:solidFill>
-          <a:ln>
-            <a:noFill/>
-          </a:ln>
-          <a:effectLst/>
-        </p:spPr>
-        <p:style>
-          <a:lnRef idx="1">
-            <a:schemeClr val="accent1"/>
-          </a:lnRef>
-          <a:fillRef idx="3">
-            <a:schemeClr val="accent1"/>
-          </a:fillRef>
-          <a:effectRef idx="2">
-            <a:schemeClr val="accent1"/>
-          </a:effectRef>
-          <a:fontRef idx="minor">
-            <a:schemeClr val="lt1"/>
-          </a:fontRef>
-        </p:style>
-        <p:txBody>
-          <a:bodyPr rtlCol="0" anchor="ctr"/>
-          <a:lstStyle/>
-          <a:p>
-            <a:pPr algn="ctr"/>
-          </a:p>
-        </p:txBody>
-      </p:sp>
-      <p:pic>
-        <p:nvPicPr>
-          <p:cNvPr id="49" name="Picture 48" descr="foundation-logo-white.png"/>
-          <p:cNvPicPr>
-            <a:picLocks noChangeAspect="1"/>
-          </p:cNvPicPr>
-          <p:nvPr/>
-        </p:nvPicPr>
-        <p:blipFill>
-          <a:blip r:embed="rId17"/>
-          <a:stretch>
-            <a:fillRect/>
-          </a:stretch>
-        </p:blipFill>
-        <p:spPr>
-          <a:xfrm>
-            <a:off x="8020050" y="9820903"/>
-            <a:ext cx="1333500" cy="1198893"/>
-          </a:xfrm>
-          <a:prstGeom prst="rect">
-            <a:avLst/>
-          </a:prstGeom>
-        </p:spPr>
-      </p:pic>
     </p:spTree>
   </p:cSld>
   <p:clrMapOvr>

--- a/templates/posts/october/05-10-2026-mon-ig-teachers-day-option-3-wreath.pptx
+++ b/templates/posts/october/05-10-2026-mon-ig-teachers-day-option-3-wreath.pptx
@@ -3667,7 +3667,7 @@
       </p:sp>
       <p:pic>
         <p:nvPicPr>
-          <p:cNvPr id="4" name="Picture 3" descr="2270990918217472394.jpg"/>
+          <p:cNvPr id="4" name="Picture 3" descr="9036284228287914251.jpg"/>
           <p:cNvPicPr>
             <a:picLocks noChangeAspect="1"/>
           </p:cNvPicPr>
@@ -3776,7 +3776,7 @@
       </p:sp>
       <p:pic>
         <p:nvPicPr>
-          <p:cNvPr id="7" name="Picture 6" descr="7392069005057952215.jpg"/>
+          <p:cNvPr id="7" name="Picture 6" descr="7264490724320908151.jpg"/>
           <p:cNvPicPr>
             <a:picLocks noChangeAspect="1"/>
           </p:cNvPicPr>
@@ -3885,7 +3885,7 @@
       </p:sp>
       <p:pic>
         <p:nvPicPr>
-          <p:cNvPr id="10" name="Picture 9" descr="2120264185869255123.jpg"/>
+          <p:cNvPr id="10" name="Picture 9" descr="9106841745323230857.jpg"/>
           <p:cNvPicPr>
             <a:picLocks noChangeAspect="1"/>
           </p:cNvPicPr>
@@ -3994,7 +3994,7 @@
       </p:sp>
       <p:pic>
         <p:nvPicPr>
-          <p:cNvPr id="13" name="Picture 12" descr="9218185789869299862.jpg"/>
+          <p:cNvPr id="13" name="Picture 12" descr="6445759230204725191.jpg"/>
           <p:cNvPicPr>
             <a:picLocks noChangeAspect="1"/>
           </p:cNvPicPr>
@@ -4103,7 +4103,7 @@
       </p:sp>
       <p:pic>
         <p:nvPicPr>
-          <p:cNvPr id="16" name="Picture 15" descr="764028230434961015.jpg"/>
+          <p:cNvPr id="16" name="Picture 15" descr="8803819581641044895.jpg"/>
           <p:cNvPicPr>
             <a:picLocks noChangeAspect="1"/>
           </p:cNvPicPr>
@@ -4212,7 +4212,7 @@
       </p:sp>
       <p:pic>
         <p:nvPicPr>
-          <p:cNvPr id="19" name="Picture 18" descr="3872467728124968485.jpg"/>
+          <p:cNvPr id="19" name="Picture 18" descr="8536373804798833227.jpg"/>
           <p:cNvPicPr>
             <a:picLocks noChangeAspect="1"/>
           </p:cNvPicPr>
@@ -4321,7 +4321,7 @@
       </p:sp>
       <p:pic>
         <p:nvPicPr>
-          <p:cNvPr id="22" name="Picture 21" descr="7768563020045296748.jpg"/>
+          <p:cNvPr id="22" name="Picture 21" descr="8164580861635186193.jpg"/>
           <p:cNvPicPr>
             <a:picLocks noChangeAspect="1"/>
           </p:cNvPicPr>
@@ -4430,7 +4430,7 @@
       </p:sp>
       <p:pic>
         <p:nvPicPr>
-          <p:cNvPr id="25" name="Picture 24" descr="188478169412812041.jpg"/>
+          <p:cNvPr id="25" name="Picture 24" descr="2894971483344189381.jpg"/>
           <p:cNvPicPr>
             <a:picLocks noChangeAspect="1"/>
           </p:cNvPicPr>
@@ -4539,7 +4539,7 @@
       </p:sp>
       <p:pic>
         <p:nvPicPr>
-          <p:cNvPr id="28" name="Picture 27" descr="7285083055156648169.jpg"/>
+          <p:cNvPr id="28" name="Picture 27" descr="454656652608966177.jpg"/>
           <p:cNvPicPr>
             <a:picLocks noChangeAspect="1"/>
           </p:cNvPicPr>
@@ -4648,7 +4648,7 @@
       </p:sp>
       <p:pic>
         <p:nvPicPr>
-          <p:cNvPr id="31" name="Picture 30" descr="3298387358523767450.jpg"/>
+          <p:cNvPr id="31" name="Picture 30" descr="3512431765128565377.jpg"/>
           <p:cNvPicPr>
             <a:picLocks noChangeAspect="1"/>
           </p:cNvPicPr>
@@ -4757,7 +4757,7 @@
       </p:sp>
       <p:pic>
         <p:nvPicPr>
-          <p:cNvPr id="34" name="Picture 33" descr="2984603724377360682.jpg"/>
+          <p:cNvPr id="34" name="Picture 33" descr="9208379026975339746.jpg"/>
           <p:cNvPicPr>
             <a:picLocks noChangeAspect="1"/>
           </p:cNvPicPr>
@@ -4866,7 +4866,7 @@
       </p:sp>
       <p:pic>
         <p:nvPicPr>
-          <p:cNvPr id="37" name="Picture 36" descr="3815489264604009436.jpg"/>
+          <p:cNvPr id="37" name="Picture 36" descr="8672761161464777380.jpg"/>
           <p:cNvPicPr>
             <a:picLocks noChangeAspect="1"/>
           </p:cNvPicPr>
@@ -4975,7 +4975,7 @@
       </p:sp>
       <p:pic>
         <p:nvPicPr>
-          <p:cNvPr id="40" name="Picture 39" descr="6333570285111628965.jpg"/>
+          <p:cNvPr id="40" name="Picture 39" descr="3359842666902028946.jpg"/>
           <p:cNvPicPr>
             <a:picLocks noChangeAspect="1"/>
           </p:cNvPicPr>
@@ -5084,7 +5084,7 @@
       </p:sp>
       <p:pic>
         <p:nvPicPr>
-          <p:cNvPr id="43" name="Picture 42" descr="4832778074727187405.jpg"/>
+          <p:cNvPr id="43" name="Picture 42" descr="8025998113937040021.jpg"/>
           <p:cNvPicPr>
             <a:picLocks noChangeAspect="1"/>
           </p:cNvPicPr>

--- a/templates/posts/october/05-10-2026-mon-ig-teachers-day-option-3-wreath.pptx
+++ b/templates/posts/october/05-10-2026-mon-ig-teachers-day-option-3-wreath.pptx
@@ -3665,9 +3665,48 @@
           </a:p>
         </p:txBody>
       </p:sp>
+      <p:sp>
+        <p:nvSpPr>
+          <p:cNvPr id="4" name="TextBox 3"/>
+          <p:cNvSpPr txBox="1"/>
+          <p:nvPr/>
+        </p:nvSpPr>
+        <p:spPr>
+          <a:xfrm>
+            <a:off x="495300" y="2190750"/>
+            <a:ext cx="4572000" cy="2286000"/>
+          </a:xfrm>
+          <a:prstGeom prst="rect">
+            <a:avLst/>
+          </a:prstGeom>
+          <a:noFill/>
+        </p:spPr>
+        <p:txBody>
+          <a:bodyPr wrap="square" lIns="0" rIns="0" tIns="0" bIns="0" anchor="ctr">
+            <a:spAutoFit/>
+          </a:bodyPr>
+          <a:lstStyle/>
+          <a:p>
+            <a:pPr algn="l">
+              <a:lnSpc>
+                <a:spcPct val="100000"/>
+              </a:lnSpc>
+            </a:pPr>
+            <a:r>
+              <a:rPr sz="4000" b="1" i="0">
+                <a:solidFill>
+                  <a:srgbClr val="31662F"/>
+                </a:solidFill>
+                <a:latin typeface="Montserrat"/>
+              </a:rPr>
+              <a:t>Happy World Teachers' Day</a:t>
+            </a:r>
+          </a:p>
+        </p:txBody>
+      </p:sp>
       <p:pic>
         <p:nvPicPr>
-          <p:cNvPr id="4" name="Picture 3" descr="9036284228287914251.jpg"/>
+          <p:cNvPr id="5" name="Picture 4" descr="4408951095294771185.jpg"/>
           <p:cNvPicPr>
             <a:picLocks noChangeAspect="1"/>
           </p:cNvPicPr>
@@ -3681,7 +3720,7 @@
         </p:blipFill>
         <p:spPr>
           <a:xfrm>
-            <a:off x="457200" y="2190750"/>
+            <a:off x="5181600" y="2190750"/>
             <a:ext cx="2286000" cy="2286000"/>
           </a:xfrm>
           <a:prstGeom prst="rect">
@@ -3691,13 +3730,13 @@
       </p:pic>
       <p:sp>
         <p:nvSpPr>
-          <p:cNvPr id="5" name="Rectangle 4"/>
+          <p:cNvPr id="6" name="Rectangle 5"/>
           <p:cNvSpPr/>
           <p:nvPr/>
         </p:nvSpPr>
         <p:spPr>
           <a:xfrm>
-            <a:off x="457200" y="4057650"/>
+            <a:off x="5181600" y="4057650"/>
             <a:ext cx="2286000" cy="419100"/>
           </a:xfrm>
           <a:prstGeom prst="rect">
@@ -3737,13 +3776,13 @@
       </p:sp>
       <p:sp>
         <p:nvSpPr>
-          <p:cNvPr id="6" name="TextBox 5"/>
+          <p:cNvPr id="7" name="TextBox 6"/>
           <p:cNvSpPr txBox="1"/>
           <p:nvPr/>
         </p:nvSpPr>
         <p:spPr>
           <a:xfrm>
-            <a:off x="514350" y="4057650"/>
+            <a:off x="5238750" y="4057650"/>
             <a:ext cx="2171700" cy="419100"/>
           </a:xfrm>
           <a:prstGeom prst="rect">
@@ -3776,7 +3815,7 @@
       </p:sp>
       <p:pic>
         <p:nvPicPr>
-          <p:cNvPr id="7" name="Picture 6" descr="7264490724320908151.jpg"/>
+          <p:cNvPr id="8" name="Picture 7" descr="2053480673178515544.jpg"/>
           <p:cNvPicPr>
             <a:picLocks noChangeAspect="1"/>
           </p:cNvPicPr>
@@ -3790,7 +3829,7 @@
         </p:blipFill>
         <p:spPr>
           <a:xfrm>
-            <a:off x="2819400" y="2190750"/>
+            <a:off x="7543800" y="2190750"/>
             <a:ext cx="2286000" cy="2286000"/>
           </a:xfrm>
           <a:prstGeom prst="rect">
@@ -3800,13 +3839,13 @@
       </p:pic>
       <p:sp>
         <p:nvSpPr>
-          <p:cNvPr id="8" name="Rectangle 7"/>
+          <p:cNvPr id="9" name="Rectangle 8"/>
           <p:cNvSpPr/>
           <p:nvPr/>
         </p:nvSpPr>
         <p:spPr>
           <a:xfrm>
-            <a:off x="2819400" y="4057650"/>
+            <a:off x="7543800" y="4057650"/>
             <a:ext cx="2286000" cy="419100"/>
           </a:xfrm>
           <a:prstGeom prst="rect">
@@ -3846,13 +3885,13 @@
       </p:sp>
       <p:sp>
         <p:nvSpPr>
-          <p:cNvPr id="9" name="TextBox 8"/>
+          <p:cNvPr id="10" name="TextBox 9"/>
           <p:cNvSpPr txBox="1"/>
           <p:nvPr/>
         </p:nvSpPr>
         <p:spPr>
           <a:xfrm>
-            <a:off x="2876550" y="4057650"/>
+            <a:off x="7600950" y="4057650"/>
             <a:ext cx="2171700" cy="419100"/>
           </a:xfrm>
           <a:prstGeom prst="rect">
@@ -3885,7 +3924,7 @@
       </p:sp>
       <p:pic>
         <p:nvPicPr>
-          <p:cNvPr id="10" name="Picture 9" descr="9106841745323230857.jpg"/>
+          <p:cNvPr id="11" name="Picture 10" descr="8526052707322937247.jpg"/>
           <p:cNvPicPr>
             <a:picLocks noChangeAspect="1"/>
           </p:cNvPicPr>
@@ -3899,7 +3938,7 @@
         </p:blipFill>
         <p:spPr>
           <a:xfrm>
-            <a:off x="5181600" y="2190750"/>
+            <a:off x="457200" y="4552950"/>
             <a:ext cx="2286000" cy="2286000"/>
           </a:xfrm>
           <a:prstGeom prst="rect">
@@ -3909,13 +3948,13 @@
       </p:pic>
       <p:sp>
         <p:nvSpPr>
-          <p:cNvPr id="11" name="Rectangle 10"/>
+          <p:cNvPr id="12" name="Rectangle 11"/>
           <p:cNvSpPr/>
           <p:nvPr/>
         </p:nvSpPr>
         <p:spPr>
           <a:xfrm>
-            <a:off x="5181600" y="4057650"/>
+            <a:off x="457200" y="6419850"/>
             <a:ext cx="2286000" cy="419100"/>
           </a:xfrm>
           <a:prstGeom prst="rect">
@@ -3955,13 +3994,13 @@
       </p:sp>
       <p:sp>
         <p:nvSpPr>
-          <p:cNvPr id="12" name="TextBox 11"/>
+          <p:cNvPr id="13" name="TextBox 12"/>
           <p:cNvSpPr txBox="1"/>
           <p:nvPr/>
         </p:nvSpPr>
         <p:spPr>
           <a:xfrm>
-            <a:off x="5238750" y="4057650"/>
+            <a:off x="514350" y="6419850"/>
             <a:ext cx="2171700" cy="419100"/>
           </a:xfrm>
           <a:prstGeom prst="rect">
@@ -3994,7 +4033,7 @@
       </p:sp>
       <p:pic>
         <p:nvPicPr>
-          <p:cNvPr id="13" name="Picture 12" descr="6445759230204725191.jpg"/>
+          <p:cNvPr id="14" name="Picture 13" descr="4463640484023020558.jpg"/>
           <p:cNvPicPr>
             <a:picLocks noChangeAspect="1"/>
           </p:cNvPicPr>
@@ -4008,7 +4047,7 @@
         </p:blipFill>
         <p:spPr>
           <a:xfrm>
-            <a:off x="7543800" y="2190750"/>
+            <a:off x="2819400" y="4552950"/>
             <a:ext cx="2286000" cy="2286000"/>
           </a:xfrm>
           <a:prstGeom prst="rect">
@@ -4018,13 +4057,13 @@
       </p:pic>
       <p:sp>
         <p:nvSpPr>
-          <p:cNvPr id="14" name="Rectangle 13"/>
+          <p:cNvPr id="15" name="Rectangle 14"/>
           <p:cNvSpPr/>
           <p:nvPr/>
         </p:nvSpPr>
         <p:spPr>
           <a:xfrm>
-            <a:off x="7543800" y="4057650"/>
+            <a:off x="2819400" y="6419850"/>
             <a:ext cx="2286000" cy="419100"/>
           </a:xfrm>
           <a:prstGeom prst="rect">
@@ -4064,13 +4103,13 @@
       </p:sp>
       <p:sp>
         <p:nvSpPr>
-          <p:cNvPr id="15" name="TextBox 14"/>
+          <p:cNvPr id="16" name="TextBox 15"/>
           <p:cNvSpPr txBox="1"/>
           <p:nvPr/>
         </p:nvSpPr>
         <p:spPr>
           <a:xfrm>
-            <a:off x="7600950" y="4057650"/>
+            <a:off x="2876550" y="6419850"/>
             <a:ext cx="2171700" cy="419100"/>
           </a:xfrm>
           <a:prstGeom prst="rect">
@@ -4103,7 +4142,7 @@
       </p:sp>
       <p:pic>
         <p:nvPicPr>
-          <p:cNvPr id="16" name="Picture 15" descr="8803819581641044895.jpg"/>
+          <p:cNvPr id="17" name="Picture 16" descr="2262292987271407235.jpg"/>
           <p:cNvPicPr>
             <a:picLocks noChangeAspect="1"/>
           </p:cNvPicPr>
@@ -4117,7 +4156,7 @@
         </p:blipFill>
         <p:spPr>
           <a:xfrm>
-            <a:off x="1638300" y="4552950"/>
+            <a:off x="5181600" y="4552950"/>
             <a:ext cx="2286000" cy="2286000"/>
           </a:xfrm>
           <a:prstGeom prst="rect">
@@ -4127,13 +4166,13 @@
       </p:pic>
       <p:sp>
         <p:nvSpPr>
-          <p:cNvPr id="17" name="Rectangle 16"/>
+          <p:cNvPr id="18" name="Rectangle 17"/>
           <p:cNvSpPr/>
           <p:nvPr/>
         </p:nvSpPr>
         <p:spPr>
           <a:xfrm>
-            <a:off x="1638300" y="6419850"/>
+            <a:off x="5181600" y="6419850"/>
             <a:ext cx="2286000" cy="419100"/>
           </a:xfrm>
           <a:prstGeom prst="rect">
@@ -4173,13 +4212,13 @@
       </p:sp>
       <p:sp>
         <p:nvSpPr>
-          <p:cNvPr id="18" name="TextBox 17"/>
+          <p:cNvPr id="19" name="TextBox 18"/>
           <p:cNvSpPr txBox="1"/>
           <p:nvPr/>
         </p:nvSpPr>
         <p:spPr>
           <a:xfrm>
-            <a:off x="1695450" y="6419850"/>
+            <a:off x="5238750" y="6419850"/>
             <a:ext cx="2171700" cy="419100"/>
           </a:xfrm>
           <a:prstGeom prst="rect">
@@ -4212,7 +4251,7 @@
       </p:sp>
       <p:pic>
         <p:nvPicPr>
-          <p:cNvPr id="19" name="Picture 18" descr="8536373804798833227.jpg"/>
+          <p:cNvPr id="20" name="Picture 19" descr="9013575186157804863.jpg"/>
           <p:cNvPicPr>
             <a:picLocks noChangeAspect="1"/>
           </p:cNvPicPr>
@@ -4226,7 +4265,7 @@
         </p:blipFill>
         <p:spPr>
           <a:xfrm>
-            <a:off x="4000500" y="4552950"/>
+            <a:off x="7543800" y="4552950"/>
             <a:ext cx="2286000" cy="2286000"/>
           </a:xfrm>
           <a:prstGeom prst="rect">
@@ -4236,13 +4275,13 @@
       </p:pic>
       <p:sp>
         <p:nvSpPr>
-          <p:cNvPr id="20" name="Rectangle 19"/>
+          <p:cNvPr id="21" name="Rectangle 20"/>
           <p:cNvSpPr/>
           <p:nvPr/>
         </p:nvSpPr>
         <p:spPr>
           <a:xfrm>
-            <a:off x="4000500" y="6419850"/>
+            <a:off x="7543800" y="6419850"/>
             <a:ext cx="2286000" cy="419100"/>
           </a:xfrm>
           <a:prstGeom prst="rect">
@@ -4282,13 +4321,13 @@
       </p:sp>
       <p:sp>
         <p:nvSpPr>
-          <p:cNvPr id="21" name="TextBox 20"/>
+          <p:cNvPr id="22" name="TextBox 21"/>
           <p:cNvSpPr txBox="1"/>
           <p:nvPr/>
         </p:nvSpPr>
         <p:spPr>
           <a:xfrm>
-            <a:off x="4057650" y="6419850"/>
+            <a:off x="7600950" y="6419850"/>
             <a:ext cx="2171700" cy="419100"/>
           </a:xfrm>
           <a:prstGeom prst="rect">
@@ -4321,7 +4360,7 @@
       </p:sp>
       <p:pic>
         <p:nvPicPr>
-          <p:cNvPr id="22" name="Picture 21" descr="8164580861635186193.jpg"/>
+          <p:cNvPr id="23" name="Picture 22" descr="5529725699895573590.jpg"/>
           <p:cNvPicPr>
             <a:picLocks noChangeAspect="1"/>
           </p:cNvPicPr>
@@ -4335,7 +4374,7 @@
         </p:blipFill>
         <p:spPr>
           <a:xfrm>
-            <a:off x="6362700" y="4552950"/>
+            <a:off x="457200" y="6915150"/>
             <a:ext cx="2286000" cy="2286000"/>
           </a:xfrm>
           <a:prstGeom prst="rect">
@@ -4345,13 +4384,13 @@
       </p:pic>
       <p:sp>
         <p:nvSpPr>
-          <p:cNvPr id="23" name="Rectangle 22"/>
+          <p:cNvPr id="24" name="Rectangle 23"/>
           <p:cNvSpPr/>
           <p:nvPr/>
         </p:nvSpPr>
         <p:spPr>
           <a:xfrm>
-            <a:off x="6362700" y="6419850"/>
+            <a:off x="457200" y="8782050"/>
             <a:ext cx="2286000" cy="419100"/>
           </a:xfrm>
           <a:prstGeom prst="rect">
@@ -4391,13 +4430,13 @@
       </p:sp>
       <p:sp>
         <p:nvSpPr>
-          <p:cNvPr id="24" name="TextBox 23"/>
+          <p:cNvPr id="25" name="TextBox 24"/>
           <p:cNvSpPr txBox="1"/>
           <p:nvPr/>
         </p:nvSpPr>
         <p:spPr>
           <a:xfrm>
-            <a:off x="6419850" y="6419850"/>
+            <a:off x="514350" y="8782050"/>
             <a:ext cx="2171700" cy="419100"/>
           </a:xfrm>
           <a:prstGeom prst="rect">
@@ -4430,7 +4469,7 @@
       </p:sp>
       <p:pic>
         <p:nvPicPr>
-          <p:cNvPr id="25" name="Picture 24" descr="2894971483344189381.jpg"/>
+          <p:cNvPr id="26" name="Picture 25" descr="2407624395823463407.jpg"/>
           <p:cNvPicPr>
             <a:picLocks noChangeAspect="1"/>
           </p:cNvPicPr>
@@ -4444,7 +4483,7 @@
         </p:blipFill>
         <p:spPr>
           <a:xfrm>
-            <a:off x="457200" y="6915150"/>
+            <a:off x="2819400" y="6915150"/>
             <a:ext cx="2286000" cy="2286000"/>
           </a:xfrm>
           <a:prstGeom prst="rect">
@@ -4454,13 +4493,13 @@
       </p:pic>
       <p:sp>
         <p:nvSpPr>
-          <p:cNvPr id="26" name="Rectangle 25"/>
+          <p:cNvPr id="27" name="Rectangle 26"/>
           <p:cNvSpPr/>
           <p:nvPr/>
         </p:nvSpPr>
         <p:spPr>
           <a:xfrm>
-            <a:off x="457200" y="8782050"/>
+            <a:off x="2819400" y="8782050"/>
             <a:ext cx="2286000" cy="419100"/>
           </a:xfrm>
           <a:prstGeom prst="rect">
@@ -4500,13 +4539,13 @@
       </p:sp>
       <p:sp>
         <p:nvSpPr>
-          <p:cNvPr id="27" name="TextBox 26"/>
+          <p:cNvPr id="28" name="TextBox 27"/>
           <p:cNvSpPr txBox="1"/>
           <p:nvPr/>
         </p:nvSpPr>
         <p:spPr>
           <a:xfrm>
-            <a:off x="514350" y="8782050"/>
+            <a:off x="2876550" y="8782050"/>
             <a:ext cx="2171700" cy="419100"/>
           </a:xfrm>
           <a:prstGeom prst="rect">
@@ -4539,7 +4578,7 @@
       </p:sp>
       <p:pic>
         <p:nvPicPr>
-          <p:cNvPr id="28" name="Picture 27" descr="454656652608966177.jpg"/>
+          <p:cNvPr id="29" name="Picture 28" descr="1164985834360799692.jpg"/>
           <p:cNvPicPr>
             <a:picLocks noChangeAspect="1"/>
           </p:cNvPicPr>
@@ -4553,7 +4592,7 @@
         </p:blipFill>
         <p:spPr>
           <a:xfrm>
-            <a:off x="2819400" y="6915150"/>
+            <a:off x="5181600" y="6915150"/>
             <a:ext cx="2286000" cy="2286000"/>
           </a:xfrm>
           <a:prstGeom prst="rect">
@@ -4563,13 +4602,13 @@
       </p:pic>
       <p:sp>
         <p:nvSpPr>
-          <p:cNvPr id="29" name="Rectangle 28"/>
+          <p:cNvPr id="30" name="Rectangle 29"/>
           <p:cNvSpPr/>
           <p:nvPr/>
         </p:nvSpPr>
         <p:spPr>
           <a:xfrm>
-            <a:off x="2819400" y="8782050"/>
+            <a:off x="5181600" y="8782050"/>
             <a:ext cx="2286000" cy="419100"/>
           </a:xfrm>
           <a:prstGeom prst="rect">
@@ -4609,13 +4648,13 @@
       </p:sp>
       <p:sp>
         <p:nvSpPr>
-          <p:cNvPr id="30" name="TextBox 29"/>
+          <p:cNvPr id="31" name="TextBox 30"/>
           <p:cNvSpPr txBox="1"/>
           <p:nvPr/>
         </p:nvSpPr>
         <p:spPr>
           <a:xfrm>
-            <a:off x="2876550" y="8782050"/>
+            <a:off x="5238750" y="8782050"/>
             <a:ext cx="2171700" cy="419100"/>
           </a:xfrm>
           <a:prstGeom prst="rect">
@@ -4648,7 +4687,7 @@
       </p:sp>
       <p:pic>
         <p:nvPicPr>
-          <p:cNvPr id="31" name="Picture 30" descr="3512431765128565377.jpg"/>
+          <p:cNvPr id="32" name="Picture 31" descr="2031739261793493277.jpg"/>
           <p:cNvPicPr>
             <a:picLocks noChangeAspect="1"/>
           </p:cNvPicPr>
@@ -4662,7 +4701,7 @@
         </p:blipFill>
         <p:spPr>
           <a:xfrm>
-            <a:off x="5181600" y="6915150"/>
+            <a:off x="7543800" y="6915150"/>
             <a:ext cx="2286000" cy="2286000"/>
           </a:xfrm>
           <a:prstGeom prst="rect">
@@ -4672,13 +4711,13 @@
       </p:pic>
       <p:sp>
         <p:nvSpPr>
-          <p:cNvPr id="32" name="Rectangle 31"/>
+          <p:cNvPr id="33" name="Rectangle 32"/>
           <p:cNvSpPr/>
           <p:nvPr/>
         </p:nvSpPr>
         <p:spPr>
           <a:xfrm>
-            <a:off x="5181600" y="8782050"/>
+            <a:off x="7543800" y="8782050"/>
             <a:ext cx="2286000" cy="419100"/>
           </a:xfrm>
           <a:prstGeom prst="rect">
@@ -4718,13 +4757,13 @@
       </p:sp>
       <p:sp>
         <p:nvSpPr>
-          <p:cNvPr id="33" name="TextBox 32"/>
+          <p:cNvPr id="34" name="TextBox 33"/>
           <p:cNvSpPr txBox="1"/>
           <p:nvPr/>
         </p:nvSpPr>
         <p:spPr>
           <a:xfrm>
-            <a:off x="5238750" y="8782050"/>
+            <a:off x="7600950" y="8782050"/>
             <a:ext cx="2171700" cy="419100"/>
           </a:xfrm>
           <a:prstGeom prst="rect">
@@ -4757,7 +4796,7 @@
       </p:sp>
       <p:pic>
         <p:nvPicPr>
-          <p:cNvPr id="34" name="Picture 33" descr="9208379026975339746.jpg"/>
+          <p:cNvPr id="35" name="Picture 34" descr="4102834731964614266.jpg"/>
           <p:cNvPicPr>
             <a:picLocks noChangeAspect="1"/>
           </p:cNvPicPr>
@@ -4771,7 +4810,7 @@
         </p:blipFill>
         <p:spPr>
           <a:xfrm>
-            <a:off x="7543800" y="6915150"/>
+            <a:off x="457200" y="9277350"/>
             <a:ext cx="2286000" cy="2286000"/>
           </a:xfrm>
           <a:prstGeom prst="rect">
@@ -4781,13 +4820,13 @@
       </p:pic>
       <p:sp>
         <p:nvSpPr>
-          <p:cNvPr id="35" name="Rectangle 34"/>
+          <p:cNvPr id="36" name="Rectangle 35"/>
           <p:cNvSpPr/>
           <p:nvPr/>
         </p:nvSpPr>
         <p:spPr>
           <a:xfrm>
-            <a:off x="7543800" y="8782050"/>
+            <a:off x="457200" y="11144250"/>
             <a:ext cx="2286000" cy="419100"/>
           </a:xfrm>
           <a:prstGeom prst="rect">
@@ -4827,13 +4866,13 @@
       </p:sp>
       <p:sp>
         <p:nvSpPr>
-          <p:cNvPr id="36" name="TextBox 35"/>
+          <p:cNvPr id="37" name="TextBox 36"/>
           <p:cNvSpPr txBox="1"/>
           <p:nvPr/>
         </p:nvSpPr>
         <p:spPr>
           <a:xfrm>
-            <a:off x="7600950" y="8782050"/>
+            <a:off x="514350" y="11144250"/>
             <a:ext cx="2171700" cy="419100"/>
           </a:xfrm>
           <a:prstGeom prst="rect">
@@ -4866,7 +4905,7 @@
       </p:sp>
       <p:pic>
         <p:nvPicPr>
-          <p:cNvPr id="37" name="Picture 36" descr="8672761161464777380.jpg"/>
+          <p:cNvPr id="38" name="Picture 37" descr="8877044523468660322.jpg"/>
           <p:cNvPicPr>
             <a:picLocks noChangeAspect="1"/>
           </p:cNvPicPr>
@@ -4880,7 +4919,7 @@
         </p:blipFill>
         <p:spPr>
           <a:xfrm>
-            <a:off x="1638300" y="9277350"/>
+            <a:off x="2819400" y="9277350"/>
             <a:ext cx="2286000" cy="2286000"/>
           </a:xfrm>
           <a:prstGeom prst="rect">
@@ -4890,13 +4929,13 @@
       </p:pic>
       <p:sp>
         <p:nvSpPr>
-          <p:cNvPr id="38" name="Rectangle 37"/>
+          <p:cNvPr id="39" name="Rectangle 38"/>
           <p:cNvSpPr/>
           <p:nvPr/>
         </p:nvSpPr>
         <p:spPr>
           <a:xfrm>
-            <a:off x="1638300" y="11144250"/>
+            <a:off x="2819400" y="11144250"/>
             <a:ext cx="2286000" cy="419100"/>
           </a:xfrm>
           <a:prstGeom prst="rect">
@@ -4936,13 +4975,13 @@
       </p:sp>
       <p:sp>
         <p:nvSpPr>
-          <p:cNvPr id="39" name="TextBox 38"/>
+          <p:cNvPr id="40" name="TextBox 39"/>
           <p:cNvSpPr txBox="1"/>
           <p:nvPr/>
         </p:nvSpPr>
         <p:spPr>
           <a:xfrm>
-            <a:off x="1695450" y="11144250"/>
+            <a:off x="2876550" y="11144250"/>
             <a:ext cx="2171700" cy="419100"/>
           </a:xfrm>
           <a:prstGeom prst="rect">
@@ -4975,7 +5014,7 @@
       </p:sp>
       <p:pic>
         <p:nvPicPr>
-          <p:cNvPr id="40" name="Picture 39" descr="3359842666902028946.jpg"/>
+          <p:cNvPr id="41" name="Picture 40" descr="8585654983711146034.jpg"/>
           <p:cNvPicPr>
             <a:picLocks noChangeAspect="1"/>
           </p:cNvPicPr>
@@ -4989,7 +5028,7 @@
         </p:blipFill>
         <p:spPr>
           <a:xfrm>
-            <a:off x="4000500" y="9277350"/>
+            <a:off x="5181600" y="9277350"/>
             <a:ext cx="2286000" cy="2286000"/>
           </a:xfrm>
           <a:prstGeom prst="rect">
@@ -4999,13 +5038,13 @@
       </p:pic>
       <p:sp>
         <p:nvSpPr>
-          <p:cNvPr id="41" name="Rectangle 40"/>
+          <p:cNvPr id="42" name="Rectangle 41"/>
           <p:cNvSpPr/>
           <p:nvPr/>
         </p:nvSpPr>
         <p:spPr>
           <a:xfrm>
-            <a:off x="4000500" y="11144250"/>
+            <a:off x="5181600" y="11144250"/>
             <a:ext cx="2286000" cy="419100"/>
           </a:xfrm>
           <a:prstGeom prst="rect">
@@ -5045,13 +5084,13 @@
       </p:sp>
       <p:sp>
         <p:nvSpPr>
-          <p:cNvPr id="42" name="TextBox 41"/>
+          <p:cNvPr id="43" name="TextBox 42"/>
           <p:cNvSpPr txBox="1"/>
           <p:nvPr/>
         </p:nvSpPr>
         <p:spPr>
           <a:xfrm>
-            <a:off x="4057650" y="11144250"/>
+            <a:off x="5238750" y="11144250"/>
             <a:ext cx="2171700" cy="419100"/>
           </a:xfrm>
           <a:prstGeom prst="rect">
@@ -5084,7 +5123,7 @@
       </p:sp>
       <p:pic>
         <p:nvPicPr>
-          <p:cNvPr id="43" name="Picture 42" descr="8025998113937040021.jpg"/>
+          <p:cNvPr id="44" name="Picture 43" descr="8174182683401141233.jpg"/>
           <p:cNvPicPr>
             <a:picLocks noChangeAspect="1"/>
           </p:cNvPicPr>
@@ -5098,7 +5137,7 @@
         </p:blipFill>
         <p:spPr>
           <a:xfrm>
-            <a:off x="6362700" y="9277350"/>
+            <a:off x="7543800" y="9277350"/>
             <a:ext cx="2286000" cy="2286000"/>
           </a:xfrm>
           <a:prstGeom prst="rect">
@@ -5108,13 +5147,13 @@
       </p:pic>
       <p:sp>
         <p:nvSpPr>
-          <p:cNvPr id="44" name="Rectangle 43"/>
+          <p:cNvPr id="45" name="Rectangle 44"/>
           <p:cNvSpPr/>
           <p:nvPr/>
         </p:nvSpPr>
         <p:spPr>
           <a:xfrm>
-            <a:off x="6362700" y="11144250"/>
+            <a:off x="7543800" y="11144250"/>
             <a:ext cx="2286000" cy="419100"/>
           </a:xfrm>
           <a:prstGeom prst="rect">
@@ -5154,13 +5193,13 @@
       </p:sp>
       <p:sp>
         <p:nvSpPr>
-          <p:cNvPr id="45" name="TextBox 44"/>
+          <p:cNvPr id="46" name="TextBox 45"/>
           <p:cNvSpPr txBox="1"/>
           <p:nvPr/>
         </p:nvSpPr>
         <p:spPr>
           <a:xfrm>
-            <a:off x="6419850" y="11144250"/>
+            <a:off x="7600950" y="11144250"/>
             <a:ext cx="2171700" cy="419100"/>
           </a:xfrm>
           <a:prstGeom prst="rect">

--- a/templates/posts/october/05-10-2026-mon-ig-teachers-day-option-3-wreath.pptx
+++ b/templates/posts/october/05-10-2026-mon-ig-teachers-day-option-3-wreath.pptx
@@ -3706,7 +3706,7 @@
       </p:sp>
       <p:pic>
         <p:nvPicPr>
-          <p:cNvPr id="5" name="Picture 4" descr="4408951095294771185.jpg"/>
+          <p:cNvPr id="5" name="Picture 4" descr="6234609011925723337.jpg"/>
           <p:cNvPicPr>
             <a:picLocks noChangeAspect="1"/>
           </p:cNvPicPr>
@@ -3815,7 +3815,7 @@
       </p:sp>
       <p:pic>
         <p:nvPicPr>
-          <p:cNvPr id="8" name="Picture 7" descr="2053480673178515544.jpg"/>
+          <p:cNvPr id="8" name="Picture 7" descr="2885865381636175526.jpg"/>
           <p:cNvPicPr>
             <a:picLocks noChangeAspect="1"/>
           </p:cNvPicPr>
@@ -3924,7 +3924,7 @@
       </p:sp>
       <p:pic>
         <p:nvPicPr>
-          <p:cNvPr id="11" name="Picture 10" descr="8526052707322937247.jpg"/>
+          <p:cNvPr id="11" name="Picture 10" descr="4596608046275292327.jpg"/>
           <p:cNvPicPr>
             <a:picLocks noChangeAspect="1"/>
           </p:cNvPicPr>
@@ -4033,7 +4033,7 @@
       </p:sp>
       <p:pic>
         <p:nvPicPr>
-          <p:cNvPr id="14" name="Picture 13" descr="4463640484023020558.jpg"/>
+          <p:cNvPr id="14" name="Picture 13" descr="4332968967792942556.jpg"/>
           <p:cNvPicPr>
             <a:picLocks noChangeAspect="1"/>
           </p:cNvPicPr>
@@ -4142,7 +4142,7 @@
       </p:sp>
       <p:pic>
         <p:nvPicPr>
-          <p:cNvPr id="17" name="Picture 16" descr="2262292987271407235.jpg"/>
+          <p:cNvPr id="17" name="Picture 16" descr="8468941578046363424.jpg"/>
           <p:cNvPicPr>
             <a:picLocks noChangeAspect="1"/>
           </p:cNvPicPr>
@@ -4251,7 +4251,7 @@
       </p:sp>
       <p:pic>
         <p:nvPicPr>
-          <p:cNvPr id="20" name="Picture 19" descr="9013575186157804863.jpg"/>
+          <p:cNvPr id="20" name="Picture 19" descr="8881565924270927158.jpg"/>
           <p:cNvPicPr>
             <a:picLocks noChangeAspect="1"/>
           </p:cNvPicPr>
@@ -4360,7 +4360,7 @@
       </p:sp>
       <p:pic>
         <p:nvPicPr>
-          <p:cNvPr id="23" name="Picture 22" descr="5529725699895573590.jpg"/>
+          <p:cNvPr id="23" name="Picture 22" descr="4356876515863862456.jpg"/>
           <p:cNvPicPr>
             <a:picLocks noChangeAspect="1"/>
           </p:cNvPicPr>
@@ -4469,7 +4469,7 @@
       </p:sp>
       <p:pic>
         <p:nvPicPr>
-          <p:cNvPr id="26" name="Picture 25" descr="2407624395823463407.jpg"/>
+          <p:cNvPr id="26" name="Picture 25" descr="1621609621900963801.jpg"/>
           <p:cNvPicPr>
             <a:picLocks noChangeAspect="1"/>
           </p:cNvPicPr>
@@ -4578,7 +4578,7 @@
       </p:sp>
       <p:pic>
         <p:nvPicPr>
-          <p:cNvPr id="29" name="Picture 28" descr="1164985834360799692.jpg"/>
+          <p:cNvPr id="29" name="Picture 28" descr="6265112960125145205.jpg"/>
           <p:cNvPicPr>
             <a:picLocks noChangeAspect="1"/>
           </p:cNvPicPr>
@@ -4687,7 +4687,7 @@
       </p:sp>
       <p:pic>
         <p:nvPicPr>
-          <p:cNvPr id="32" name="Picture 31" descr="2031739261793493277.jpg"/>
+          <p:cNvPr id="32" name="Picture 31" descr="4497001751860755788.jpg"/>
           <p:cNvPicPr>
             <a:picLocks noChangeAspect="1"/>
           </p:cNvPicPr>
@@ -4796,7 +4796,7 @@
       </p:sp>
       <p:pic>
         <p:nvPicPr>
-          <p:cNvPr id="35" name="Picture 34" descr="4102834731964614266.jpg"/>
+          <p:cNvPr id="35" name="Picture 34" descr="6015455580736178253.jpg"/>
           <p:cNvPicPr>
             <a:picLocks noChangeAspect="1"/>
           </p:cNvPicPr>
@@ -4905,7 +4905,7 @@
       </p:sp>
       <p:pic>
         <p:nvPicPr>
-          <p:cNvPr id="38" name="Picture 37" descr="8877044523468660322.jpg"/>
+          <p:cNvPr id="38" name="Picture 37" descr="8671595325082427723.jpg"/>
           <p:cNvPicPr>
             <a:picLocks noChangeAspect="1"/>
           </p:cNvPicPr>
@@ -5014,7 +5014,7 @@
       </p:sp>
       <p:pic>
         <p:nvPicPr>
-          <p:cNvPr id="41" name="Picture 40" descr="8585654983711146034.jpg"/>
+          <p:cNvPr id="41" name="Picture 40" descr="530489703401159089.jpg"/>
           <p:cNvPicPr>
             <a:picLocks noChangeAspect="1"/>
           </p:cNvPicPr>
@@ -5123,7 +5123,7 @@
       </p:sp>
       <p:pic>
         <p:nvPicPr>
-          <p:cNvPr id="44" name="Picture 43" descr="8174182683401141233.jpg"/>
+          <p:cNvPr id="44" name="Picture 43" descr="1961223670800779458.jpg"/>
           <p:cNvPicPr>
             <a:picLocks noChangeAspect="1"/>
           </p:cNvPicPr>
@@ -5369,7 +5369,7 @@
             <a:r>
               <a:rPr sz="2600" b="1" i="0">
                 <a:solidFill>
-                  <a:srgbClr val="1A1A1A"/>
+                  <a:srgbClr val="333130"/>
                 </a:solidFill>
                 <a:latin typeface="Montserrat"/>
               </a:rPr>
@@ -5447,7 +5447,7 @@
             <a:r>
               <a:rPr sz="2600" b="1" i="0">
                 <a:solidFill>
-                  <a:srgbClr val="1A1A1A"/>
+                  <a:srgbClr val="333130"/>
                 </a:solidFill>
                 <a:latin typeface="Montserrat"/>
               </a:rPr>
@@ -5525,7 +5525,7 @@
             <a:r>
               <a:rPr sz="2600" b="1" i="0">
                 <a:solidFill>
-                  <a:srgbClr val="1A1A1A"/>
+                  <a:srgbClr val="333130"/>
                 </a:solidFill>
                 <a:latin typeface="Montserrat"/>
               </a:rPr>
@@ -5603,7 +5603,7 @@
             <a:r>
               <a:rPr sz="2600" b="1" i="0">
                 <a:solidFill>
-                  <a:srgbClr val="1A1A1A"/>
+                  <a:srgbClr val="333130"/>
                 </a:solidFill>
                 <a:latin typeface="Montserrat"/>
               </a:rPr>
@@ -5681,7 +5681,7 @@
             <a:r>
               <a:rPr sz="2600" b="1" i="0">
                 <a:solidFill>
-                  <a:srgbClr val="1A1A1A"/>
+                  <a:srgbClr val="333130"/>
                 </a:solidFill>
                 <a:latin typeface="Montserrat"/>
               </a:rPr>
@@ -5759,7 +5759,7 @@
             <a:r>
               <a:rPr sz="2600" b="1" i="0">
                 <a:solidFill>
-                  <a:srgbClr val="1A1A1A"/>
+                  <a:srgbClr val="333130"/>
                 </a:solidFill>
                 <a:latin typeface="Montserrat"/>
               </a:rPr>
@@ -5837,7 +5837,7 @@
             <a:r>
               <a:rPr sz="2600" b="1" i="0">
                 <a:solidFill>
-                  <a:srgbClr val="1A1A1A"/>
+                  <a:srgbClr val="333130"/>
                 </a:solidFill>
                 <a:latin typeface="Montserrat"/>
               </a:rPr>
@@ -5915,7 +5915,7 @@
             <a:r>
               <a:rPr sz="2600" b="1" i="0">
                 <a:solidFill>
-                  <a:srgbClr val="1A1A1A"/>
+                  <a:srgbClr val="333130"/>
                 </a:solidFill>
                 <a:latin typeface="Montserrat"/>
               </a:rPr>
@@ -5993,7 +5993,7 @@
             <a:r>
               <a:rPr sz="2600" b="1" i="0">
                 <a:solidFill>
-                  <a:srgbClr val="1A1A1A"/>
+                  <a:srgbClr val="333130"/>
                 </a:solidFill>
                 <a:latin typeface="Montserrat"/>
               </a:rPr>
@@ -6071,7 +6071,7 @@
             <a:r>
               <a:rPr sz="2600" b="1" i="0">
                 <a:solidFill>
-                  <a:srgbClr val="1A1A1A"/>
+                  <a:srgbClr val="333130"/>
                 </a:solidFill>
                 <a:latin typeface="Montserrat"/>
               </a:rPr>
@@ -6149,7 +6149,7 @@
             <a:r>
               <a:rPr sz="2600" b="1" i="0">
                 <a:solidFill>
-                  <a:srgbClr val="1A1A1A"/>
+                  <a:srgbClr val="333130"/>
                 </a:solidFill>
                 <a:latin typeface="Montserrat"/>
               </a:rPr>
@@ -6227,7 +6227,7 @@
             <a:r>
               <a:rPr sz="2600" b="1" i="0">
                 <a:solidFill>
-                  <a:srgbClr val="1A1A1A"/>
+                  <a:srgbClr val="333130"/>
                 </a:solidFill>
                 <a:latin typeface="Montserrat"/>
               </a:rPr>
@@ -6305,7 +6305,7 @@
             <a:r>
               <a:rPr sz="2600" b="1" i="0">
                 <a:solidFill>
-                  <a:srgbClr val="1A1A1A"/>
+                  <a:srgbClr val="333130"/>
                 </a:solidFill>
                 <a:latin typeface="Montserrat"/>
               </a:rPr>
@@ -6383,7 +6383,7 @@
             <a:r>
               <a:rPr sz="2600" b="1" i="0">
                 <a:solidFill>
-                  <a:srgbClr val="1A1A1A"/>
+                  <a:srgbClr val="333130"/>
                 </a:solidFill>
                 <a:latin typeface="Montserrat"/>
               </a:rPr>

--- a/templates/posts/october/05-10-2026-mon-ig-teachers-day-option-3-wreath.pptx
+++ b/templates/posts/october/05-10-2026-mon-ig-teachers-day-option-3-wreath.pptx
@@ -3706,7 +3706,7 @@
       </p:sp>
       <p:pic>
         <p:nvPicPr>
-          <p:cNvPr id="5" name="Picture 4" descr="6234609011925723337.jpg"/>
+          <p:cNvPr id="5" name="Picture 4" descr="3423127874932208630.jpg"/>
           <p:cNvPicPr>
             <a:picLocks noChangeAspect="1"/>
           </p:cNvPicPr>
@@ -3815,7 +3815,7 @@
       </p:sp>
       <p:pic>
         <p:nvPicPr>
-          <p:cNvPr id="8" name="Picture 7" descr="2885865381636175526.jpg"/>
+          <p:cNvPr id="8" name="Picture 7" descr="3297107423503027276.jpg"/>
           <p:cNvPicPr>
             <a:picLocks noChangeAspect="1"/>
           </p:cNvPicPr>
@@ -3924,7 +3924,7 @@
       </p:sp>
       <p:pic>
         <p:nvPicPr>
-          <p:cNvPr id="11" name="Picture 10" descr="4596608046275292327.jpg"/>
+          <p:cNvPr id="11" name="Picture 10" descr="6959830007125462775.jpg"/>
           <p:cNvPicPr>
             <a:picLocks noChangeAspect="1"/>
           </p:cNvPicPr>
@@ -4033,7 +4033,7 @@
       </p:sp>
       <p:pic>
         <p:nvPicPr>
-          <p:cNvPr id="14" name="Picture 13" descr="4332968967792942556.jpg"/>
+          <p:cNvPr id="14" name="Picture 13" descr="2532088052200438377.jpg"/>
           <p:cNvPicPr>
             <a:picLocks noChangeAspect="1"/>
           </p:cNvPicPr>
@@ -4142,7 +4142,7 @@
       </p:sp>
       <p:pic>
         <p:nvPicPr>
-          <p:cNvPr id="17" name="Picture 16" descr="8468941578046363424.jpg"/>
+          <p:cNvPr id="17" name="Picture 16" descr="7677503132644364983.jpg"/>
           <p:cNvPicPr>
             <a:picLocks noChangeAspect="1"/>
           </p:cNvPicPr>
@@ -4251,7 +4251,7 @@
       </p:sp>
       <p:pic>
         <p:nvPicPr>
-          <p:cNvPr id="20" name="Picture 19" descr="8881565924270927158.jpg"/>
+          <p:cNvPr id="20" name="Picture 19" descr="2495813991993553482.jpg"/>
           <p:cNvPicPr>
             <a:picLocks noChangeAspect="1"/>
           </p:cNvPicPr>
@@ -4360,7 +4360,7 @@
       </p:sp>
       <p:pic>
         <p:nvPicPr>
-          <p:cNvPr id="23" name="Picture 22" descr="4356876515863862456.jpg"/>
+          <p:cNvPr id="23" name="Picture 22" descr="992375284083682736.jpg"/>
           <p:cNvPicPr>
             <a:picLocks noChangeAspect="1"/>
           </p:cNvPicPr>
@@ -4469,7 +4469,7 @@
       </p:sp>
       <p:pic>
         <p:nvPicPr>
-          <p:cNvPr id="26" name="Picture 25" descr="1621609621900963801.jpg"/>
+          <p:cNvPr id="26" name="Picture 25" descr="4636357773151813356.jpg"/>
           <p:cNvPicPr>
             <a:picLocks noChangeAspect="1"/>
           </p:cNvPicPr>
@@ -4571,14 +4571,14 @@
                 </a:solidFill>
                 <a:latin typeface="Montserrat"/>
               </a:rPr>
-              <a:t>Aysen Ustunay</a:t>
+              <a:t>Ayşen Üstünay</a:t>
             </a:r>
           </a:p>
         </p:txBody>
       </p:sp>
       <p:pic>
         <p:nvPicPr>
-          <p:cNvPr id="29" name="Picture 28" descr="6265112960125145205.jpg"/>
+          <p:cNvPr id="29" name="Picture 28" descr="4337694397078735279.jpg"/>
           <p:cNvPicPr>
             <a:picLocks noChangeAspect="1"/>
           </p:cNvPicPr>
@@ -4687,7 +4687,7 @@
       </p:sp>
       <p:pic>
         <p:nvPicPr>
-          <p:cNvPr id="32" name="Picture 31" descr="4497001751860755788.jpg"/>
+          <p:cNvPr id="32" name="Picture 31" descr="8062215383129015180.jpg"/>
           <p:cNvPicPr>
             <a:picLocks noChangeAspect="1"/>
           </p:cNvPicPr>
@@ -4789,14 +4789,14 @@
                 </a:solidFill>
                 <a:latin typeface="Montserrat"/>
               </a:rPr>
-              <a:t>Gerald Ramirez</a:t>
+              <a:t>Gerald Ramírez</a:t>
             </a:r>
           </a:p>
         </p:txBody>
       </p:sp>
       <p:pic>
         <p:nvPicPr>
-          <p:cNvPr id="35" name="Picture 34" descr="6015455580736178253.jpg"/>
+          <p:cNvPr id="35" name="Picture 34" descr="2684707124881562698.jpg"/>
           <p:cNvPicPr>
             <a:picLocks noChangeAspect="1"/>
           </p:cNvPicPr>
@@ -4905,7 +4905,7 @@
       </p:sp>
       <p:pic>
         <p:nvPicPr>
-          <p:cNvPr id="38" name="Picture 37" descr="8671595325082427723.jpg"/>
+          <p:cNvPr id="38" name="Picture 37" descr="3303125404541949075.jpg"/>
           <p:cNvPicPr>
             <a:picLocks noChangeAspect="1"/>
           </p:cNvPicPr>
@@ -5007,14 +5007,14 @@
                 </a:solidFill>
                 <a:latin typeface="Montserrat"/>
               </a:rPr>
-              <a:t>Ib Borup Pederson</a:t>
+              <a:t>Ib Borup Pedersen</a:t>
             </a:r>
           </a:p>
         </p:txBody>
       </p:sp>
       <p:pic>
         <p:nvPicPr>
-          <p:cNvPr id="41" name="Picture 40" descr="530489703401159089.jpg"/>
+          <p:cNvPr id="41" name="Picture 40" descr="2484353581637585657.jpg"/>
           <p:cNvPicPr>
             <a:picLocks noChangeAspect="1"/>
           </p:cNvPicPr>
@@ -5123,7 +5123,7 @@
       </p:sp>
       <p:pic>
         <p:nvPicPr>
-          <p:cNvPr id="44" name="Picture 43" descr="1961223670800779458.jpg"/>
+          <p:cNvPr id="44" name="Picture 43" descr="5194115076089133331.jpg"/>
           <p:cNvPicPr>
             <a:picLocks noChangeAspect="1"/>
           </p:cNvPicPr>
@@ -5412,7 +5412,7 @@
                 </a:solidFill>
                 <a:latin typeface="Source Sans 3"/>
               </a:rPr>
-              <a:t>Director of Education &amp; Mentor</a:t>
+              <a:t>Instructor</a:t>
             </a:r>
           </a:p>
         </p:txBody>
@@ -5490,7 +5490,7 @@
                 </a:solidFill>
                 <a:latin typeface="Source Sans 3"/>
               </a:rPr>
-              <a:t>Advanced Programs Lead &amp; Mentor</a:t>
+              <a:t>Advanced Programs Lead</a:t>
             </a:r>
           </a:p>
         </p:txBody>
@@ -5529,7 +5529,7 @@
                 </a:solidFill>
                 <a:latin typeface="Montserrat"/>
               </a:rPr>
-              <a:t>Carla Portugal</a:t>
+              <a:t>Carla Ribeiro Machado e Portugal</a:t>
             </a:r>
           </a:p>
         </p:txBody>
@@ -5568,7 +5568,7 @@
                 </a:solidFill>
                 <a:latin typeface="Source Sans 3"/>
               </a:rPr>
-              <a:t>Science Lead &amp; Mentor</a:t>
+              <a:t>SFW Mentor</a:t>
             </a:r>
           </a:p>
         </p:txBody>
@@ -5646,7 +5646,7 @@
                 </a:solidFill>
                 <a:latin typeface="Source Sans 3"/>
               </a:rPr>
-              <a:t>Advanced Programs Mentor</a:t>
+              <a:t>SFW Consultant &amp; Mentor</a:t>
             </a:r>
           </a:p>
         </p:txBody>
@@ -5724,7 +5724,7 @@
                 </a:solidFill>
                 <a:latin typeface="Source Sans 3"/>
               </a:rPr>
-              <a:t>Advanced Programs Mentor</a:t>
+              <a:t>SFW Consultant &amp; Mentor</a:t>
             </a:r>
           </a:p>
         </p:txBody>
@@ -5802,7 +5802,7 @@
                 </a:solidFill>
                 <a:latin typeface="Source Sans 3"/>
               </a:rPr>
-              <a:t>Advanced Programs Mentor</a:t>
+              <a:t>SFW Consultant &amp; Mentor</a:t>
             </a:r>
           </a:p>
         </p:txBody>
@@ -5880,7 +5880,7 @@
                 </a:solidFill>
                 <a:latin typeface="Source Sans 3"/>
               </a:rPr>
-              <a:t>Advanced Programs Mentor</a:t>
+              <a:t>SFW Consultant &amp; Mentor</a:t>
             </a:r>
           </a:p>
         </p:txBody>
@@ -5919,7 +5919,7 @@
                 </a:solidFill>
                 <a:latin typeface="Montserrat"/>
               </a:rPr>
-              <a:t>Aysen Ustunay</a:t>
+              <a:t>Ayşen Üstünay</a:t>
             </a:r>
           </a:p>
         </p:txBody>
@@ -5958,7 +5958,7 @@
                 </a:solidFill>
                 <a:latin typeface="Source Sans 3"/>
               </a:rPr>
-              <a:t>Advanced Programs Mentor</a:t>
+              <a:t>SFW Consultant &amp; Mentor</a:t>
             </a:r>
           </a:p>
         </p:txBody>
@@ -6036,7 +6036,7 @@
                 </a:solidFill>
                 <a:latin typeface="Source Sans 3"/>
               </a:rPr>
-              <a:t>Advanced Programs Mentor</a:t>
+              <a:t>SFW Consultant &amp; Mentor</a:t>
             </a:r>
           </a:p>
         </p:txBody>
@@ -6075,7 +6075,7 @@
                 </a:solidFill>
                 <a:latin typeface="Montserrat"/>
               </a:rPr>
-              <a:t>Gerald Ramirez</a:t>
+              <a:t>Gerald Ramírez</a:t>
             </a:r>
           </a:p>
         </p:txBody>
@@ -6114,7 +6114,7 @@
                 </a:solidFill>
                 <a:latin typeface="Source Sans 3"/>
               </a:rPr>
-              <a:t>Advanced Programs Mentor</a:t>
+              <a:t>SFW Mentor</a:t>
             </a:r>
           </a:p>
         </p:txBody>
@@ -6192,7 +6192,7 @@
                 </a:solidFill>
                 <a:latin typeface="Source Sans 3"/>
               </a:rPr>
-              <a:t>Advanced Programs Admin</a:t>
+              <a:t>School Administration Officer</a:t>
             </a:r>
           </a:p>
         </p:txBody>
@@ -6231,7 +6231,7 @@
                 </a:solidFill>
                 <a:latin typeface="Montserrat"/>
               </a:rPr>
-              <a:t>Ib Borup Pederson</a:t>
+              <a:t>Ib Borup Pedersen</a:t>
             </a:r>
           </a:p>
         </p:txBody>
@@ -6270,7 +6270,7 @@
                 </a:solidFill>
                 <a:latin typeface="Source Sans 3"/>
               </a:rPr>
-              <a:t>Advanced Programs Mentor</a:t>
+              <a:t>Farmer, SFW Consultant &amp; Mentor</a:t>
             </a:r>
           </a:p>
         </p:txBody>
@@ -6348,7 +6348,7 @@
                 </a:solidFill>
                 <a:latin typeface="Source Sans 3"/>
               </a:rPr>
-              <a:t>Advanced Programs Mentor</a:t>
+              <a:t>Farmer, SFW Consultant &amp; Mentor</a:t>
             </a:r>
           </a:p>
         </p:txBody>
@@ -6426,7 +6426,7 @@
                 </a:solidFill>
                 <a:latin typeface="Source Sans 3"/>
               </a:rPr>
-              <a:t>Permaculture Lead Teacher</a:t>
+              <a:t>SFW Permaculture Lead</a:t>
             </a:r>
           </a:p>
         </p:txBody>

--- a/templates/posts/october/05-10-2026-mon-ig-teachers-day-option-3-wreath.pptx
+++ b/templates/posts/october/05-10-2026-mon-ig-teachers-day-option-3-wreath.pptx
@@ -3674,7 +3674,7 @@
         <p:spPr>
           <a:xfrm>
             <a:off x="495300" y="2190750"/>
-            <a:ext cx="4572000" cy="2286000"/>
+            <a:ext cx="3627120" cy="1813560"/>
           </a:xfrm>
           <a:prstGeom prst="rect">
             <a:avLst/>
@@ -3693,7 +3693,7 @@
               </a:lnSpc>
             </a:pPr>
             <a:r>
-              <a:rPr sz="4000" b="1" i="0">
+              <a:rPr sz="3400" b="1" i="0">
                 <a:solidFill>
                   <a:srgbClr val="31662F"/>
                 </a:solidFill>
@@ -3706,7 +3706,7 @@
       </p:sp>
       <p:pic>
         <p:nvPicPr>
-          <p:cNvPr id="5" name="Picture 4" descr="3423127874932208630.jpg"/>
+          <p:cNvPr id="5" name="Picture 4" descr="1752988849223235031.jpg"/>
           <p:cNvPicPr>
             <a:picLocks noChangeAspect="1"/>
           </p:cNvPicPr>
@@ -3720,8 +3720,8 @@
         </p:blipFill>
         <p:spPr>
           <a:xfrm>
-            <a:off x="5181600" y="2190750"/>
-            <a:ext cx="2286000" cy="2286000"/>
+            <a:off x="4236720" y="2190750"/>
+            <a:ext cx="1813560" cy="1813560"/>
           </a:xfrm>
           <a:prstGeom prst="rect">
             <a:avLst/>
@@ -3736,8 +3736,8 @@
         </p:nvSpPr>
         <p:spPr>
           <a:xfrm>
-            <a:off x="5181600" y="4057650"/>
-            <a:ext cx="2286000" cy="419100"/>
+            <a:off x="4236720" y="3661410"/>
+            <a:ext cx="1813560" cy="342900"/>
           </a:xfrm>
           <a:prstGeom prst="rect">
             <a:avLst/>
@@ -3782,8 +3782,8 @@
         </p:nvSpPr>
         <p:spPr>
           <a:xfrm>
-            <a:off x="5238750" y="4057650"/>
-            <a:ext cx="2171700" cy="419100"/>
+            <a:off x="4274820" y="3661410"/>
+            <a:ext cx="1737360" cy="342900"/>
           </a:xfrm>
           <a:prstGeom prst="rect">
             <a:avLst/>
@@ -3802,7 +3802,7 @@
               </a:lnSpc>
             </a:pPr>
             <a:r>
-              <a:rPr sz="1500" b="1" i="0">
+              <a:rPr sz="1200" b="1" i="0">
                 <a:solidFill>
                   <a:srgbClr val="31662F"/>
                 </a:solidFill>
@@ -3815,7 +3815,7 @@
       </p:sp>
       <p:pic>
         <p:nvPicPr>
-          <p:cNvPr id="8" name="Picture 7" descr="3297107423503027276.jpg"/>
+          <p:cNvPr id="8" name="Picture 7" descr="2612131318617217853.jpg"/>
           <p:cNvPicPr>
             <a:picLocks noChangeAspect="1"/>
           </p:cNvPicPr>
@@ -3829,8 +3829,8 @@
         </p:blipFill>
         <p:spPr>
           <a:xfrm>
-            <a:off x="7543800" y="2190750"/>
-            <a:ext cx="2286000" cy="2286000"/>
+            <a:off x="6126480" y="2190750"/>
+            <a:ext cx="1813560" cy="1813560"/>
           </a:xfrm>
           <a:prstGeom prst="rect">
             <a:avLst/>
@@ -3845,8 +3845,8 @@
         </p:nvSpPr>
         <p:spPr>
           <a:xfrm>
-            <a:off x="7543800" y="4057650"/>
-            <a:ext cx="2286000" cy="419100"/>
+            <a:off x="6126480" y="3661410"/>
+            <a:ext cx="1813560" cy="342900"/>
           </a:xfrm>
           <a:prstGeom prst="rect">
             <a:avLst/>
@@ -3891,8 +3891,8 @@
         </p:nvSpPr>
         <p:spPr>
           <a:xfrm>
-            <a:off x="7600950" y="4057650"/>
-            <a:ext cx="2171700" cy="419100"/>
+            <a:off x="6164580" y="3661410"/>
+            <a:ext cx="1737360" cy="342900"/>
           </a:xfrm>
           <a:prstGeom prst="rect">
             <a:avLst/>
@@ -3911,7 +3911,7 @@
               </a:lnSpc>
             </a:pPr>
             <a:r>
-              <a:rPr sz="1500" b="1" i="0">
+              <a:rPr sz="1200" b="1" i="0">
                 <a:solidFill>
                   <a:srgbClr val="31662F"/>
                 </a:solidFill>
@@ -3924,7 +3924,7 @@
       </p:sp>
       <p:pic>
         <p:nvPicPr>
-          <p:cNvPr id="11" name="Picture 10" descr="6959830007125462775.jpg"/>
+          <p:cNvPr id="11" name="Picture 10" descr="7144932367790493661.jpg"/>
           <p:cNvPicPr>
             <a:picLocks noChangeAspect="1"/>
           </p:cNvPicPr>
@@ -3938,8 +3938,8 @@
         </p:blipFill>
         <p:spPr>
           <a:xfrm>
-            <a:off x="457200" y="4552950"/>
-            <a:ext cx="2286000" cy="2286000"/>
+            <a:off x="8016240" y="2190750"/>
+            <a:ext cx="1813560" cy="1813560"/>
           </a:xfrm>
           <a:prstGeom prst="rect">
             <a:avLst/>
@@ -3954,8 +3954,8 @@
         </p:nvSpPr>
         <p:spPr>
           <a:xfrm>
-            <a:off x="457200" y="6419850"/>
-            <a:ext cx="2286000" cy="419100"/>
+            <a:off x="8016240" y="3661410"/>
+            <a:ext cx="1813560" cy="342900"/>
           </a:xfrm>
           <a:prstGeom prst="rect">
             <a:avLst/>
@@ -4000,8 +4000,8 @@
         </p:nvSpPr>
         <p:spPr>
           <a:xfrm>
-            <a:off x="514350" y="6419850"/>
-            <a:ext cx="2171700" cy="419100"/>
+            <a:off x="8054340" y="3661410"/>
+            <a:ext cx="1737360" cy="342900"/>
           </a:xfrm>
           <a:prstGeom prst="rect">
             <a:avLst/>
@@ -4020,7 +4020,7 @@
               </a:lnSpc>
             </a:pPr>
             <a:r>
-              <a:rPr sz="1500" b="1" i="0">
+              <a:rPr sz="1200" b="1" i="0">
                 <a:solidFill>
                   <a:srgbClr val="31662F"/>
                 </a:solidFill>
@@ -4033,7 +4033,7 @@
       </p:sp>
       <p:pic>
         <p:nvPicPr>
-          <p:cNvPr id="14" name="Picture 13" descr="2532088052200438377.jpg"/>
+          <p:cNvPr id="14" name="Picture 13" descr="1194488140148190033.jpg"/>
           <p:cNvPicPr>
             <a:picLocks noChangeAspect="1"/>
           </p:cNvPicPr>
@@ -4047,8 +4047,8 @@
         </p:blipFill>
         <p:spPr>
           <a:xfrm>
-            <a:off x="2819400" y="4552950"/>
-            <a:ext cx="2286000" cy="2286000"/>
+            <a:off x="457200" y="4080510"/>
+            <a:ext cx="1813560" cy="1813560"/>
           </a:xfrm>
           <a:prstGeom prst="rect">
             <a:avLst/>
@@ -4063,8 +4063,8 @@
         </p:nvSpPr>
         <p:spPr>
           <a:xfrm>
-            <a:off x="2819400" y="6419850"/>
-            <a:ext cx="2286000" cy="419100"/>
+            <a:off x="457200" y="5551170"/>
+            <a:ext cx="1813560" cy="342900"/>
           </a:xfrm>
           <a:prstGeom prst="rect">
             <a:avLst/>
@@ -4109,8 +4109,8 @@
         </p:nvSpPr>
         <p:spPr>
           <a:xfrm>
-            <a:off x="2876550" y="6419850"/>
-            <a:ext cx="2171700" cy="419100"/>
+            <a:off x="495300" y="5551170"/>
+            <a:ext cx="1737360" cy="342900"/>
           </a:xfrm>
           <a:prstGeom prst="rect">
             <a:avLst/>
@@ -4129,7 +4129,7 @@
               </a:lnSpc>
             </a:pPr>
             <a:r>
-              <a:rPr sz="1500" b="1" i="0">
+              <a:rPr sz="1200" b="1" i="0">
                 <a:solidFill>
                   <a:srgbClr val="31662F"/>
                 </a:solidFill>
@@ -4142,7 +4142,7 @@
       </p:sp>
       <p:pic>
         <p:nvPicPr>
-          <p:cNvPr id="17" name="Picture 16" descr="7677503132644364983.jpg"/>
+          <p:cNvPr id="17" name="Picture 16" descr="8647953704869287552.jpg"/>
           <p:cNvPicPr>
             <a:picLocks noChangeAspect="1"/>
           </p:cNvPicPr>
@@ -4156,8 +4156,8 @@
         </p:blipFill>
         <p:spPr>
           <a:xfrm>
-            <a:off x="5181600" y="4552950"/>
-            <a:ext cx="2286000" cy="2286000"/>
+            <a:off x="2346960" y="4080510"/>
+            <a:ext cx="1813560" cy="1813560"/>
           </a:xfrm>
           <a:prstGeom prst="rect">
             <a:avLst/>
@@ -4172,8 +4172,8 @@
         </p:nvSpPr>
         <p:spPr>
           <a:xfrm>
-            <a:off x="5181600" y="6419850"/>
-            <a:ext cx="2286000" cy="419100"/>
+            <a:off x="2346960" y="5551170"/>
+            <a:ext cx="1813560" cy="342900"/>
           </a:xfrm>
           <a:prstGeom prst="rect">
             <a:avLst/>
@@ -4218,8 +4218,8 @@
         </p:nvSpPr>
         <p:spPr>
           <a:xfrm>
-            <a:off x="5238750" y="6419850"/>
-            <a:ext cx="2171700" cy="419100"/>
+            <a:off x="2385060" y="5551170"/>
+            <a:ext cx="1737360" cy="342900"/>
           </a:xfrm>
           <a:prstGeom prst="rect">
             <a:avLst/>
@@ -4238,7 +4238,7 @@
               </a:lnSpc>
             </a:pPr>
             <a:r>
-              <a:rPr sz="1500" b="1" i="0">
+              <a:rPr sz="1200" b="1" i="0">
                 <a:solidFill>
                   <a:srgbClr val="31662F"/>
                 </a:solidFill>
@@ -4251,7 +4251,7 @@
       </p:sp>
       <p:pic>
         <p:nvPicPr>
-          <p:cNvPr id="20" name="Picture 19" descr="2495813991993553482.jpg"/>
+          <p:cNvPr id="20" name="Picture 19" descr="6026637821407471426.jpg"/>
           <p:cNvPicPr>
             <a:picLocks noChangeAspect="1"/>
           </p:cNvPicPr>
@@ -4265,8 +4265,8 @@
         </p:blipFill>
         <p:spPr>
           <a:xfrm>
-            <a:off x="7543800" y="4552950"/>
-            <a:ext cx="2286000" cy="2286000"/>
+            <a:off x="4236720" y="4080510"/>
+            <a:ext cx="1813560" cy="1813560"/>
           </a:xfrm>
           <a:prstGeom prst="rect">
             <a:avLst/>
@@ -4281,8 +4281,8 @@
         </p:nvSpPr>
         <p:spPr>
           <a:xfrm>
-            <a:off x="7543800" y="6419850"/>
-            <a:ext cx="2286000" cy="419100"/>
+            <a:off x="4236720" y="5551170"/>
+            <a:ext cx="1813560" cy="342900"/>
           </a:xfrm>
           <a:prstGeom prst="rect">
             <a:avLst/>
@@ -4327,8 +4327,8 @@
         </p:nvSpPr>
         <p:spPr>
           <a:xfrm>
-            <a:off x="7600950" y="6419850"/>
-            <a:ext cx="2171700" cy="419100"/>
+            <a:off x="4274820" y="5551170"/>
+            <a:ext cx="1737360" cy="342900"/>
           </a:xfrm>
           <a:prstGeom prst="rect">
             <a:avLst/>
@@ -4347,7 +4347,7 @@
               </a:lnSpc>
             </a:pPr>
             <a:r>
-              <a:rPr sz="1500" b="1" i="0">
+              <a:rPr sz="1200" b="1" i="0">
                 <a:solidFill>
                   <a:srgbClr val="31662F"/>
                 </a:solidFill>
@@ -4360,7 +4360,7 @@
       </p:sp>
       <p:pic>
         <p:nvPicPr>
-          <p:cNvPr id="23" name="Picture 22" descr="992375284083682736.jpg"/>
+          <p:cNvPr id="23" name="Picture 22" descr="3723017669234027646.jpg"/>
           <p:cNvPicPr>
             <a:picLocks noChangeAspect="1"/>
           </p:cNvPicPr>
@@ -4374,8 +4374,8 @@
         </p:blipFill>
         <p:spPr>
           <a:xfrm>
-            <a:off x="457200" y="6915150"/>
-            <a:ext cx="2286000" cy="2286000"/>
+            <a:off x="6126480" y="4080510"/>
+            <a:ext cx="1813560" cy="1813560"/>
           </a:xfrm>
           <a:prstGeom prst="rect">
             <a:avLst/>
@@ -4390,8 +4390,8 @@
         </p:nvSpPr>
         <p:spPr>
           <a:xfrm>
-            <a:off x="457200" y="8782050"/>
-            <a:ext cx="2286000" cy="419100"/>
+            <a:off x="6126480" y="5551170"/>
+            <a:ext cx="1813560" cy="342900"/>
           </a:xfrm>
           <a:prstGeom prst="rect">
             <a:avLst/>
@@ -4436,8 +4436,8 @@
         </p:nvSpPr>
         <p:spPr>
           <a:xfrm>
-            <a:off x="514350" y="8782050"/>
-            <a:ext cx="2171700" cy="419100"/>
+            <a:off x="6164580" y="5551170"/>
+            <a:ext cx="1737360" cy="342900"/>
           </a:xfrm>
           <a:prstGeom prst="rect">
             <a:avLst/>
@@ -4456,7 +4456,7 @@
               </a:lnSpc>
             </a:pPr>
             <a:r>
-              <a:rPr sz="1500" b="1" i="0">
+              <a:rPr sz="1200" b="1" i="0">
                 <a:solidFill>
                   <a:srgbClr val="31662F"/>
                 </a:solidFill>
@@ -4469,7 +4469,7 @@
       </p:sp>
       <p:pic>
         <p:nvPicPr>
-          <p:cNvPr id="26" name="Picture 25" descr="4636357773151813356.jpg"/>
+          <p:cNvPr id="26" name="Picture 25" descr="3113535558271719414.jpg"/>
           <p:cNvPicPr>
             <a:picLocks noChangeAspect="1"/>
           </p:cNvPicPr>
@@ -4483,8 +4483,8 @@
         </p:blipFill>
         <p:spPr>
           <a:xfrm>
-            <a:off x="2819400" y="6915150"/>
-            <a:ext cx="2286000" cy="2286000"/>
+            <a:off x="8016240" y="4080510"/>
+            <a:ext cx="1813560" cy="1813560"/>
           </a:xfrm>
           <a:prstGeom prst="rect">
             <a:avLst/>
@@ -4499,8 +4499,8 @@
         </p:nvSpPr>
         <p:spPr>
           <a:xfrm>
-            <a:off x="2819400" y="8782050"/>
-            <a:ext cx="2286000" cy="419100"/>
+            <a:off x="8016240" y="5551170"/>
+            <a:ext cx="1813560" cy="342900"/>
           </a:xfrm>
           <a:prstGeom prst="rect">
             <a:avLst/>
@@ -4545,8 +4545,8 @@
         </p:nvSpPr>
         <p:spPr>
           <a:xfrm>
-            <a:off x="2876550" y="8782050"/>
-            <a:ext cx="2171700" cy="419100"/>
+            <a:off x="8054340" y="5551170"/>
+            <a:ext cx="1737360" cy="342900"/>
           </a:xfrm>
           <a:prstGeom prst="rect">
             <a:avLst/>
@@ -4565,7 +4565,7 @@
               </a:lnSpc>
             </a:pPr>
             <a:r>
-              <a:rPr sz="1500" b="1" i="0">
+              <a:rPr sz="1200" b="1" i="0">
                 <a:solidFill>
                   <a:srgbClr val="31662F"/>
                 </a:solidFill>
@@ -4578,7 +4578,7 @@
       </p:sp>
       <p:pic>
         <p:nvPicPr>
-          <p:cNvPr id="29" name="Picture 28" descr="4337694397078735279.jpg"/>
+          <p:cNvPr id="29" name="Picture 28" descr="5414851247296223470.jpg"/>
           <p:cNvPicPr>
             <a:picLocks noChangeAspect="1"/>
           </p:cNvPicPr>
@@ -4592,8 +4592,8 @@
         </p:blipFill>
         <p:spPr>
           <a:xfrm>
-            <a:off x="5181600" y="6915150"/>
-            <a:ext cx="2286000" cy="2286000"/>
+            <a:off x="457200" y="5970270"/>
+            <a:ext cx="1813560" cy="1813560"/>
           </a:xfrm>
           <a:prstGeom prst="rect">
             <a:avLst/>
@@ -4608,8 +4608,8 @@
         </p:nvSpPr>
         <p:spPr>
           <a:xfrm>
-            <a:off x="5181600" y="8782050"/>
-            <a:ext cx="2286000" cy="419100"/>
+            <a:off x="457200" y="7440929"/>
+            <a:ext cx="1813560" cy="342900"/>
           </a:xfrm>
           <a:prstGeom prst="rect">
             <a:avLst/>
@@ -4654,8 +4654,8 @@
         </p:nvSpPr>
         <p:spPr>
           <a:xfrm>
-            <a:off x="5238750" y="8782050"/>
-            <a:ext cx="2171700" cy="419100"/>
+            <a:off x="495300" y="7440929"/>
+            <a:ext cx="1737360" cy="342900"/>
           </a:xfrm>
           <a:prstGeom prst="rect">
             <a:avLst/>
@@ -4674,7 +4674,7 @@
               </a:lnSpc>
             </a:pPr>
             <a:r>
-              <a:rPr sz="1500" b="1" i="0">
+              <a:rPr sz="1200" b="1" i="0">
                 <a:solidFill>
                   <a:srgbClr val="31662F"/>
                 </a:solidFill>
@@ -4687,7 +4687,7 @@
       </p:sp>
       <p:pic>
         <p:nvPicPr>
-          <p:cNvPr id="32" name="Picture 31" descr="8062215383129015180.jpg"/>
+          <p:cNvPr id="32" name="Picture 31" descr="6759120478498615729.jpg"/>
           <p:cNvPicPr>
             <a:picLocks noChangeAspect="1"/>
           </p:cNvPicPr>
@@ -4701,8 +4701,8 @@
         </p:blipFill>
         <p:spPr>
           <a:xfrm>
-            <a:off x="7543800" y="6915150"/>
-            <a:ext cx="2286000" cy="2286000"/>
+            <a:off x="2346960" y="5970270"/>
+            <a:ext cx="1813560" cy="1813560"/>
           </a:xfrm>
           <a:prstGeom prst="rect">
             <a:avLst/>
@@ -4717,8 +4717,8 @@
         </p:nvSpPr>
         <p:spPr>
           <a:xfrm>
-            <a:off x="7543800" y="8782050"/>
-            <a:ext cx="2286000" cy="419100"/>
+            <a:off x="2346960" y="7440929"/>
+            <a:ext cx="1813560" cy="342900"/>
           </a:xfrm>
           <a:prstGeom prst="rect">
             <a:avLst/>
@@ -4763,8 +4763,8 @@
         </p:nvSpPr>
         <p:spPr>
           <a:xfrm>
-            <a:off x="7600950" y="8782050"/>
-            <a:ext cx="2171700" cy="419100"/>
+            <a:off x="2385060" y="7440929"/>
+            <a:ext cx="1737360" cy="342900"/>
           </a:xfrm>
           <a:prstGeom prst="rect">
             <a:avLst/>
@@ -4783,7 +4783,7 @@
               </a:lnSpc>
             </a:pPr>
             <a:r>
-              <a:rPr sz="1500" b="1" i="0">
+              <a:rPr sz="1200" b="1" i="0">
                 <a:solidFill>
                   <a:srgbClr val="31662F"/>
                 </a:solidFill>
@@ -4796,7 +4796,7 @@
       </p:sp>
       <p:pic>
         <p:nvPicPr>
-          <p:cNvPr id="35" name="Picture 34" descr="2684707124881562698.jpg"/>
+          <p:cNvPr id="35" name="Picture 34" descr="9169552863569812281.jpg"/>
           <p:cNvPicPr>
             <a:picLocks noChangeAspect="1"/>
           </p:cNvPicPr>
@@ -4810,8 +4810,8 @@
         </p:blipFill>
         <p:spPr>
           <a:xfrm>
-            <a:off x="457200" y="9277350"/>
-            <a:ext cx="2286000" cy="2286000"/>
+            <a:off x="4236720" y="5970270"/>
+            <a:ext cx="1813560" cy="1813560"/>
           </a:xfrm>
           <a:prstGeom prst="rect">
             <a:avLst/>
@@ -4826,8 +4826,8 @@
         </p:nvSpPr>
         <p:spPr>
           <a:xfrm>
-            <a:off x="457200" y="11144250"/>
-            <a:ext cx="2286000" cy="419100"/>
+            <a:off x="4236720" y="7440929"/>
+            <a:ext cx="1813560" cy="342900"/>
           </a:xfrm>
           <a:prstGeom prst="rect">
             <a:avLst/>
@@ -4872,8 +4872,8 @@
         </p:nvSpPr>
         <p:spPr>
           <a:xfrm>
-            <a:off x="514350" y="11144250"/>
-            <a:ext cx="2171700" cy="419100"/>
+            <a:off x="4274820" y="7440929"/>
+            <a:ext cx="1737360" cy="342900"/>
           </a:xfrm>
           <a:prstGeom prst="rect">
             <a:avLst/>
@@ -4892,7 +4892,7 @@
               </a:lnSpc>
             </a:pPr>
             <a:r>
-              <a:rPr sz="1500" b="1" i="0">
+              <a:rPr sz="1200" b="1" i="0">
                 <a:solidFill>
                   <a:srgbClr val="31662F"/>
                 </a:solidFill>
@@ -4905,7 +4905,7 @@
       </p:sp>
       <p:pic>
         <p:nvPicPr>
-          <p:cNvPr id="38" name="Picture 37" descr="3303125404541949075.jpg"/>
+          <p:cNvPr id="38" name="Picture 37" descr="6225129540398821112.jpg"/>
           <p:cNvPicPr>
             <a:picLocks noChangeAspect="1"/>
           </p:cNvPicPr>
@@ -4919,8 +4919,8 @@
         </p:blipFill>
         <p:spPr>
           <a:xfrm>
-            <a:off x="2819400" y="9277350"/>
-            <a:ext cx="2286000" cy="2286000"/>
+            <a:off x="6126480" y="5970270"/>
+            <a:ext cx="1813560" cy="1813560"/>
           </a:xfrm>
           <a:prstGeom prst="rect">
             <a:avLst/>
@@ -4935,8 +4935,8 @@
         </p:nvSpPr>
         <p:spPr>
           <a:xfrm>
-            <a:off x="2819400" y="11144250"/>
-            <a:ext cx="2286000" cy="419100"/>
+            <a:off x="6126480" y="7440929"/>
+            <a:ext cx="1813560" cy="342900"/>
           </a:xfrm>
           <a:prstGeom prst="rect">
             <a:avLst/>
@@ -4981,8 +4981,8 @@
         </p:nvSpPr>
         <p:spPr>
           <a:xfrm>
-            <a:off x="2876550" y="11144250"/>
-            <a:ext cx="2171700" cy="419100"/>
+            <a:off x="6164580" y="7440929"/>
+            <a:ext cx="1737360" cy="342900"/>
           </a:xfrm>
           <a:prstGeom prst="rect">
             <a:avLst/>
@@ -5001,7 +5001,7 @@
               </a:lnSpc>
             </a:pPr>
             <a:r>
-              <a:rPr sz="1500" b="1" i="0">
+              <a:rPr sz="1200" b="1" i="0">
                 <a:solidFill>
                   <a:srgbClr val="31662F"/>
                 </a:solidFill>
@@ -5014,7 +5014,7 @@
       </p:sp>
       <p:pic>
         <p:nvPicPr>
-          <p:cNvPr id="41" name="Picture 40" descr="2484353581637585657.jpg"/>
+          <p:cNvPr id="41" name="Picture 40" descr="6957233813328317874.jpg"/>
           <p:cNvPicPr>
             <a:picLocks noChangeAspect="1"/>
           </p:cNvPicPr>
@@ -5028,8 +5028,8 @@
         </p:blipFill>
         <p:spPr>
           <a:xfrm>
-            <a:off x="5181600" y="9277350"/>
-            <a:ext cx="2286000" cy="2286000"/>
+            <a:off x="8016240" y="5970270"/>
+            <a:ext cx="1813560" cy="1813560"/>
           </a:xfrm>
           <a:prstGeom prst="rect">
             <a:avLst/>
@@ -5044,8 +5044,8 @@
         </p:nvSpPr>
         <p:spPr>
           <a:xfrm>
-            <a:off x="5181600" y="11144250"/>
-            <a:ext cx="2286000" cy="419100"/>
+            <a:off x="8016240" y="7440929"/>
+            <a:ext cx="1813560" cy="342900"/>
           </a:xfrm>
           <a:prstGeom prst="rect">
             <a:avLst/>
@@ -5090,8 +5090,8 @@
         </p:nvSpPr>
         <p:spPr>
           <a:xfrm>
-            <a:off x="5238750" y="11144250"/>
-            <a:ext cx="2171700" cy="419100"/>
+            <a:off x="8054340" y="7440929"/>
+            <a:ext cx="1737360" cy="342900"/>
           </a:xfrm>
           <a:prstGeom prst="rect">
             <a:avLst/>
@@ -5110,7 +5110,7 @@
               </a:lnSpc>
             </a:pPr>
             <a:r>
-              <a:rPr sz="1500" b="1" i="0">
+              <a:rPr sz="1200" b="1" i="0">
                 <a:solidFill>
                   <a:srgbClr val="31662F"/>
                 </a:solidFill>
@@ -5123,7 +5123,7 @@
       </p:sp>
       <p:pic>
         <p:nvPicPr>
-          <p:cNvPr id="44" name="Picture 43" descr="5194115076089133331.jpg"/>
+          <p:cNvPr id="44" name="Picture 43" descr="6998284926264825370.jpg"/>
           <p:cNvPicPr>
             <a:picLocks noChangeAspect="1"/>
           </p:cNvPicPr>
@@ -5137,8 +5137,8 @@
         </p:blipFill>
         <p:spPr>
           <a:xfrm>
-            <a:off x="7543800" y="9277350"/>
-            <a:ext cx="2286000" cy="2286000"/>
+            <a:off x="457200" y="7860030"/>
+            <a:ext cx="1813560" cy="1813560"/>
           </a:xfrm>
           <a:prstGeom prst="rect">
             <a:avLst/>
@@ -5153,8 +5153,8 @@
         </p:nvSpPr>
         <p:spPr>
           <a:xfrm>
-            <a:off x="7543800" y="11144250"/>
-            <a:ext cx="2286000" cy="419100"/>
+            <a:off x="457200" y="9330690"/>
+            <a:ext cx="1813560" cy="342900"/>
           </a:xfrm>
           <a:prstGeom prst="rect">
             <a:avLst/>
@@ -5199,8 +5199,8 @@
         </p:nvSpPr>
         <p:spPr>
           <a:xfrm>
-            <a:off x="7600950" y="11144250"/>
-            <a:ext cx="2171700" cy="419100"/>
+            <a:off x="495300" y="9330690"/>
+            <a:ext cx="1737360" cy="342900"/>
           </a:xfrm>
           <a:prstGeom prst="rect">
             <a:avLst/>
@@ -5219,13 +5219,449 @@
               </a:lnSpc>
             </a:pPr>
             <a:r>
-              <a:rPr sz="1500" b="1" i="0">
+              <a:rPr sz="1200" b="1" i="0">
                 <a:solidFill>
                   <a:srgbClr val="31662F"/>
                 </a:solidFill>
                 <a:latin typeface="Montserrat"/>
               </a:rPr>
               <a:t>Delvin Solkinson</a:t>
+            </a:r>
+          </a:p>
+        </p:txBody>
+      </p:sp>
+      <p:pic>
+        <p:nvPicPr>
+          <p:cNvPr id="47" name="Picture 46" descr="2904139003338272881.jpg"/>
+          <p:cNvPicPr>
+            <a:picLocks noChangeAspect="1"/>
+          </p:cNvPicPr>
+          <p:nvPr/>
+        </p:nvPicPr>
+        <p:blipFill>
+          <a:blip r:embed="rId17"/>
+          <a:stretch>
+            <a:fillRect/>
+          </a:stretch>
+        </p:blipFill>
+        <p:spPr>
+          <a:xfrm>
+            <a:off x="2346960" y="7860030"/>
+            <a:ext cx="1813560" cy="1813560"/>
+          </a:xfrm>
+          <a:prstGeom prst="rect">
+            <a:avLst/>
+          </a:prstGeom>
+        </p:spPr>
+      </p:pic>
+      <p:sp>
+        <p:nvSpPr>
+          <p:cNvPr id="48" name="Rectangle 47"/>
+          <p:cNvSpPr/>
+          <p:nvPr/>
+        </p:nvSpPr>
+        <p:spPr>
+          <a:xfrm>
+            <a:off x="2346960" y="9330690"/>
+            <a:ext cx="1813560" cy="342900"/>
+          </a:xfrm>
+          <a:prstGeom prst="rect">
+            <a:avLst/>
+          </a:prstGeom>
+          <a:solidFill>
+            <a:srgbClr val="F3F1EA">
+              <a:alpha val="88000"/>
+            </a:srgbClr>
+          </a:solidFill>
+          <a:ln>
+            <a:noFill/>
+          </a:ln>
+          <a:effectLst/>
+        </p:spPr>
+        <p:style>
+          <a:lnRef idx="1">
+            <a:schemeClr val="accent1"/>
+          </a:lnRef>
+          <a:fillRef idx="3">
+            <a:schemeClr val="accent1"/>
+          </a:fillRef>
+          <a:effectRef idx="2">
+            <a:schemeClr val="accent1"/>
+          </a:effectRef>
+          <a:fontRef idx="minor">
+            <a:schemeClr val="lt1"/>
+          </a:fontRef>
+        </p:style>
+        <p:txBody>
+          <a:bodyPr rtlCol="0" anchor="ctr"/>
+          <a:lstStyle/>
+          <a:p>
+            <a:pPr algn="ctr"/>
+          </a:p>
+        </p:txBody>
+      </p:sp>
+      <p:sp>
+        <p:nvSpPr>
+          <p:cNvPr id="49" name="TextBox 48"/>
+          <p:cNvSpPr txBox="1"/>
+          <p:nvPr/>
+        </p:nvSpPr>
+        <p:spPr>
+          <a:xfrm>
+            <a:off x="2385060" y="9330690"/>
+            <a:ext cx="1737360" cy="342900"/>
+          </a:xfrm>
+          <a:prstGeom prst="rect">
+            <a:avLst/>
+          </a:prstGeom>
+          <a:noFill/>
+        </p:spPr>
+        <p:txBody>
+          <a:bodyPr wrap="square" lIns="0" rIns="0" tIns="0" bIns="0" anchor="ctr">
+            <a:spAutoFit/>
+          </a:bodyPr>
+          <a:lstStyle/>
+          <a:p>
+            <a:pPr algn="ctr">
+              <a:lnSpc>
+                <a:spcPct val="120000"/>
+              </a:lnSpc>
+            </a:pPr>
+            <a:r>
+              <a:rPr sz="1200" b="1" i="0">
+                <a:solidFill>
+                  <a:srgbClr val="31662F"/>
+                </a:solidFill>
+                <a:latin typeface="Montserrat"/>
+              </a:rPr>
+              <a:t>Elina Psara</a:t>
+            </a:r>
+          </a:p>
+        </p:txBody>
+      </p:sp>
+      <p:pic>
+        <p:nvPicPr>
+          <p:cNvPr id="50" name="Picture 49" descr="7454114753255690645.jpg"/>
+          <p:cNvPicPr>
+            <a:picLocks noChangeAspect="1"/>
+          </p:cNvPicPr>
+          <p:nvPr/>
+        </p:nvPicPr>
+        <p:blipFill>
+          <a:blip r:embed="rId18"/>
+          <a:stretch>
+            <a:fillRect/>
+          </a:stretch>
+        </p:blipFill>
+        <p:spPr>
+          <a:xfrm>
+            <a:off x="4236720" y="7860030"/>
+            <a:ext cx="1813560" cy="1813560"/>
+          </a:xfrm>
+          <a:prstGeom prst="rect">
+            <a:avLst/>
+          </a:prstGeom>
+        </p:spPr>
+      </p:pic>
+      <p:sp>
+        <p:nvSpPr>
+          <p:cNvPr id="51" name="Rectangle 50"/>
+          <p:cNvSpPr/>
+          <p:nvPr/>
+        </p:nvSpPr>
+        <p:spPr>
+          <a:xfrm>
+            <a:off x="4236720" y="9330690"/>
+            <a:ext cx="1813560" cy="342900"/>
+          </a:xfrm>
+          <a:prstGeom prst="rect">
+            <a:avLst/>
+          </a:prstGeom>
+          <a:solidFill>
+            <a:srgbClr val="F3F1EA">
+              <a:alpha val="88000"/>
+            </a:srgbClr>
+          </a:solidFill>
+          <a:ln>
+            <a:noFill/>
+          </a:ln>
+          <a:effectLst/>
+        </p:spPr>
+        <p:style>
+          <a:lnRef idx="1">
+            <a:schemeClr val="accent1"/>
+          </a:lnRef>
+          <a:fillRef idx="3">
+            <a:schemeClr val="accent1"/>
+          </a:fillRef>
+          <a:effectRef idx="2">
+            <a:schemeClr val="accent1"/>
+          </a:effectRef>
+          <a:fontRef idx="minor">
+            <a:schemeClr val="lt1"/>
+          </a:fontRef>
+        </p:style>
+        <p:txBody>
+          <a:bodyPr rtlCol="0" anchor="ctr"/>
+          <a:lstStyle/>
+          <a:p>
+            <a:pPr algn="ctr"/>
+          </a:p>
+        </p:txBody>
+      </p:sp>
+      <p:sp>
+        <p:nvSpPr>
+          <p:cNvPr id="52" name="TextBox 51"/>
+          <p:cNvSpPr txBox="1"/>
+          <p:nvPr/>
+        </p:nvSpPr>
+        <p:spPr>
+          <a:xfrm>
+            <a:off x="4274820" y="9330690"/>
+            <a:ext cx="1737360" cy="342900"/>
+          </a:xfrm>
+          <a:prstGeom prst="rect">
+            <a:avLst/>
+          </a:prstGeom>
+          <a:noFill/>
+        </p:spPr>
+        <p:txBody>
+          <a:bodyPr wrap="square" lIns="0" rIns="0" tIns="0" bIns="0" anchor="ctr">
+            <a:spAutoFit/>
+          </a:bodyPr>
+          <a:lstStyle/>
+          <a:p>
+            <a:pPr algn="ctr">
+              <a:lnSpc>
+                <a:spcPct val="120000"/>
+              </a:lnSpc>
+            </a:pPr>
+            <a:r>
+              <a:rPr sz="1200" b="1" i="0">
+                <a:solidFill>
+                  <a:srgbClr val="31662F"/>
+                </a:solidFill>
+                <a:latin typeface="Montserrat"/>
+              </a:rPr>
+              <a:t>Caterina Capri</a:t>
+            </a:r>
+          </a:p>
+        </p:txBody>
+      </p:sp>
+      <p:pic>
+        <p:nvPicPr>
+          <p:cNvPr id="53" name="Picture 52" descr="8055802890071954999.jpg"/>
+          <p:cNvPicPr>
+            <a:picLocks noChangeAspect="1"/>
+          </p:cNvPicPr>
+          <p:nvPr/>
+        </p:nvPicPr>
+        <p:blipFill>
+          <a:blip r:embed="rId19"/>
+          <a:stretch>
+            <a:fillRect/>
+          </a:stretch>
+        </p:blipFill>
+        <p:spPr>
+          <a:xfrm>
+            <a:off x="6126480" y="7860030"/>
+            <a:ext cx="1813560" cy="1813560"/>
+          </a:xfrm>
+          <a:prstGeom prst="rect">
+            <a:avLst/>
+          </a:prstGeom>
+        </p:spPr>
+      </p:pic>
+      <p:sp>
+        <p:nvSpPr>
+          <p:cNvPr id="54" name="Rectangle 53"/>
+          <p:cNvSpPr/>
+          <p:nvPr/>
+        </p:nvSpPr>
+        <p:spPr>
+          <a:xfrm>
+            <a:off x="6126480" y="9330690"/>
+            <a:ext cx="1813560" cy="342900"/>
+          </a:xfrm>
+          <a:prstGeom prst="rect">
+            <a:avLst/>
+          </a:prstGeom>
+          <a:solidFill>
+            <a:srgbClr val="F3F1EA">
+              <a:alpha val="88000"/>
+            </a:srgbClr>
+          </a:solidFill>
+          <a:ln>
+            <a:noFill/>
+          </a:ln>
+          <a:effectLst/>
+        </p:spPr>
+        <p:style>
+          <a:lnRef idx="1">
+            <a:schemeClr val="accent1"/>
+          </a:lnRef>
+          <a:fillRef idx="3">
+            <a:schemeClr val="accent1"/>
+          </a:fillRef>
+          <a:effectRef idx="2">
+            <a:schemeClr val="accent1"/>
+          </a:effectRef>
+          <a:fontRef idx="minor">
+            <a:schemeClr val="lt1"/>
+          </a:fontRef>
+        </p:style>
+        <p:txBody>
+          <a:bodyPr rtlCol="0" anchor="ctr"/>
+          <a:lstStyle/>
+          <a:p>
+            <a:pPr algn="ctr"/>
+          </a:p>
+        </p:txBody>
+      </p:sp>
+      <p:sp>
+        <p:nvSpPr>
+          <p:cNvPr id="55" name="TextBox 54"/>
+          <p:cNvSpPr txBox="1"/>
+          <p:nvPr/>
+        </p:nvSpPr>
+        <p:spPr>
+          <a:xfrm>
+            <a:off x="6164580" y="9330690"/>
+            <a:ext cx="1737360" cy="342900"/>
+          </a:xfrm>
+          <a:prstGeom prst="rect">
+            <a:avLst/>
+          </a:prstGeom>
+          <a:noFill/>
+        </p:spPr>
+        <p:txBody>
+          <a:bodyPr wrap="square" lIns="0" rIns="0" tIns="0" bIns="0" anchor="ctr">
+            <a:spAutoFit/>
+          </a:bodyPr>
+          <a:lstStyle/>
+          <a:p>
+            <a:pPr algn="ctr">
+              <a:lnSpc>
+                <a:spcPct val="120000"/>
+              </a:lnSpc>
+            </a:pPr>
+            <a:r>
+              <a:rPr sz="1200" b="1" i="0">
+                <a:solidFill>
+                  <a:srgbClr val="31662F"/>
+                </a:solidFill>
+                <a:latin typeface="Montserrat"/>
+              </a:rPr>
+              <a:t>Laura Campos</a:t>
+            </a:r>
+          </a:p>
+        </p:txBody>
+      </p:sp>
+      <p:pic>
+        <p:nvPicPr>
+          <p:cNvPr id="56" name="Picture 55" descr="6327792871960472773.jpg"/>
+          <p:cNvPicPr>
+            <a:picLocks noChangeAspect="1"/>
+          </p:cNvPicPr>
+          <p:nvPr/>
+        </p:nvPicPr>
+        <p:blipFill>
+          <a:blip r:embed="rId20"/>
+          <a:stretch>
+            <a:fillRect/>
+          </a:stretch>
+        </p:blipFill>
+        <p:spPr>
+          <a:xfrm>
+            <a:off x="8016240" y="7860030"/>
+            <a:ext cx="1813560" cy="1813560"/>
+          </a:xfrm>
+          <a:prstGeom prst="rect">
+            <a:avLst/>
+          </a:prstGeom>
+        </p:spPr>
+      </p:pic>
+      <p:sp>
+        <p:nvSpPr>
+          <p:cNvPr id="57" name="Rectangle 56"/>
+          <p:cNvSpPr/>
+          <p:nvPr/>
+        </p:nvSpPr>
+        <p:spPr>
+          <a:xfrm>
+            <a:off x="8016240" y="9330690"/>
+            <a:ext cx="1813560" cy="342900"/>
+          </a:xfrm>
+          <a:prstGeom prst="rect">
+            <a:avLst/>
+          </a:prstGeom>
+          <a:solidFill>
+            <a:srgbClr val="F3F1EA">
+              <a:alpha val="88000"/>
+            </a:srgbClr>
+          </a:solidFill>
+          <a:ln>
+            <a:noFill/>
+          </a:ln>
+          <a:effectLst/>
+        </p:spPr>
+        <p:style>
+          <a:lnRef idx="1">
+            <a:schemeClr val="accent1"/>
+          </a:lnRef>
+          <a:fillRef idx="3">
+            <a:schemeClr val="accent1"/>
+          </a:fillRef>
+          <a:effectRef idx="2">
+            <a:schemeClr val="accent1"/>
+          </a:effectRef>
+          <a:fontRef idx="minor">
+            <a:schemeClr val="lt1"/>
+          </a:fontRef>
+        </p:style>
+        <p:txBody>
+          <a:bodyPr rtlCol="0" anchor="ctr"/>
+          <a:lstStyle/>
+          <a:p>
+            <a:pPr algn="ctr"/>
+          </a:p>
+        </p:txBody>
+      </p:sp>
+      <p:sp>
+        <p:nvSpPr>
+          <p:cNvPr id="58" name="TextBox 57"/>
+          <p:cNvSpPr txBox="1"/>
+          <p:nvPr/>
+        </p:nvSpPr>
+        <p:spPr>
+          <a:xfrm>
+            <a:off x="8054340" y="9330690"/>
+            <a:ext cx="1737360" cy="342900"/>
+          </a:xfrm>
+          <a:prstGeom prst="rect">
+            <a:avLst/>
+          </a:prstGeom>
+          <a:noFill/>
+        </p:spPr>
+        <p:txBody>
+          <a:bodyPr wrap="square" lIns="0" rIns="0" tIns="0" bIns="0" anchor="ctr">
+            <a:spAutoFit/>
+          </a:bodyPr>
+          <a:lstStyle/>
+          <a:p>
+            <a:pPr algn="ctr">
+              <a:lnSpc>
+                <a:spcPct val="120000"/>
+              </a:lnSpc>
+            </a:pPr>
+            <a:r>
+              <a:rPr sz="1200" b="1" i="0">
+                <a:solidFill>
+                  <a:srgbClr val="31662F"/>
+                </a:solidFill>
+                <a:latin typeface="Montserrat"/>
+              </a:rPr>
+              <a:t>Nora Levay</a:t>
             </a:r>
           </a:p>
         </p:txBody>
@@ -6431,9 +6867,321 @@
           </a:p>
         </p:txBody>
       </p:sp>
+      <p:sp>
+        <p:nvSpPr>
+          <p:cNvPr id="32" name="TextBox 31"/>
+          <p:cNvSpPr txBox="1"/>
+          <p:nvPr/>
+        </p:nvSpPr>
+        <p:spPr>
+          <a:xfrm>
+            <a:off x="9715500" y="3333750"/>
+            <a:ext cx="4286250" cy="381000"/>
+          </a:xfrm>
+          <a:prstGeom prst="rect">
+            <a:avLst/>
+          </a:prstGeom>
+          <a:noFill/>
+        </p:spPr>
+        <p:txBody>
+          <a:bodyPr wrap="square" lIns="0" rIns="0" tIns="0" bIns="0" anchor="t">
+            <a:spAutoFit/>
+          </a:bodyPr>
+          <a:lstStyle/>
+          <a:p>
+            <a:pPr algn="l">
+              <a:lnSpc>
+                <a:spcPct val="120000"/>
+              </a:lnSpc>
+            </a:pPr>
+            <a:r>
+              <a:rPr sz="2600" b="1" i="0">
+                <a:solidFill>
+                  <a:srgbClr val="333130"/>
+                </a:solidFill>
+                <a:latin typeface="Montserrat"/>
+              </a:rPr>
+              <a:t>Elina Psara</a:t>
+            </a:r>
+          </a:p>
+        </p:txBody>
+      </p:sp>
+      <p:sp>
+        <p:nvSpPr>
+          <p:cNvPr id="33" name="TextBox 32"/>
+          <p:cNvSpPr txBox="1"/>
+          <p:nvPr/>
+        </p:nvSpPr>
+        <p:spPr>
+          <a:xfrm>
+            <a:off x="9715500" y="3714750"/>
+            <a:ext cx="4286250" cy="323850"/>
+          </a:xfrm>
+          <a:prstGeom prst="rect">
+            <a:avLst/>
+          </a:prstGeom>
+          <a:noFill/>
+        </p:spPr>
+        <p:txBody>
+          <a:bodyPr wrap="square" lIns="0" rIns="0" tIns="0" bIns="0" anchor="t">
+            <a:spAutoFit/>
+          </a:bodyPr>
+          <a:lstStyle/>
+          <a:p>
+            <a:pPr algn="l">
+              <a:lnSpc>
+                <a:spcPct val="120000"/>
+              </a:lnSpc>
+            </a:pPr>
+            <a:r>
+              <a:rPr sz="1800" b="0" i="0">
+                <a:solidFill>
+                  <a:srgbClr val="31662F"/>
+                </a:solidFill>
+                <a:latin typeface="Source Sans 3"/>
+              </a:rPr>
+              <a:t>SFW Mentor Team Lead</a:t>
+            </a:r>
+          </a:p>
+        </p:txBody>
+      </p:sp>
+      <p:sp>
+        <p:nvSpPr>
+          <p:cNvPr id="34" name="TextBox 33"/>
+          <p:cNvSpPr txBox="1"/>
+          <p:nvPr/>
+        </p:nvSpPr>
+        <p:spPr>
+          <a:xfrm>
+            <a:off x="9715500" y="4381500"/>
+            <a:ext cx="4286250" cy="381000"/>
+          </a:xfrm>
+          <a:prstGeom prst="rect">
+            <a:avLst/>
+          </a:prstGeom>
+          <a:noFill/>
+        </p:spPr>
+        <p:txBody>
+          <a:bodyPr wrap="square" lIns="0" rIns="0" tIns="0" bIns="0" anchor="t">
+            <a:spAutoFit/>
+          </a:bodyPr>
+          <a:lstStyle/>
+          <a:p>
+            <a:pPr algn="l">
+              <a:lnSpc>
+                <a:spcPct val="120000"/>
+              </a:lnSpc>
+            </a:pPr>
+            <a:r>
+              <a:rPr sz="2600" b="1" i="0">
+                <a:solidFill>
+                  <a:srgbClr val="333130"/>
+                </a:solidFill>
+                <a:latin typeface="Montserrat"/>
+              </a:rPr>
+              <a:t>Caterina Capri</a:t>
+            </a:r>
+          </a:p>
+        </p:txBody>
+      </p:sp>
+      <p:sp>
+        <p:nvSpPr>
+          <p:cNvPr id="35" name="TextBox 34"/>
+          <p:cNvSpPr txBox="1"/>
+          <p:nvPr/>
+        </p:nvSpPr>
+        <p:spPr>
+          <a:xfrm>
+            <a:off x="9715500" y="4762500"/>
+            <a:ext cx="4286250" cy="323850"/>
+          </a:xfrm>
+          <a:prstGeom prst="rect">
+            <a:avLst/>
+          </a:prstGeom>
+          <a:noFill/>
+        </p:spPr>
+        <p:txBody>
+          <a:bodyPr wrap="square" lIns="0" rIns="0" tIns="0" bIns="0" anchor="t">
+            <a:spAutoFit/>
+          </a:bodyPr>
+          <a:lstStyle/>
+          <a:p>
+            <a:pPr algn="l">
+              <a:lnSpc>
+                <a:spcPct val="120000"/>
+              </a:lnSpc>
+            </a:pPr>
+            <a:r>
+              <a:rPr sz="1800" b="0" i="0">
+                <a:solidFill>
+                  <a:srgbClr val="31662F"/>
+                </a:solidFill>
+                <a:latin typeface="Source Sans 3"/>
+              </a:rPr>
+              <a:t>SFW Mentor</a:t>
+            </a:r>
+          </a:p>
+        </p:txBody>
+      </p:sp>
+      <p:sp>
+        <p:nvSpPr>
+          <p:cNvPr id="36" name="TextBox 35"/>
+          <p:cNvSpPr txBox="1"/>
+          <p:nvPr/>
+        </p:nvSpPr>
+        <p:spPr>
+          <a:xfrm>
+            <a:off x="9715500" y="5429250"/>
+            <a:ext cx="4286250" cy="381000"/>
+          </a:xfrm>
+          <a:prstGeom prst="rect">
+            <a:avLst/>
+          </a:prstGeom>
+          <a:noFill/>
+        </p:spPr>
+        <p:txBody>
+          <a:bodyPr wrap="square" lIns="0" rIns="0" tIns="0" bIns="0" anchor="t">
+            <a:spAutoFit/>
+          </a:bodyPr>
+          <a:lstStyle/>
+          <a:p>
+            <a:pPr algn="l">
+              <a:lnSpc>
+                <a:spcPct val="120000"/>
+              </a:lnSpc>
+            </a:pPr>
+            <a:r>
+              <a:rPr sz="2600" b="1" i="0">
+                <a:solidFill>
+                  <a:srgbClr val="333130"/>
+                </a:solidFill>
+                <a:latin typeface="Montserrat"/>
+              </a:rPr>
+              <a:t>Laura Campos</a:t>
+            </a:r>
+          </a:p>
+        </p:txBody>
+      </p:sp>
+      <p:sp>
+        <p:nvSpPr>
+          <p:cNvPr id="37" name="TextBox 36"/>
+          <p:cNvSpPr txBox="1"/>
+          <p:nvPr/>
+        </p:nvSpPr>
+        <p:spPr>
+          <a:xfrm>
+            <a:off x="9715500" y="5810250"/>
+            <a:ext cx="4286250" cy="323850"/>
+          </a:xfrm>
+          <a:prstGeom prst="rect">
+            <a:avLst/>
+          </a:prstGeom>
+          <a:noFill/>
+        </p:spPr>
+        <p:txBody>
+          <a:bodyPr wrap="square" lIns="0" rIns="0" tIns="0" bIns="0" anchor="t">
+            <a:spAutoFit/>
+          </a:bodyPr>
+          <a:lstStyle/>
+          <a:p>
+            <a:pPr algn="l">
+              <a:lnSpc>
+                <a:spcPct val="120000"/>
+              </a:lnSpc>
+            </a:pPr>
+            <a:r>
+              <a:rPr sz="1800" b="0" i="0">
+                <a:solidFill>
+                  <a:srgbClr val="31662F"/>
+                </a:solidFill>
+                <a:latin typeface="Source Sans 3"/>
+              </a:rPr>
+              <a:t>SFW Mentor</a:t>
+            </a:r>
+          </a:p>
+        </p:txBody>
+      </p:sp>
+      <p:sp>
+        <p:nvSpPr>
+          <p:cNvPr id="38" name="TextBox 37"/>
+          <p:cNvSpPr txBox="1"/>
+          <p:nvPr/>
+        </p:nvSpPr>
+        <p:spPr>
+          <a:xfrm>
+            <a:off x="9715500" y="6477000"/>
+            <a:ext cx="4286250" cy="381000"/>
+          </a:xfrm>
+          <a:prstGeom prst="rect">
+            <a:avLst/>
+          </a:prstGeom>
+          <a:noFill/>
+        </p:spPr>
+        <p:txBody>
+          <a:bodyPr wrap="square" lIns="0" rIns="0" tIns="0" bIns="0" anchor="t">
+            <a:spAutoFit/>
+          </a:bodyPr>
+          <a:lstStyle/>
+          <a:p>
+            <a:pPr algn="l">
+              <a:lnSpc>
+                <a:spcPct val="120000"/>
+              </a:lnSpc>
+            </a:pPr>
+            <a:r>
+              <a:rPr sz="2600" b="1" i="0">
+                <a:solidFill>
+                  <a:srgbClr val="333130"/>
+                </a:solidFill>
+                <a:latin typeface="Montserrat"/>
+              </a:rPr>
+              <a:t>Nora Levay</a:t>
+            </a:r>
+          </a:p>
+        </p:txBody>
+      </p:sp>
+      <p:sp>
+        <p:nvSpPr>
+          <p:cNvPr id="39" name="TextBox 38"/>
+          <p:cNvSpPr txBox="1"/>
+          <p:nvPr/>
+        </p:nvSpPr>
+        <p:spPr>
+          <a:xfrm>
+            <a:off x="9715500" y="6858000"/>
+            <a:ext cx="4286250" cy="323850"/>
+          </a:xfrm>
+          <a:prstGeom prst="rect">
+            <a:avLst/>
+          </a:prstGeom>
+          <a:noFill/>
+        </p:spPr>
+        <p:txBody>
+          <a:bodyPr wrap="square" lIns="0" rIns="0" tIns="0" bIns="0" anchor="t">
+            <a:spAutoFit/>
+          </a:bodyPr>
+          <a:lstStyle/>
+          <a:p>
+            <a:pPr algn="l">
+              <a:lnSpc>
+                <a:spcPct val="120000"/>
+              </a:lnSpc>
+            </a:pPr>
+            <a:r>
+              <a:rPr sz="1800" b="0" i="0">
+                <a:solidFill>
+                  <a:srgbClr val="31662F"/>
+                </a:solidFill>
+                <a:latin typeface="Source Sans 3"/>
+              </a:rPr>
+              <a:t>SFW Mentor</a:t>
+            </a:r>
+          </a:p>
+        </p:txBody>
+      </p:sp>
       <p:pic>
         <p:nvPicPr>
-          <p:cNvPr id="32" name="Picture 31" descr="foundation-logo-color.png"/>
+          <p:cNvPr id="40" name="Picture 39" descr="foundation-logo-color.png"/>
           <p:cNvPicPr>
             <a:picLocks noChangeAspect="1"/>
           </p:cNvPicPr>

--- a/templates/posts/october/05-10-2026-mon-ig-teachers-day-option-3-wreath.pptx
+++ b/templates/posts/october/05-10-2026-mon-ig-teachers-day-option-3-wreath.pptx
@@ -3674,7 +3674,7 @@
         <p:spPr>
           <a:xfrm>
             <a:off x="495300" y="2190750"/>
-            <a:ext cx="3627120" cy="1813560"/>
+            <a:ext cx="4572000" cy="2286000"/>
           </a:xfrm>
           <a:prstGeom prst="rect">
             <a:avLst/>
@@ -3693,7 +3693,7 @@
               </a:lnSpc>
             </a:pPr>
             <a:r>
-              <a:rPr sz="3400" b="1" i="0">
+              <a:rPr sz="4000" b="1" i="0">
                 <a:solidFill>
                   <a:srgbClr val="31662F"/>
                 </a:solidFill>
@@ -3706,7 +3706,7 @@
       </p:sp>
       <p:pic>
         <p:nvPicPr>
-          <p:cNvPr id="5" name="Picture 4" descr="1752988849223235031.jpg"/>
+          <p:cNvPr id="5" name="Picture 4" descr="7297811591439890433.jpg"/>
           <p:cNvPicPr>
             <a:picLocks noChangeAspect="1"/>
           </p:cNvPicPr>
@@ -3720,8 +3720,8 @@
         </p:blipFill>
         <p:spPr>
           <a:xfrm>
-            <a:off x="4236720" y="2190750"/>
-            <a:ext cx="1813560" cy="1813560"/>
+            <a:off x="5181600" y="2190750"/>
+            <a:ext cx="2286000" cy="2286000"/>
           </a:xfrm>
           <a:prstGeom prst="rect">
             <a:avLst/>
@@ -3736,8 +3736,8 @@
         </p:nvSpPr>
         <p:spPr>
           <a:xfrm>
-            <a:off x="4236720" y="3661410"/>
-            <a:ext cx="1813560" cy="342900"/>
+            <a:off x="5181600" y="4133850"/>
+            <a:ext cx="2286000" cy="342900"/>
           </a:xfrm>
           <a:prstGeom prst="rect">
             <a:avLst/>
@@ -3782,8 +3782,8 @@
         </p:nvSpPr>
         <p:spPr>
           <a:xfrm>
-            <a:off x="4274820" y="3661410"/>
-            <a:ext cx="1737360" cy="342900"/>
+            <a:off x="5219700" y="4133850"/>
+            <a:ext cx="2209800" cy="342900"/>
           </a:xfrm>
           <a:prstGeom prst="rect">
             <a:avLst/>
@@ -3802,20 +3802,20 @@
               </a:lnSpc>
             </a:pPr>
             <a:r>
-              <a:rPr sz="1200" b="1" i="0">
+              <a:rPr sz="1500" b="1" i="0">
                 <a:solidFill>
                   <a:srgbClr val="31662F"/>
                 </a:solidFill>
                 <a:latin typeface="Montserrat"/>
               </a:rPr>
-              <a:t>Tommy Tepper</a:t>
+              <a:t>Tommy Tapper</a:t>
             </a:r>
           </a:p>
         </p:txBody>
       </p:sp>
       <p:pic>
         <p:nvPicPr>
-          <p:cNvPr id="8" name="Picture 7" descr="2612131318617217853.jpg"/>
+          <p:cNvPr id="8" name="Picture 7" descr="8728437986854537801.jpg"/>
           <p:cNvPicPr>
             <a:picLocks noChangeAspect="1"/>
           </p:cNvPicPr>
@@ -3829,8 +3829,8 @@
         </p:blipFill>
         <p:spPr>
           <a:xfrm>
-            <a:off x="6126480" y="2190750"/>
-            <a:ext cx="1813560" cy="1813560"/>
+            <a:off x="7543800" y="2190750"/>
+            <a:ext cx="2286000" cy="2286000"/>
           </a:xfrm>
           <a:prstGeom prst="rect">
             <a:avLst/>
@@ -3845,8 +3845,8 @@
         </p:nvSpPr>
         <p:spPr>
           <a:xfrm>
-            <a:off x="6126480" y="3661410"/>
-            <a:ext cx="1813560" cy="342900"/>
+            <a:off x="7543800" y="4133850"/>
+            <a:ext cx="2286000" cy="342900"/>
           </a:xfrm>
           <a:prstGeom prst="rect">
             <a:avLst/>
@@ -3891,8 +3891,8 @@
         </p:nvSpPr>
         <p:spPr>
           <a:xfrm>
-            <a:off x="6164580" y="3661410"/>
-            <a:ext cx="1737360" cy="342900"/>
+            <a:off x="7581900" y="4133850"/>
+            <a:ext cx="2209800" cy="342900"/>
           </a:xfrm>
           <a:prstGeom prst="rect">
             <a:avLst/>
@@ -3911,7 +3911,7 @@
               </a:lnSpc>
             </a:pPr>
             <a:r>
-              <a:rPr sz="1200" b="1" i="0">
+              <a:rPr sz="1500" b="1" i="0">
                 <a:solidFill>
                   <a:srgbClr val="31662F"/>
                 </a:solidFill>
@@ -3924,7 +3924,7 @@
       </p:sp>
       <p:pic>
         <p:nvPicPr>
-          <p:cNvPr id="11" name="Picture 10" descr="7144932367790493661.jpg"/>
+          <p:cNvPr id="11" name="Picture 10" descr="8499503155804001537.jpg"/>
           <p:cNvPicPr>
             <a:picLocks noChangeAspect="1"/>
           </p:cNvPicPr>
@@ -3938,8 +3938,8 @@
         </p:blipFill>
         <p:spPr>
           <a:xfrm>
-            <a:off x="8016240" y="2190750"/>
-            <a:ext cx="1813560" cy="1813560"/>
+            <a:off x="457200" y="4552950"/>
+            <a:ext cx="2286000" cy="2286000"/>
           </a:xfrm>
           <a:prstGeom prst="rect">
             <a:avLst/>
@@ -3954,8 +3954,8 @@
         </p:nvSpPr>
         <p:spPr>
           <a:xfrm>
-            <a:off x="8016240" y="3661410"/>
-            <a:ext cx="1813560" cy="342900"/>
+            <a:off x="457200" y="6496050"/>
+            <a:ext cx="2286000" cy="342900"/>
           </a:xfrm>
           <a:prstGeom prst="rect">
             <a:avLst/>
@@ -4000,8 +4000,8 @@
         </p:nvSpPr>
         <p:spPr>
           <a:xfrm>
-            <a:off x="8054340" y="3661410"/>
-            <a:ext cx="1737360" cy="342900"/>
+            <a:off x="495300" y="6496050"/>
+            <a:ext cx="2209800" cy="342900"/>
           </a:xfrm>
           <a:prstGeom prst="rect">
             <a:avLst/>
@@ -4020,7 +4020,7 @@
               </a:lnSpc>
             </a:pPr>
             <a:r>
-              <a:rPr sz="1200" b="1" i="0">
+              <a:rPr sz="1500" b="1" i="0">
                 <a:solidFill>
                   <a:srgbClr val="31662F"/>
                 </a:solidFill>
@@ -4033,7 +4033,7 @@
       </p:sp>
       <p:pic>
         <p:nvPicPr>
-          <p:cNvPr id="14" name="Picture 13" descr="1194488140148190033.jpg"/>
+          <p:cNvPr id="14" name="Picture 13" descr="8664505731163078658.jpg"/>
           <p:cNvPicPr>
             <a:picLocks noChangeAspect="1"/>
           </p:cNvPicPr>
@@ -4047,8 +4047,8 @@
         </p:blipFill>
         <p:spPr>
           <a:xfrm>
-            <a:off x="457200" y="4080510"/>
-            <a:ext cx="1813560" cy="1813560"/>
+            <a:off x="2819400" y="4552950"/>
+            <a:ext cx="2286000" cy="2286000"/>
           </a:xfrm>
           <a:prstGeom prst="rect">
             <a:avLst/>
@@ -4063,8 +4063,8 @@
         </p:nvSpPr>
         <p:spPr>
           <a:xfrm>
-            <a:off x="457200" y="5551170"/>
-            <a:ext cx="1813560" cy="342900"/>
+            <a:off x="2819400" y="6496050"/>
+            <a:ext cx="2286000" cy="342900"/>
           </a:xfrm>
           <a:prstGeom prst="rect">
             <a:avLst/>
@@ -4109,8 +4109,8 @@
         </p:nvSpPr>
         <p:spPr>
           <a:xfrm>
-            <a:off x="495300" y="5551170"/>
-            <a:ext cx="1737360" cy="342900"/>
+            <a:off x="2857500" y="6496050"/>
+            <a:ext cx="2209800" cy="342900"/>
           </a:xfrm>
           <a:prstGeom prst="rect">
             <a:avLst/>
@@ -4129,20 +4129,20 @@
               </a:lnSpc>
             </a:pPr>
             <a:r>
-              <a:rPr sz="1200" b="1" i="0">
+              <a:rPr sz="1500" b="1" i="0">
                 <a:solidFill>
                   <a:srgbClr val="31662F"/>
                 </a:solidFill>
                 <a:latin typeface="Montserrat"/>
               </a:rPr>
-              <a:t>Wesley Sanders</a:t>
+              <a:t>Wesley Sander</a:t>
             </a:r>
           </a:p>
         </p:txBody>
       </p:sp>
       <p:pic>
         <p:nvPicPr>
-          <p:cNvPr id="17" name="Picture 16" descr="8647953704869287552.jpg"/>
+          <p:cNvPr id="17" name="Picture 16" descr="7695145214115977211.jpg"/>
           <p:cNvPicPr>
             <a:picLocks noChangeAspect="1"/>
           </p:cNvPicPr>
@@ -4156,8 +4156,8 @@
         </p:blipFill>
         <p:spPr>
           <a:xfrm>
-            <a:off x="2346960" y="4080510"/>
-            <a:ext cx="1813560" cy="1813560"/>
+            <a:off x="5181600" y="4552950"/>
+            <a:ext cx="2286000" cy="2286000"/>
           </a:xfrm>
           <a:prstGeom prst="rect">
             <a:avLst/>
@@ -4172,8 +4172,8 @@
         </p:nvSpPr>
         <p:spPr>
           <a:xfrm>
-            <a:off x="2346960" y="5551170"/>
-            <a:ext cx="1813560" cy="342900"/>
+            <a:off x="5181600" y="6496050"/>
+            <a:ext cx="2286000" cy="342900"/>
           </a:xfrm>
           <a:prstGeom prst="rect">
             <a:avLst/>
@@ -4218,8 +4218,8 @@
         </p:nvSpPr>
         <p:spPr>
           <a:xfrm>
-            <a:off x="2385060" y="5551170"/>
-            <a:ext cx="1737360" cy="342900"/>
+            <a:off x="5219700" y="6496050"/>
+            <a:ext cx="2209800" cy="342900"/>
           </a:xfrm>
           <a:prstGeom prst="rect">
             <a:avLst/>
@@ -4238,7 +4238,7 @@
               </a:lnSpc>
             </a:pPr>
             <a:r>
-              <a:rPr sz="1200" b="1" i="0">
+              <a:rPr sz="1500" b="1" i="0">
                 <a:solidFill>
                   <a:srgbClr val="31662F"/>
                 </a:solidFill>
@@ -4251,7 +4251,7 @@
       </p:sp>
       <p:pic>
         <p:nvPicPr>
-          <p:cNvPr id="20" name="Picture 19" descr="6026637821407471426.jpg"/>
+          <p:cNvPr id="20" name="Picture 19" descr="1311806062584278399.jpg"/>
           <p:cNvPicPr>
             <a:picLocks noChangeAspect="1"/>
           </p:cNvPicPr>
@@ -4265,8 +4265,8 @@
         </p:blipFill>
         <p:spPr>
           <a:xfrm>
-            <a:off x="4236720" y="4080510"/>
-            <a:ext cx="1813560" cy="1813560"/>
+            <a:off x="7543800" y="4552950"/>
+            <a:ext cx="2286000" cy="2286000"/>
           </a:xfrm>
           <a:prstGeom prst="rect">
             <a:avLst/>
@@ -4281,8 +4281,8 @@
         </p:nvSpPr>
         <p:spPr>
           <a:xfrm>
-            <a:off x="4236720" y="5551170"/>
-            <a:ext cx="1813560" cy="342900"/>
+            <a:off x="7543800" y="6496050"/>
+            <a:ext cx="2286000" cy="342900"/>
           </a:xfrm>
           <a:prstGeom prst="rect">
             <a:avLst/>
@@ -4327,8 +4327,8 @@
         </p:nvSpPr>
         <p:spPr>
           <a:xfrm>
-            <a:off x="4274820" y="5551170"/>
-            <a:ext cx="1737360" cy="342900"/>
+            <a:off x="7581900" y="6496050"/>
+            <a:ext cx="2209800" cy="342900"/>
           </a:xfrm>
           <a:prstGeom prst="rect">
             <a:avLst/>
@@ -4347,7 +4347,7 @@
               </a:lnSpc>
             </a:pPr>
             <a:r>
-              <a:rPr sz="1200" b="1" i="0">
+              <a:rPr sz="1500" b="1" i="0">
                 <a:solidFill>
                   <a:srgbClr val="31662F"/>
                 </a:solidFill>
@@ -4360,7 +4360,7 @@
       </p:sp>
       <p:pic>
         <p:nvPicPr>
-          <p:cNvPr id="23" name="Picture 22" descr="3723017669234027646.jpg"/>
+          <p:cNvPr id="23" name="Picture 22" descr="5215010633690581301.jpg"/>
           <p:cNvPicPr>
             <a:picLocks noChangeAspect="1"/>
           </p:cNvPicPr>
@@ -4374,8 +4374,8 @@
         </p:blipFill>
         <p:spPr>
           <a:xfrm>
-            <a:off x="6126480" y="4080510"/>
-            <a:ext cx="1813560" cy="1813560"/>
+            <a:off x="457200" y="6915150"/>
+            <a:ext cx="2286000" cy="2286000"/>
           </a:xfrm>
           <a:prstGeom prst="rect">
             <a:avLst/>
@@ -4390,8 +4390,8 @@
         </p:nvSpPr>
         <p:spPr>
           <a:xfrm>
-            <a:off x="6126480" y="5551170"/>
-            <a:ext cx="1813560" cy="342900"/>
+            <a:off x="457200" y="8858250"/>
+            <a:ext cx="2286000" cy="342900"/>
           </a:xfrm>
           <a:prstGeom prst="rect">
             <a:avLst/>
@@ -4436,8 +4436,8 @@
         </p:nvSpPr>
         <p:spPr>
           <a:xfrm>
-            <a:off x="6164580" y="5551170"/>
-            <a:ext cx="1737360" cy="342900"/>
+            <a:off x="495300" y="8858250"/>
+            <a:ext cx="2209800" cy="342900"/>
           </a:xfrm>
           <a:prstGeom prst="rect">
             <a:avLst/>
@@ -4456,20 +4456,20 @@
               </a:lnSpc>
             </a:pPr>
             <a:r>
-              <a:rPr sz="1200" b="1" i="0">
+              <a:rPr sz="1500" b="1" i="0">
                 <a:solidFill>
                   <a:srgbClr val="31662F"/>
                 </a:solidFill>
                 <a:latin typeface="Montserrat"/>
               </a:rPr>
-              <a:t>Isadora Schmidt</a:t>
+              <a:t>Isadora Shmidt</a:t>
             </a:r>
           </a:p>
         </p:txBody>
       </p:sp>
       <p:pic>
         <p:nvPicPr>
-          <p:cNvPr id="26" name="Picture 25" descr="3113535558271719414.jpg"/>
+          <p:cNvPr id="26" name="Picture 25" descr="746667493973784667.jpg"/>
           <p:cNvPicPr>
             <a:picLocks noChangeAspect="1"/>
           </p:cNvPicPr>
@@ -4483,8 +4483,8 @@
         </p:blipFill>
         <p:spPr>
           <a:xfrm>
-            <a:off x="8016240" y="4080510"/>
-            <a:ext cx="1813560" cy="1813560"/>
+            <a:off x="2819400" y="6915150"/>
+            <a:ext cx="2286000" cy="2286000"/>
           </a:xfrm>
           <a:prstGeom prst="rect">
             <a:avLst/>
@@ -4499,8 +4499,8 @@
         </p:nvSpPr>
         <p:spPr>
           <a:xfrm>
-            <a:off x="8016240" y="5551170"/>
-            <a:ext cx="1813560" cy="342900"/>
+            <a:off x="2819400" y="8858250"/>
+            <a:ext cx="2286000" cy="342900"/>
           </a:xfrm>
           <a:prstGeom prst="rect">
             <a:avLst/>
@@ -4545,8 +4545,8 @@
         </p:nvSpPr>
         <p:spPr>
           <a:xfrm>
-            <a:off x="8054340" y="5551170"/>
-            <a:ext cx="1737360" cy="342900"/>
+            <a:off x="2857500" y="8858250"/>
+            <a:ext cx="2209800" cy="342900"/>
           </a:xfrm>
           <a:prstGeom prst="rect">
             <a:avLst/>
@@ -4565,7 +4565,7 @@
               </a:lnSpc>
             </a:pPr>
             <a:r>
-              <a:rPr sz="1200" b="1" i="0">
+              <a:rPr sz="1500" b="1" i="0">
                 <a:solidFill>
                   <a:srgbClr val="31662F"/>
                 </a:solidFill>
@@ -4578,7 +4578,7 @@
       </p:sp>
       <p:pic>
         <p:nvPicPr>
-          <p:cNvPr id="29" name="Picture 28" descr="5414851247296223470.jpg"/>
+          <p:cNvPr id="29" name="Picture 28" descr="4763296968275485648.jpg"/>
           <p:cNvPicPr>
             <a:picLocks noChangeAspect="1"/>
           </p:cNvPicPr>
@@ -4592,8 +4592,8 @@
         </p:blipFill>
         <p:spPr>
           <a:xfrm>
-            <a:off x="457200" y="5970270"/>
-            <a:ext cx="1813560" cy="1813560"/>
+            <a:off x="5181600" y="6915150"/>
+            <a:ext cx="2286000" cy="2286000"/>
           </a:xfrm>
           <a:prstGeom prst="rect">
             <a:avLst/>
@@ -4608,8 +4608,8 @@
         </p:nvSpPr>
         <p:spPr>
           <a:xfrm>
-            <a:off x="457200" y="7440929"/>
-            <a:ext cx="1813560" cy="342900"/>
+            <a:off x="5181600" y="8858250"/>
+            <a:ext cx="2286000" cy="342900"/>
           </a:xfrm>
           <a:prstGeom prst="rect">
             <a:avLst/>
@@ -4654,8 +4654,8 @@
         </p:nvSpPr>
         <p:spPr>
           <a:xfrm>
-            <a:off x="495300" y="7440929"/>
-            <a:ext cx="1737360" cy="342900"/>
+            <a:off x="5219700" y="8858250"/>
+            <a:ext cx="2209800" cy="342900"/>
           </a:xfrm>
           <a:prstGeom prst="rect">
             <a:avLst/>
@@ -4674,7 +4674,7 @@
               </a:lnSpc>
             </a:pPr>
             <a:r>
-              <a:rPr sz="1200" b="1" i="0">
+              <a:rPr sz="1500" b="1" i="0">
                 <a:solidFill>
                   <a:srgbClr val="31662F"/>
                 </a:solidFill>
@@ -4687,7 +4687,7 @@
       </p:sp>
       <p:pic>
         <p:nvPicPr>
-          <p:cNvPr id="32" name="Picture 31" descr="6759120478498615729.jpg"/>
+          <p:cNvPr id="32" name="Picture 31" descr="5135560565093357647.jpg"/>
           <p:cNvPicPr>
             <a:picLocks noChangeAspect="1"/>
           </p:cNvPicPr>
@@ -4701,8 +4701,8 @@
         </p:blipFill>
         <p:spPr>
           <a:xfrm>
-            <a:off x="2346960" y="5970270"/>
-            <a:ext cx="1813560" cy="1813560"/>
+            <a:off x="7543800" y="6915150"/>
+            <a:ext cx="2286000" cy="2286000"/>
           </a:xfrm>
           <a:prstGeom prst="rect">
             <a:avLst/>
@@ -4717,8 +4717,8 @@
         </p:nvSpPr>
         <p:spPr>
           <a:xfrm>
-            <a:off x="2346960" y="7440929"/>
-            <a:ext cx="1813560" cy="342900"/>
+            <a:off x="7543800" y="8858250"/>
+            <a:ext cx="2286000" cy="342900"/>
           </a:xfrm>
           <a:prstGeom prst="rect">
             <a:avLst/>
@@ -4763,8 +4763,8 @@
         </p:nvSpPr>
         <p:spPr>
           <a:xfrm>
-            <a:off x="2385060" y="7440929"/>
-            <a:ext cx="1737360" cy="342900"/>
+            <a:off x="7581900" y="8858250"/>
+            <a:ext cx="2209800" cy="342900"/>
           </a:xfrm>
           <a:prstGeom prst="rect">
             <a:avLst/>
@@ -4783,7 +4783,7 @@
               </a:lnSpc>
             </a:pPr>
             <a:r>
-              <a:rPr sz="1200" b="1" i="0">
+              <a:rPr sz="1500" b="1" i="0">
                 <a:solidFill>
                   <a:srgbClr val="31662F"/>
                 </a:solidFill>
@@ -4796,7 +4796,7 @@
       </p:sp>
       <p:pic>
         <p:nvPicPr>
-          <p:cNvPr id="35" name="Picture 34" descr="9169552863569812281.jpg"/>
+          <p:cNvPr id="35" name="Picture 34" descr="1228326016823983096.jpg"/>
           <p:cNvPicPr>
             <a:picLocks noChangeAspect="1"/>
           </p:cNvPicPr>
@@ -4810,8 +4810,8 @@
         </p:blipFill>
         <p:spPr>
           <a:xfrm>
-            <a:off x="4236720" y="5970270"/>
-            <a:ext cx="1813560" cy="1813560"/>
+            <a:off x="457200" y="9277350"/>
+            <a:ext cx="2286000" cy="2286000"/>
           </a:xfrm>
           <a:prstGeom prst="rect">
             <a:avLst/>
@@ -4826,8 +4826,8 @@
         </p:nvSpPr>
         <p:spPr>
           <a:xfrm>
-            <a:off x="4236720" y="7440929"/>
-            <a:ext cx="1813560" cy="342900"/>
+            <a:off x="457200" y="11220450"/>
+            <a:ext cx="2286000" cy="342900"/>
           </a:xfrm>
           <a:prstGeom prst="rect">
             <a:avLst/>
@@ -4872,8 +4872,8 @@
         </p:nvSpPr>
         <p:spPr>
           <a:xfrm>
-            <a:off x="4274820" y="7440929"/>
-            <a:ext cx="1737360" cy="342900"/>
+            <a:off x="495300" y="11220450"/>
+            <a:ext cx="2209800" cy="342900"/>
           </a:xfrm>
           <a:prstGeom prst="rect">
             <a:avLst/>
@@ -4892,7 +4892,7 @@
               </a:lnSpc>
             </a:pPr>
             <a:r>
-              <a:rPr sz="1200" b="1" i="0">
+              <a:rPr sz="1500" b="1" i="0">
                 <a:solidFill>
                   <a:srgbClr val="31662F"/>
                 </a:solidFill>
@@ -4905,7 +4905,7 @@
       </p:sp>
       <p:pic>
         <p:nvPicPr>
-          <p:cNvPr id="38" name="Picture 37" descr="6225129540398821112.jpg"/>
+          <p:cNvPr id="38" name="Picture 37" descr="2663829795774334274.jpg"/>
           <p:cNvPicPr>
             <a:picLocks noChangeAspect="1"/>
           </p:cNvPicPr>
@@ -4919,8 +4919,8 @@
         </p:blipFill>
         <p:spPr>
           <a:xfrm>
-            <a:off x="6126480" y="5970270"/>
-            <a:ext cx="1813560" cy="1813560"/>
+            <a:off x="2819400" y="9277350"/>
+            <a:ext cx="2286000" cy="2286000"/>
           </a:xfrm>
           <a:prstGeom prst="rect">
             <a:avLst/>
@@ -4935,8 +4935,8 @@
         </p:nvSpPr>
         <p:spPr>
           <a:xfrm>
-            <a:off x="6126480" y="7440929"/>
-            <a:ext cx="1813560" cy="342900"/>
+            <a:off x="2819400" y="11220450"/>
+            <a:ext cx="2286000" cy="342900"/>
           </a:xfrm>
           <a:prstGeom prst="rect">
             <a:avLst/>
@@ -4981,8 +4981,8 @@
         </p:nvSpPr>
         <p:spPr>
           <a:xfrm>
-            <a:off x="6164580" y="7440929"/>
-            <a:ext cx="1737360" cy="342900"/>
+            <a:off x="2857500" y="11220450"/>
+            <a:ext cx="2209800" cy="342900"/>
           </a:xfrm>
           <a:prstGeom prst="rect">
             <a:avLst/>
@@ -5001,7 +5001,7 @@
               </a:lnSpc>
             </a:pPr>
             <a:r>
-              <a:rPr sz="1200" b="1" i="0">
+              <a:rPr sz="1500" b="1" i="0">
                 <a:solidFill>
                   <a:srgbClr val="31662F"/>
                 </a:solidFill>
@@ -5014,7 +5014,7 @@
       </p:sp>
       <p:pic>
         <p:nvPicPr>
-          <p:cNvPr id="41" name="Picture 40" descr="6957233813328317874.jpg"/>
+          <p:cNvPr id="41" name="Picture 40" descr="8496695976596084521.jpg"/>
           <p:cNvPicPr>
             <a:picLocks noChangeAspect="1"/>
           </p:cNvPicPr>
@@ -5028,8 +5028,8 @@
         </p:blipFill>
         <p:spPr>
           <a:xfrm>
-            <a:off x="8016240" y="5970270"/>
-            <a:ext cx="1813560" cy="1813560"/>
+            <a:off x="5181600" y="9277350"/>
+            <a:ext cx="2286000" cy="2286000"/>
           </a:xfrm>
           <a:prstGeom prst="rect">
             <a:avLst/>
@@ -5044,8 +5044,8 @@
         </p:nvSpPr>
         <p:spPr>
           <a:xfrm>
-            <a:off x="8016240" y="7440929"/>
-            <a:ext cx="1813560" cy="342900"/>
+            <a:off x="5181600" y="11220450"/>
+            <a:ext cx="2286000" cy="342900"/>
           </a:xfrm>
           <a:prstGeom prst="rect">
             <a:avLst/>
@@ -5090,8 +5090,8 @@
         </p:nvSpPr>
         <p:spPr>
           <a:xfrm>
-            <a:off x="8054340" y="7440929"/>
-            <a:ext cx="1737360" cy="342900"/>
+            <a:off x="5219700" y="11220450"/>
+            <a:ext cx="2209800" cy="342900"/>
           </a:xfrm>
           <a:prstGeom prst="rect">
             <a:avLst/>
@@ -5110,7 +5110,7 @@
               </a:lnSpc>
             </a:pPr>
             <a:r>
-              <a:rPr sz="1200" b="1" i="0">
+              <a:rPr sz="1500" b="1" i="0">
                 <a:solidFill>
                   <a:srgbClr val="31662F"/>
                 </a:solidFill>
@@ -5123,7 +5123,7 @@
       </p:sp>
       <p:pic>
         <p:nvPicPr>
-          <p:cNvPr id="44" name="Picture 43" descr="6998284926264825370.jpg"/>
+          <p:cNvPr id="44" name="Picture 43" descr="8052758747183003055.jpg"/>
           <p:cNvPicPr>
             <a:picLocks noChangeAspect="1"/>
           </p:cNvPicPr>
@@ -5137,8 +5137,8 @@
         </p:blipFill>
         <p:spPr>
           <a:xfrm>
-            <a:off x="457200" y="7860030"/>
-            <a:ext cx="1813560" cy="1813560"/>
+            <a:off x="7543800" y="9277350"/>
+            <a:ext cx="2286000" cy="2286000"/>
           </a:xfrm>
           <a:prstGeom prst="rect">
             <a:avLst/>
@@ -5153,8 +5153,8 @@
         </p:nvSpPr>
         <p:spPr>
           <a:xfrm>
-            <a:off x="457200" y="9330690"/>
-            <a:ext cx="1813560" cy="342900"/>
+            <a:off x="7543800" y="11220450"/>
+            <a:ext cx="2286000" cy="342900"/>
           </a:xfrm>
           <a:prstGeom prst="rect">
             <a:avLst/>
@@ -5199,8 +5199,8 @@
         </p:nvSpPr>
         <p:spPr>
           <a:xfrm>
-            <a:off x="495300" y="9330690"/>
-            <a:ext cx="1737360" cy="342900"/>
+            <a:off x="7581900" y="11220450"/>
+            <a:ext cx="2209800" cy="342900"/>
           </a:xfrm>
           <a:prstGeom prst="rect">
             <a:avLst/>
@@ -5219,449 +5219,13 @@
               </a:lnSpc>
             </a:pPr>
             <a:r>
-              <a:rPr sz="1200" b="1" i="0">
+              <a:rPr sz="1500" b="1" i="0">
                 <a:solidFill>
                   <a:srgbClr val="31662F"/>
                 </a:solidFill>
                 <a:latin typeface="Montserrat"/>
               </a:rPr>
               <a:t>Delvin Solkinson</a:t>
-            </a:r>
-          </a:p>
-        </p:txBody>
-      </p:sp>
-      <p:pic>
-        <p:nvPicPr>
-          <p:cNvPr id="47" name="Picture 46" descr="2904139003338272881.jpg"/>
-          <p:cNvPicPr>
-            <a:picLocks noChangeAspect="1"/>
-          </p:cNvPicPr>
-          <p:nvPr/>
-        </p:nvPicPr>
-        <p:blipFill>
-          <a:blip r:embed="rId17"/>
-          <a:stretch>
-            <a:fillRect/>
-          </a:stretch>
-        </p:blipFill>
-        <p:spPr>
-          <a:xfrm>
-            <a:off x="2346960" y="7860030"/>
-            <a:ext cx="1813560" cy="1813560"/>
-          </a:xfrm>
-          <a:prstGeom prst="rect">
-            <a:avLst/>
-          </a:prstGeom>
-        </p:spPr>
-      </p:pic>
-      <p:sp>
-        <p:nvSpPr>
-          <p:cNvPr id="48" name="Rectangle 47"/>
-          <p:cNvSpPr/>
-          <p:nvPr/>
-        </p:nvSpPr>
-        <p:spPr>
-          <a:xfrm>
-            <a:off x="2346960" y="9330690"/>
-            <a:ext cx="1813560" cy="342900"/>
-          </a:xfrm>
-          <a:prstGeom prst="rect">
-            <a:avLst/>
-          </a:prstGeom>
-          <a:solidFill>
-            <a:srgbClr val="F3F1EA">
-              <a:alpha val="88000"/>
-            </a:srgbClr>
-          </a:solidFill>
-          <a:ln>
-            <a:noFill/>
-          </a:ln>
-          <a:effectLst/>
-        </p:spPr>
-        <p:style>
-          <a:lnRef idx="1">
-            <a:schemeClr val="accent1"/>
-          </a:lnRef>
-          <a:fillRef idx="3">
-            <a:schemeClr val="accent1"/>
-          </a:fillRef>
-          <a:effectRef idx="2">
-            <a:schemeClr val="accent1"/>
-          </a:effectRef>
-          <a:fontRef idx="minor">
-            <a:schemeClr val="lt1"/>
-          </a:fontRef>
-        </p:style>
-        <p:txBody>
-          <a:bodyPr rtlCol="0" anchor="ctr"/>
-          <a:lstStyle/>
-          <a:p>
-            <a:pPr algn="ctr"/>
-          </a:p>
-        </p:txBody>
-      </p:sp>
-      <p:sp>
-        <p:nvSpPr>
-          <p:cNvPr id="49" name="TextBox 48"/>
-          <p:cNvSpPr txBox="1"/>
-          <p:nvPr/>
-        </p:nvSpPr>
-        <p:spPr>
-          <a:xfrm>
-            <a:off x="2385060" y="9330690"/>
-            <a:ext cx="1737360" cy="342900"/>
-          </a:xfrm>
-          <a:prstGeom prst="rect">
-            <a:avLst/>
-          </a:prstGeom>
-          <a:noFill/>
-        </p:spPr>
-        <p:txBody>
-          <a:bodyPr wrap="square" lIns="0" rIns="0" tIns="0" bIns="0" anchor="ctr">
-            <a:spAutoFit/>
-          </a:bodyPr>
-          <a:lstStyle/>
-          <a:p>
-            <a:pPr algn="ctr">
-              <a:lnSpc>
-                <a:spcPct val="120000"/>
-              </a:lnSpc>
-            </a:pPr>
-            <a:r>
-              <a:rPr sz="1200" b="1" i="0">
-                <a:solidFill>
-                  <a:srgbClr val="31662F"/>
-                </a:solidFill>
-                <a:latin typeface="Montserrat"/>
-              </a:rPr>
-              <a:t>Elina Psara</a:t>
-            </a:r>
-          </a:p>
-        </p:txBody>
-      </p:sp>
-      <p:pic>
-        <p:nvPicPr>
-          <p:cNvPr id="50" name="Picture 49" descr="7454114753255690645.jpg"/>
-          <p:cNvPicPr>
-            <a:picLocks noChangeAspect="1"/>
-          </p:cNvPicPr>
-          <p:nvPr/>
-        </p:nvPicPr>
-        <p:blipFill>
-          <a:blip r:embed="rId18"/>
-          <a:stretch>
-            <a:fillRect/>
-          </a:stretch>
-        </p:blipFill>
-        <p:spPr>
-          <a:xfrm>
-            <a:off x="4236720" y="7860030"/>
-            <a:ext cx="1813560" cy="1813560"/>
-          </a:xfrm>
-          <a:prstGeom prst="rect">
-            <a:avLst/>
-          </a:prstGeom>
-        </p:spPr>
-      </p:pic>
-      <p:sp>
-        <p:nvSpPr>
-          <p:cNvPr id="51" name="Rectangle 50"/>
-          <p:cNvSpPr/>
-          <p:nvPr/>
-        </p:nvSpPr>
-        <p:spPr>
-          <a:xfrm>
-            <a:off x="4236720" y="9330690"/>
-            <a:ext cx="1813560" cy="342900"/>
-          </a:xfrm>
-          <a:prstGeom prst="rect">
-            <a:avLst/>
-          </a:prstGeom>
-          <a:solidFill>
-            <a:srgbClr val="F3F1EA">
-              <a:alpha val="88000"/>
-            </a:srgbClr>
-          </a:solidFill>
-          <a:ln>
-            <a:noFill/>
-          </a:ln>
-          <a:effectLst/>
-        </p:spPr>
-        <p:style>
-          <a:lnRef idx="1">
-            <a:schemeClr val="accent1"/>
-          </a:lnRef>
-          <a:fillRef idx="3">
-            <a:schemeClr val="accent1"/>
-          </a:fillRef>
-          <a:effectRef idx="2">
-            <a:schemeClr val="accent1"/>
-          </a:effectRef>
-          <a:fontRef idx="minor">
-            <a:schemeClr val="lt1"/>
-          </a:fontRef>
-        </p:style>
-        <p:txBody>
-          <a:bodyPr rtlCol="0" anchor="ctr"/>
-          <a:lstStyle/>
-          <a:p>
-            <a:pPr algn="ctr"/>
-          </a:p>
-        </p:txBody>
-      </p:sp>
-      <p:sp>
-        <p:nvSpPr>
-          <p:cNvPr id="52" name="TextBox 51"/>
-          <p:cNvSpPr txBox="1"/>
-          <p:nvPr/>
-        </p:nvSpPr>
-        <p:spPr>
-          <a:xfrm>
-            <a:off x="4274820" y="9330690"/>
-            <a:ext cx="1737360" cy="342900"/>
-          </a:xfrm>
-          <a:prstGeom prst="rect">
-            <a:avLst/>
-          </a:prstGeom>
-          <a:noFill/>
-        </p:spPr>
-        <p:txBody>
-          <a:bodyPr wrap="square" lIns="0" rIns="0" tIns="0" bIns="0" anchor="ctr">
-            <a:spAutoFit/>
-          </a:bodyPr>
-          <a:lstStyle/>
-          <a:p>
-            <a:pPr algn="ctr">
-              <a:lnSpc>
-                <a:spcPct val="120000"/>
-              </a:lnSpc>
-            </a:pPr>
-            <a:r>
-              <a:rPr sz="1200" b="1" i="0">
-                <a:solidFill>
-                  <a:srgbClr val="31662F"/>
-                </a:solidFill>
-                <a:latin typeface="Montserrat"/>
-              </a:rPr>
-              <a:t>Caterina Capri</a:t>
-            </a:r>
-          </a:p>
-        </p:txBody>
-      </p:sp>
-      <p:pic>
-        <p:nvPicPr>
-          <p:cNvPr id="53" name="Picture 52" descr="8055802890071954999.jpg"/>
-          <p:cNvPicPr>
-            <a:picLocks noChangeAspect="1"/>
-          </p:cNvPicPr>
-          <p:nvPr/>
-        </p:nvPicPr>
-        <p:blipFill>
-          <a:blip r:embed="rId19"/>
-          <a:stretch>
-            <a:fillRect/>
-          </a:stretch>
-        </p:blipFill>
-        <p:spPr>
-          <a:xfrm>
-            <a:off x="6126480" y="7860030"/>
-            <a:ext cx="1813560" cy="1813560"/>
-          </a:xfrm>
-          <a:prstGeom prst="rect">
-            <a:avLst/>
-          </a:prstGeom>
-        </p:spPr>
-      </p:pic>
-      <p:sp>
-        <p:nvSpPr>
-          <p:cNvPr id="54" name="Rectangle 53"/>
-          <p:cNvSpPr/>
-          <p:nvPr/>
-        </p:nvSpPr>
-        <p:spPr>
-          <a:xfrm>
-            <a:off x="6126480" y="9330690"/>
-            <a:ext cx="1813560" cy="342900"/>
-          </a:xfrm>
-          <a:prstGeom prst="rect">
-            <a:avLst/>
-          </a:prstGeom>
-          <a:solidFill>
-            <a:srgbClr val="F3F1EA">
-              <a:alpha val="88000"/>
-            </a:srgbClr>
-          </a:solidFill>
-          <a:ln>
-            <a:noFill/>
-          </a:ln>
-          <a:effectLst/>
-        </p:spPr>
-        <p:style>
-          <a:lnRef idx="1">
-            <a:schemeClr val="accent1"/>
-          </a:lnRef>
-          <a:fillRef idx="3">
-            <a:schemeClr val="accent1"/>
-          </a:fillRef>
-          <a:effectRef idx="2">
-            <a:schemeClr val="accent1"/>
-          </a:effectRef>
-          <a:fontRef idx="minor">
-            <a:schemeClr val="lt1"/>
-          </a:fontRef>
-        </p:style>
-        <p:txBody>
-          <a:bodyPr rtlCol="0" anchor="ctr"/>
-          <a:lstStyle/>
-          <a:p>
-            <a:pPr algn="ctr"/>
-          </a:p>
-        </p:txBody>
-      </p:sp>
-      <p:sp>
-        <p:nvSpPr>
-          <p:cNvPr id="55" name="TextBox 54"/>
-          <p:cNvSpPr txBox="1"/>
-          <p:nvPr/>
-        </p:nvSpPr>
-        <p:spPr>
-          <a:xfrm>
-            <a:off x="6164580" y="9330690"/>
-            <a:ext cx="1737360" cy="342900"/>
-          </a:xfrm>
-          <a:prstGeom prst="rect">
-            <a:avLst/>
-          </a:prstGeom>
-          <a:noFill/>
-        </p:spPr>
-        <p:txBody>
-          <a:bodyPr wrap="square" lIns="0" rIns="0" tIns="0" bIns="0" anchor="ctr">
-            <a:spAutoFit/>
-          </a:bodyPr>
-          <a:lstStyle/>
-          <a:p>
-            <a:pPr algn="ctr">
-              <a:lnSpc>
-                <a:spcPct val="120000"/>
-              </a:lnSpc>
-            </a:pPr>
-            <a:r>
-              <a:rPr sz="1200" b="1" i="0">
-                <a:solidFill>
-                  <a:srgbClr val="31662F"/>
-                </a:solidFill>
-                <a:latin typeface="Montserrat"/>
-              </a:rPr>
-              <a:t>Laura Campos</a:t>
-            </a:r>
-          </a:p>
-        </p:txBody>
-      </p:sp>
-      <p:pic>
-        <p:nvPicPr>
-          <p:cNvPr id="56" name="Picture 55" descr="6327792871960472773.jpg"/>
-          <p:cNvPicPr>
-            <a:picLocks noChangeAspect="1"/>
-          </p:cNvPicPr>
-          <p:nvPr/>
-        </p:nvPicPr>
-        <p:blipFill>
-          <a:blip r:embed="rId20"/>
-          <a:stretch>
-            <a:fillRect/>
-          </a:stretch>
-        </p:blipFill>
-        <p:spPr>
-          <a:xfrm>
-            <a:off x="8016240" y="7860030"/>
-            <a:ext cx="1813560" cy="1813560"/>
-          </a:xfrm>
-          <a:prstGeom prst="rect">
-            <a:avLst/>
-          </a:prstGeom>
-        </p:spPr>
-      </p:pic>
-      <p:sp>
-        <p:nvSpPr>
-          <p:cNvPr id="57" name="Rectangle 56"/>
-          <p:cNvSpPr/>
-          <p:nvPr/>
-        </p:nvSpPr>
-        <p:spPr>
-          <a:xfrm>
-            <a:off x="8016240" y="9330690"/>
-            <a:ext cx="1813560" cy="342900"/>
-          </a:xfrm>
-          <a:prstGeom prst="rect">
-            <a:avLst/>
-          </a:prstGeom>
-          <a:solidFill>
-            <a:srgbClr val="F3F1EA">
-              <a:alpha val="88000"/>
-            </a:srgbClr>
-          </a:solidFill>
-          <a:ln>
-            <a:noFill/>
-          </a:ln>
-          <a:effectLst/>
-        </p:spPr>
-        <p:style>
-          <a:lnRef idx="1">
-            <a:schemeClr val="accent1"/>
-          </a:lnRef>
-          <a:fillRef idx="3">
-            <a:schemeClr val="accent1"/>
-          </a:fillRef>
-          <a:effectRef idx="2">
-            <a:schemeClr val="accent1"/>
-          </a:effectRef>
-          <a:fontRef idx="minor">
-            <a:schemeClr val="lt1"/>
-          </a:fontRef>
-        </p:style>
-        <p:txBody>
-          <a:bodyPr rtlCol="0" anchor="ctr"/>
-          <a:lstStyle/>
-          <a:p>
-            <a:pPr algn="ctr"/>
-          </a:p>
-        </p:txBody>
-      </p:sp>
-      <p:sp>
-        <p:nvSpPr>
-          <p:cNvPr id="58" name="TextBox 57"/>
-          <p:cNvSpPr txBox="1"/>
-          <p:nvPr/>
-        </p:nvSpPr>
-        <p:spPr>
-          <a:xfrm>
-            <a:off x="8054340" y="9330690"/>
-            <a:ext cx="1737360" cy="342900"/>
-          </a:xfrm>
-          <a:prstGeom prst="rect">
-            <a:avLst/>
-          </a:prstGeom>
-          <a:noFill/>
-        </p:spPr>
-        <p:txBody>
-          <a:bodyPr wrap="square" lIns="0" rIns="0" tIns="0" bIns="0" anchor="ctr">
-            <a:spAutoFit/>
-          </a:bodyPr>
-          <a:lstStyle/>
-          <a:p>
-            <a:pPr algn="ctr">
-              <a:lnSpc>
-                <a:spcPct val="120000"/>
-              </a:lnSpc>
-            </a:pPr>
-            <a:r>
-              <a:rPr sz="1200" b="1" i="0">
-                <a:solidFill>
-                  <a:srgbClr val="31662F"/>
-                </a:solidFill>
-                <a:latin typeface="Montserrat"/>
-              </a:rPr>
-              <a:t>Nora Levay</a:t>
             </a:r>
           </a:p>
         </p:txBody>
@@ -5809,7 +5373,7 @@
                 </a:solidFill>
                 <a:latin typeface="Montserrat"/>
               </a:rPr>
-              <a:t>Tommy Tepper</a:t>
+              <a:t>Tommy Tapper</a:t>
             </a:r>
           </a:p>
         </p:txBody>
@@ -6043,7 +5607,7 @@
                 </a:solidFill>
                 <a:latin typeface="Montserrat"/>
               </a:rPr>
-              <a:t>Wesley Sanders</a:t>
+              <a:t>Wesley Sander</a:t>
             </a:r>
           </a:p>
         </p:txBody>
@@ -6277,7 +5841,7 @@
                 </a:solidFill>
                 <a:latin typeface="Montserrat"/>
               </a:rPr>
-              <a:t>Isadora Schmidt</a:t>
+              <a:t>Isadora Shmidt</a:t>
             </a:r>
           </a:p>
         </p:txBody>
@@ -6867,321 +6431,9 @@
           </a:p>
         </p:txBody>
       </p:sp>
-      <p:sp>
-        <p:nvSpPr>
-          <p:cNvPr id="32" name="TextBox 31"/>
-          <p:cNvSpPr txBox="1"/>
-          <p:nvPr/>
-        </p:nvSpPr>
-        <p:spPr>
-          <a:xfrm>
-            <a:off x="9715500" y="3333750"/>
-            <a:ext cx="4286250" cy="381000"/>
-          </a:xfrm>
-          <a:prstGeom prst="rect">
-            <a:avLst/>
-          </a:prstGeom>
-          <a:noFill/>
-        </p:spPr>
-        <p:txBody>
-          <a:bodyPr wrap="square" lIns="0" rIns="0" tIns="0" bIns="0" anchor="t">
-            <a:spAutoFit/>
-          </a:bodyPr>
-          <a:lstStyle/>
-          <a:p>
-            <a:pPr algn="l">
-              <a:lnSpc>
-                <a:spcPct val="120000"/>
-              </a:lnSpc>
-            </a:pPr>
-            <a:r>
-              <a:rPr sz="2600" b="1" i="0">
-                <a:solidFill>
-                  <a:srgbClr val="333130"/>
-                </a:solidFill>
-                <a:latin typeface="Montserrat"/>
-              </a:rPr>
-              <a:t>Elina Psara</a:t>
-            </a:r>
-          </a:p>
-        </p:txBody>
-      </p:sp>
-      <p:sp>
-        <p:nvSpPr>
-          <p:cNvPr id="33" name="TextBox 32"/>
-          <p:cNvSpPr txBox="1"/>
-          <p:nvPr/>
-        </p:nvSpPr>
-        <p:spPr>
-          <a:xfrm>
-            <a:off x="9715500" y="3714750"/>
-            <a:ext cx="4286250" cy="323850"/>
-          </a:xfrm>
-          <a:prstGeom prst="rect">
-            <a:avLst/>
-          </a:prstGeom>
-          <a:noFill/>
-        </p:spPr>
-        <p:txBody>
-          <a:bodyPr wrap="square" lIns="0" rIns="0" tIns="0" bIns="0" anchor="t">
-            <a:spAutoFit/>
-          </a:bodyPr>
-          <a:lstStyle/>
-          <a:p>
-            <a:pPr algn="l">
-              <a:lnSpc>
-                <a:spcPct val="120000"/>
-              </a:lnSpc>
-            </a:pPr>
-            <a:r>
-              <a:rPr sz="1800" b="0" i="0">
-                <a:solidFill>
-                  <a:srgbClr val="31662F"/>
-                </a:solidFill>
-                <a:latin typeface="Source Sans 3"/>
-              </a:rPr>
-              <a:t>SFW Mentor Team Lead</a:t>
-            </a:r>
-          </a:p>
-        </p:txBody>
-      </p:sp>
-      <p:sp>
-        <p:nvSpPr>
-          <p:cNvPr id="34" name="TextBox 33"/>
-          <p:cNvSpPr txBox="1"/>
-          <p:nvPr/>
-        </p:nvSpPr>
-        <p:spPr>
-          <a:xfrm>
-            <a:off x="9715500" y="4381500"/>
-            <a:ext cx="4286250" cy="381000"/>
-          </a:xfrm>
-          <a:prstGeom prst="rect">
-            <a:avLst/>
-          </a:prstGeom>
-          <a:noFill/>
-        </p:spPr>
-        <p:txBody>
-          <a:bodyPr wrap="square" lIns="0" rIns="0" tIns="0" bIns="0" anchor="t">
-            <a:spAutoFit/>
-          </a:bodyPr>
-          <a:lstStyle/>
-          <a:p>
-            <a:pPr algn="l">
-              <a:lnSpc>
-                <a:spcPct val="120000"/>
-              </a:lnSpc>
-            </a:pPr>
-            <a:r>
-              <a:rPr sz="2600" b="1" i="0">
-                <a:solidFill>
-                  <a:srgbClr val="333130"/>
-                </a:solidFill>
-                <a:latin typeface="Montserrat"/>
-              </a:rPr>
-              <a:t>Caterina Capri</a:t>
-            </a:r>
-          </a:p>
-        </p:txBody>
-      </p:sp>
-      <p:sp>
-        <p:nvSpPr>
-          <p:cNvPr id="35" name="TextBox 34"/>
-          <p:cNvSpPr txBox="1"/>
-          <p:nvPr/>
-        </p:nvSpPr>
-        <p:spPr>
-          <a:xfrm>
-            <a:off x="9715500" y="4762500"/>
-            <a:ext cx="4286250" cy="323850"/>
-          </a:xfrm>
-          <a:prstGeom prst="rect">
-            <a:avLst/>
-          </a:prstGeom>
-          <a:noFill/>
-        </p:spPr>
-        <p:txBody>
-          <a:bodyPr wrap="square" lIns="0" rIns="0" tIns="0" bIns="0" anchor="t">
-            <a:spAutoFit/>
-          </a:bodyPr>
-          <a:lstStyle/>
-          <a:p>
-            <a:pPr algn="l">
-              <a:lnSpc>
-                <a:spcPct val="120000"/>
-              </a:lnSpc>
-            </a:pPr>
-            <a:r>
-              <a:rPr sz="1800" b="0" i="0">
-                <a:solidFill>
-                  <a:srgbClr val="31662F"/>
-                </a:solidFill>
-                <a:latin typeface="Source Sans 3"/>
-              </a:rPr>
-              <a:t>SFW Mentor</a:t>
-            </a:r>
-          </a:p>
-        </p:txBody>
-      </p:sp>
-      <p:sp>
-        <p:nvSpPr>
-          <p:cNvPr id="36" name="TextBox 35"/>
-          <p:cNvSpPr txBox="1"/>
-          <p:nvPr/>
-        </p:nvSpPr>
-        <p:spPr>
-          <a:xfrm>
-            <a:off x="9715500" y="5429250"/>
-            <a:ext cx="4286250" cy="381000"/>
-          </a:xfrm>
-          <a:prstGeom prst="rect">
-            <a:avLst/>
-          </a:prstGeom>
-          <a:noFill/>
-        </p:spPr>
-        <p:txBody>
-          <a:bodyPr wrap="square" lIns="0" rIns="0" tIns="0" bIns="0" anchor="t">
-            <a:spAutoFit/>
-          </a:bodyPr>
-          <a:lstStyle/>
-          <a:p>
-            <a:pPr algn="l">
-              <a:lnSpc>
-                <a:spcPct val="120000"/>
-              </a:lnSpc>
-            </a:pPr>
-            <a:r>
-              <a:rPr sz="2600" b="1" i="0">
-                <a:solidFill>
-                  <a:srgbClr val="333130"/>
-                </a:solidFill>
-                <a:latin typeface="Montserrat"/>
-              </a:rPr>
-              <a:t>Laura Campos</a:t>
-            </a:r>
-          </a:p>
-        </p:txBody>
-      </p:sp>
-      <p:sp>
-        <p:nvSpPr>
-          <p:cNvPr id="37" name="TextBox 36"/>
-          <p:cNvSpPr txBox="1"/>
-          <p:nvPr/>
-        </p:nvSpPr>
-        <p:spPr>
-          <a:xfrm>
-            <a:off x="9715500" y="5810250"/>
-            <a:ext cx="4286250" cy="323850"/>
-          </a:xfrm>
-          <a:prstGeom prst="rect">
-            <a:avLst/>
-          </a:prstGeom>
-          <a:noFill/>
-        </p:spPr>
-        <p:txBody>
-          <a:bodyPr wrap="square" lIns="0" rIns="0" tIns="0" bIns="0" anchor="t">
-            <a:spAutoFit/>
-          </a:bodyPr>
-          <a:lstStyle/>
-          <a:p>
-            <a:pPr algn="l">
-              <a:lnSpc>
-                <a:spcPct val="120000"/>
-              </a:lnSpc>
-            </a:pPr>
-            <a:r>
-              <a:rPr sz="1800" b="0" i="0">
-                <a:solidFill>
-                  <a:srgbClr val="31662F"/>
-                </a:solidFill>
-                <a:latin typeface="Source Sans 3"/>
-              </a:rPr>
-              <a:t>SFW Mentor</a:t>
-            </a:r>
-          </a:p>
-        </p:txBody>
-      </p:sp>
-      <p:sp>
-        <p:nvSpPr>
-          <p:cNvPr id="38" name="TextBox 37"/>
-          <p:cNvSpPr txBox="1"/>
-          <p:nvPr/>
-        </p:nvSpPr>
-        <p:spPr>
-          <a:xfrm>
-            <a:off x="9715500" y="6477000"/>
-            <a:ext cx="4286250" cy="381000"/>
-          </a:xfrm>
-          <a:prstGeom prst="rect">
-            <a:avLst/>
-          </a:prstGeom>
-          <a:noFill/>
-        </p:spPr>
-        <p:txBody>
-          <a:bodyPr wrap="square" lIns="0" rIns="0" tIns="0" bIns="0" anchor="t">
-            <a:spAutoFit/>
-          </a:bodyPr>
-          <a:lstStyle/>
-          <a:p>
-            <a:pPr algn="l">
-              <a:lnSpc>
-                <a:spcPct val="120000"/>
-              </a:lnSpc>
-            </a:pPr>
-            <a:r>
-              <a:rPr sz="2600" b="1" i="0">
-                <a:solidFill>
-                  <a:srgbClr val="333130"/>
-                </a:solidFill>
-                <a:latin typeface="Montserrat"/>
-              </a:rPr>
-              <a:t>Nora Levay</a:t>
-            </a:r>
-          </a:p>
-        </p:txBody>
-      </p:sp>
-      <p:sp>
-        <p:nvSpPr>
-          <p:cNvPr id="39" name="TextBox 38"/>
-          <p:cNvSpPr txBox="1"/>
-          <p:nvPr/>
-        </p:nvSpPr>
-        <p:spPr>
-          <a:xfrm>
-            <a:off x="9715500" y="6858000"/>
-            <a:ext cx="4286250" cy="323850"/>
-          </a:xfrm>
-          <a:prstGeom prst="rect">
-            <a:avLst/>
-          </a:prstGeom>
-          <a:noFill/>
-        </p:spPr>
-        <p:txBody>
-          <a:bodyPr wrap="square" lIns="0" rIns="0" tIns="0" bIns="0" anchor="t">
-            <a:spAutoFit/>
-          </a:bodyPr>
-          <a:lstStyle/>
-          <a:p>
-            <a:pPr algn="l">
-              <a:lnSpc>
-                <a:spcPct val="120000"/>
-              </a:lnSpc>
-            </a:pPr>
-            <a:r>
-              <a:rPr sz="1800" b="0" i="0">
-                <a:solidFill>
-                  <a:srgbClr val="31662F"/>
-                </a:solidFill>
-                <a:latin typeface="Source Sans 3"/>
-              </a:rPr>
-              <a:t>SFW Mentor</a:t>
-            </a:r>
-          </a:p>
-        </p:txBody>
-      </p:sp>
       <p:pic>
         <p:nvPicPr>
-          <p:cNvPr id="40" name="Picture 39" descr="foundation-logo-color.png"/>
+          <p:cNvPr id="32" name="Picture 31" descr="foundation-logo-color.png"/>
           <p:cNvPicPr>
             <a:picLocks noChangeAspect="1"/>
           </p:cNvPicPr>

--- a/templates/posts/october/05-10-2026-mon-ig-teachers-day-option-3-wreath.pptx
+++ b/templates/posts/october/05-10-2026-mon-ig-teachers-day-option-3-wreath.pptx
@@ -3706,7 +3706,7 @@
       </p:sp>
       <p:pic>
         <p:nvPicPr>
-          <p:cNvPr id="5" name="Picture 4" descr="7297811591439890433.jpg"/>
+          <p:cNvPr id="5" name="Picture 4" descr="4325354522426781560.jpg"/>
           <p:cNvPicPr>
             <a:picLocks noChangeAspect="1"/>
           </p:cNvPicPr>
@@ -3815,7 +3815,7 @@
       </p:sp>
       <p:pic>
         <p:nvPicPr>
-          <p:cNvPr id="8" name="Picture 7" descr="8728437986854537801.jpg"/>
+          <p:cNvPr id="8" name="Picture 7" descr="1732553050818676790.jpg"/>
           <p:cNvPicPr>
             <a:picLocks noChangeAspect="1"/>
           </p:cNvPicPr>
@@ -3924,7 +3924,7 @@
       </p:sp>
       <p:pic>
         <p:nvPicPr>
-          <p:cNvPr id="11" name="Picture 10" descr="8499503155804001537.jpg"/>
+          <p:cNvPr id="11" name="Picture 10" descr="6558719580005473315.jpg"/>
           <p:cNvPicPr>
             <a:picLocks noChangeAspect="1"/>
           </p:cNvPicPr>
@@ -4033,7 +4033,7 @@
       </p:sp>
       <p:pic>
         <p:nvPicPr>
-          <p:cNvPr id="14" name="Picture 13" descr="8664505731163078658.jpg"/>
+          <p:cNvPr id="14" name="Picture 13" descr="1213630668745913466.jpg"/>
           <p:cNvPicPr>
             <a:picLocks noChangeAspect="1"/>
           </p:cNvPicPr>
@@ -4142,7 +4142,7 @@
       </p:sp>
       <p:pic>
         <p:nvPicPr>
-          <p:cNvPr id="17" name="Picture 16" descr="7695145214115977211.jpg"/>
+          <p:cNvPr id="17" name="Picture 16" descr="7687647477321729715.jpg"/>
           <p:cNvPicPr>
             <a:picLocks noChangeAspect="1"/>
           </p:cNvPicPr>
@@ -4251,7 +4251,7 @@
       </p:sp>
       <p:pic>
         <p:nvPicPr>
-          <p:cNvPr id="20" name="Picture 19" descr="1311806062584278399.jpg"/>
+          <p:cNvPr id="20" name="Picture 19" descr="5031212317594417618.jpg"/>
           <p:cNvPicPr>
             <a:picLocks noChangeAspect="1"/>
           </p:cNvPicPr>
@@ -4360,7 +4360,7 @@
       </p:sp>
       <p:pic>
         <p:nvPicPr>
-          <p:cNvPr id="23" name="Picture 22" descr="5215010633690581301.jpg"/>
+          <p:cNvPr id="23" name="Picture 22" descr="5273411908651455532.jpg"/>
           <p:cNvPicPr>
             <a:picLocks noChangeAspect="1"/>
           </p:cNvPicPr>
@@ -4469,7 +4469,7 @@
       </p:sp>
       <p:pic>
         <p:nvPicPr>
-          <p:cNvPr id="26" name="Picture 25" descr="746667493973784667.jpg"/>
+          <p:cNvPr id="26" name="Picture 25" descr="5332898434888599316.jpg"/>
           <p:cNvPicPr>
             <a:picLocks noChangeAspect="1"/>
           </p:cNvPicPr>
@@ -4578,7 +4578,7 @@
       </p:sp>
       <p:pic>
         <p:nvPicPr>
-          <p:cNvPr id="29" name="Picture 28" descr="4763296968275485648.jpg"/>
+          <p:cNvPr id="29" name="Picture 28" descr="6311296678588155617.jpg"/>
           <p:cNvPicPr>
             <a:picLocks noChangeAspect="1"/>
           </p:cNvPicPr>
@@ -4687,7 +4687,7 @@
       </p:sp>
       <p:pic>
         <p:nvPicPr>
-          <p:cNvPr id="32" name="Picture 31" descr="5135560565093357647.jpg"/>
+          <p:cNvPr id="32" name="Picture 31" descr="7523051663126606764.jpg"/>
           <p:cNvPicPr>
             <a:picLocks noChangeAspect="1"/>
           </p:cNvPicPr>
@@ -4796,7 +4796,7 @@
       </p:sp>
       <p:pic>
         <p:nvPicPr>
-          <p:cNvPr id="35" name="Picture 34" descr="1228326016823983096.jpg"/>
+          <p:cNvPr id="35" name="Picture 34" descr="5837706495651502879.jpg"/>
           <p:cNvPicPr>
             <a:picLocks noChangeAspect="1"/>
           </p:cNvPicPr>
@@ -4905,7 +4905,7 @@
       </p:sp>
       <p:pic>
         <p:nvPicPr>
-          <p:cNvPr id="38" name="Picture 37" descr="2663829795774334274.jpg"/>
+          <p:cNvPr id="38" name="Picture 37" descr="7992983515775991812.jpg"/>
           <p:cNvPicPr>
             <a:picLocks noChangeAspect="1"/>
           </p:cNvPicPr>
@@ -5014,7 +5014,7 @@
       </p:sp>
       <p:pic>
         <p:nvPicPr>
-          <p:cNvPr id="41" name="Picture 40" descr="8496695976596084521.jpg"/>
+          <p:cNvPr id="41" name="Picture 40" descr="6299019462365137944.jpg"/>
           <p:cNvPicPr>
             <a:picLocks noChangeAspect="1"/>
           </p:cNvPicPr>
@@ -5123,7 +5123,7 @@
       </p:sp>
       <p:pic>
         <p:nvPicPr>
-          <p:cNvPr id="44" name="Picture 43" descr="8052758747183003055.jpg"/>
+          <p:cNvPr id="44" name="Picture 43" descr="9166712994638490770.jpg"/>
           <p:cNvPicPr>
             <a:picLocks noChangeAspect="1"/>
           </p:cNvPicPr>

--- a/templates/posts/october/05-10-2026-mon-ig-teachers-day-option-3-wreath.pptx
+++ b/templates/posts/october/05-10-2026-mon-ig-teachers-day-option-3-wreath.pptx
@@ -3706,7 +3706,7 @@
       </p:sp>
       <p:pic>
         <p:nvPicPr>
-          <p:cNvPr id="5" name="Picture 4" descr="4325354522426781560.jpg"/>
+          <p:cNvPr id="5" name="Picture 4" descr="7767655283041233060.jpg"/>
           <p:cNvPicPr>
             <a:picLocks noChangeAspect="1"/>
           </p:cNvPicPr>
@@ -3815,7 +3815,7 @@
       </p:sp>
       <p:pic>
         <p:nvPicPr>
-          <p:cNvPr id="8" name="Picture 7" descr="1732553050818676790.jpg"/>
+          <p:cNvPr id="8" name="Picture 7" descr="2855909617508751556.jpg"/>
           <p:cNvPicPr>
             <a:picLocks noChangeAspect="1"/>
           </p:cNvPicPr>
@@ -3924,7 +3924,7 @@
       </p:sp>
       <p:pic>
         <p:nvPicPr>
-          <p:cNvPr id="11" name="Picture 10" descr="6558719580005473315.jpg"/>
+          <p:cNvPr id="11" name="Picture 10" descr="3779064170636143037.jpg"/>
           <p:cNvPicPr>
             <a:picLocks noChangeAspect="1"/>
           </p:cNvPicPr>
@@ -4033,7 +4033,7 @@
       </p:sp>
       <p:pic>
         <p:nvPicPr>
-          <p:cNvPr id="14" name="Picture 13" descr="1213630668745913466.jpg"/>
+          <p:cNvPr id="14" name="Picture 13" descr="6194691986289224762.jpg"/>
           <p:cNvPicPr>
             <a:picLocks noChangeAspect="1"/>
           </p:cNvPicPr>
@@ -4142,7 +4142,7 @@
       </p:sp>
       <p:pic>
         <p:nvPicPr>
-          <p:cNvPr id="17" name="Picture 16" descr="7687647477321729715.jpg"/>
+          <p:cNvPr id="17" name="Picture 16" descr="1913719621523367371.jpg"/>
           <p:cNvPicPr>
             <a:picLocks noChangeAspect="1"/>
           </p:cNvPicPr>
@@ -4251,7 +4251,7 @@
       </p:sp>
       <p:pic>
         <p:nvPicPr>
-          <p:cNvPr id="20" name="Picture 19" descr="5031212317594417618.jpg"/>
+          <p:cNvPr id="20" name="Picture 19" descr="1665765394624969327.jpg"/>
           <p:cNvPicPr>
             <a:picLocks noChangeAspect="1"/>
           </p:cNvPicPr>
@@ -4360,7 +4360,7 @@
       </p:sp>
       <p:pic>
         <p:nvPicPr>
-          <p:cNvPr id="23" name="Picture 22" descr="5273411908651455532.jpg"/>
+          <p:cNvPr id="23" name="Picture 22" descr="3518042680015161469.jpg"/>
           <p:cNvPicPr>
             <a:picLocks noChangeAspect="1"/>
           </p:cNvPicPr>
@@ -4469,7 +4469,7 @@
       </p:sp>
       <p:pic>
         <p:nvPicPr>
-          <p:cNvPr id="26" name="Picture 25" descr="5332898434888599316.jpg"/>
+          <p:cNvPr id="26" name="Picture 25" descr="3970960260678623010.jpg"/>
           <p:cNvPicPr>
             <a:picLocks noChangeAspect="1"/>
           </p:cNvPicPr>
@@ -4578,7 +4578,7 @@
       </p:sp>
       <p:pic>
         <p:nvPicPr>
-          <p:cNvPr id="29" name="Picture 28" descr="6311296678588155617.jpg"/>
+          <p:cNvPr id="29" name="Picture 28" descr="8302949435964405591.jpg"/>
           <p:cNvPicPr>
             <a:picLocks noChangeAspect="1"/>
           </p:cNvPicPr>
@@ -4687,7 +4687,7 @@
       </p:sp>
       <p:pic>
         <p:nvPicPr>
-          <p:cNvPr id="32" name="Picture 31" descr="7523051663126606764.jpg"/>
+          <p:cNvPr id="32" name="Picture 31" descr="5449205996364737380.jpg"/>
           <p:cNvPicPr>
             <a:picLocks noChangeAspect="1"/>
           </p:cNvPicPr>
@@ -4796,7 +4796,7 @@
       </p:sp>
       <p:pic>
         <p:nvPicPr>
-          <p:cNvPr id="35" name="Picture 34" descr="5837706495651502879.jpg"/>
+          <p:cNvPr id="35" name="Picture 34" descr="1356165162909352538.jpg"/>
           <p:cNvPicPr>
             <a:picLocks noChangeAspect="1"/>
           </p:cNvPicPr>
@@ -4905,7 +4905,7 @@
       </p:sp>
       <p:pic>
         <p:nvPicPr>
-          <p:cNvPr id="38" name="Picture 37" descr="7992983515775991812.jpg"/>
+          <p:cNvPr id="38" name="Picture 37" descr="304168690878683566.jpg"/>
           <p:cNvPicPr>
             <a:picLocks noChangeAspect="1"/>
           </p:cNvPicPr>
@@ -5014,7 +5014,7 @@
       </p:sp>
       <p:pic>
         <p:nvPicPr>
-          <p:cNvPr id="41" name="Picture 40" descr="6299019462365137944.jpg"/>
+          <p:cNvPr id="41" name="Picture 40" descr="8800070933331447382.jpg"/>
           <p:cNvPicPr>
             <a:picLocks noChangeAspect="1"/>
           </p:cNvPicPr>
@@ -5123,7 +5123,7 @@
       </p:sp>
       <p:pic>
         <p:nvPicPr>
-          <p:cNvPr id="44" name="Picture 43" descr="9166712994638490770.jpg"/>
+          <p:cNvPr id="44" name="Picture 43" descr="882755308084976196.jpg"/>
           <p:cNvPicPr>
             <a:picLocks noChangeAspect="1"/>
           </p:cNvPicPr>

--- a/templates/posts/october/05-10-2026-mon-ig-teachers-day-option-3-wreath.pptx
+++ b/templates/posts/october/05-10-2026-mon-ig-teachers-day-option-3-wreath.pptx
@@ -3706,7 +3706,7 @@
       </p:sp>
       <p:pic>
         <p:nvPicPr>
-          <p:cNvPr id="5" name="Picture 4" descr="7767655283041233060.jpg"/>
+          <p:cNvPr id="5" name="Picture 4" descr="5603317114199949942.jpg"/>
           <p:cNvPicPr>
             <a:picLocks noChangeAspect="1"/>
           </p:cNvPicPr>
@@ -3815,7 +3815,7 @@
       </p:sp>
       <p:pic>
         <p:nvPicPr>
-          <p:cNvPr id="8" name="Picture 7" descr="2855909617508751556.jpg"/>
+          <p:cNvPr id="8" name="Picture 7" descr="7830199770994796711.jpg"/>
           <p:cNvPicPr>
             <a:picLocks noChangeAspect="1"/>
           </p:cNvPicPr>
@@ -3924,7 +3924,7 @@
       </p:sp>
       <p:pic>
         <p:nvPicPr>
-          <p:cNvPr id="11" name="Picture 10" descr="3779064170636143037.jpg"/>
+          <p:cNvPr id="11" name="Picture 10" descr="4571667486435294808.jpg"/>
           <p:cNvPicPr>
             <a:picLocks noChangeAspect="1"/>
           </p:cNvPicPr>
@@ -4033,7 +4033,7 @@
       </p:sp>
       <p:pic>
         <p:nvPicPr>
-          <p:cNvPr id="14" name="Picture 13" descr="6194691986289224762.jpg"/>
+          <p:cNvPr id="14" name="Picture 13" descr="9088374418818931136.jpg"/>
           <p:cNvPicPr>
             <a:picLocks noChangeAspect="1"/>
           </p:cNvPicPr>
@@ -4142,7 +4142,7 @@
       </p:sp>
       <p:pic>
         <p:nvPicPr>
-          <p:cNvPr id="17" name="Picture 16" descr="1913719621523367371.jpg"/>
+          <p:cNvPr id="17" name="Picture 16" descr="6594270107413876614.jpg"/>
           <p:cNvPicPr>
             <a:picLocks noChangeAspect="1"/>
           </p:cNvPicPr>
@@ -4251,7 +4251,7 @@
       </p:sp>
       <p:pic>
         <p:nvPicPr>
-          <p:cNvPr id="20" name="Picture 19" descr="1665765394624969327.jpg"/>
+          <p:cNvPr id="20" name="Picture 19" descr="8713409569344051093.jpg"/>
           <p:cNvPicPr>
             <a:picLocks noChangeAspect="1"/>
           </p:cNvPicPr>
@@ -4360,7 +4360,7 @@
       </p:sp>
       <p:pic>
         <p:nvPicPr>
-          <p:cNvPr id="23" name="Picture 22" descr="3518042680015161469.jpg"/>
+          <p:cNvPr id="23" name="Picture 22" descr="55297487836981199.jpg"/>
           <p:cNvPicPr>
             <a:picLocks noChangeAspect="1"/>
           </p:cNvPicPr>
@@ -4469,7 +4469,7 @@
       </p:sp>
       <p:pic>
         <p:nvPicPr>
-          <p:cNvPr id="26" name="Picture 25" descr="3970960260678623010.jpg"/>
+          <p:cNvPr id="26" name="Picture 25" descr="7725558612807332116.jpg"/>
           <p:cNvPicPr>
             <a:picLocks noChangeAspect="1"/>
           </p:cNvPicPr>
@@ -4578,7 +4578,7 @@
       </p:sp>
       <p:pic>
         <p:nvPicPr>
-          <p:cNvPr id="29" name="Picture 28" descr="8302949435964405591.jpg"/>
+          <p:cNvPr id="29" name="Picture 28" descr="891395382056755913.jpg"/>
           <p:cNvPicPr>
             <a:picLocks noChangeAspect="1"/>
           </p:cNvPicPr>
@@ -4687,7 +4687,7 @@
       </p:sp>
       <p:pic>
         <p:nvPicPr>
-          <p:cNvPr id="32" name="Picture 31" descr="5449205996364737380.jpg"/>
+          <p:cNvPr id="32" name="Picture 31" descr="4291221487964845528.jpg"/>
           <p:cNvPicPr>
             <a:picLocks noChangeAspect="1"/>
           </p:cNvPicPr>
@@ -4796,7 +4796,7 @@
       </p:sp>
       <p:pic>
         <p:nvPicPr>
-          <p:cNvPr id="35" name="Picture 34" descr="1356165162909352538.jpg"/>
+          <p:cNvPr id="35" name="Picture 34" descr="6542959424271258557.jpg"/>
           <p:cNvPicPr>
             <a:picLocks noChangeAspect="1"/>
           </p:cNvPicPr>
@@ -4905,7 +4905,7 @@
       </p:sp>
       <p:pic>
         <p:nvPicPr>
-          <p:cNvPr id="38" name="Picture 37" descr="304168690878683566.jpg"/>
+          <p:cNvPr id="38" name="Picture 37" descr="4785911602451428486.jpg"/>
           <p:cNvPicPr>
             <a:picLocks noChangeAspect="1"/>
           </p:cNvPicPr>
@@ -5014,7 +5014,7 @@
       </p:sp>
       <p:pic>
         <p:nvPicPr>
-          <p:cNvPr id="41" name="Picture 40" descr="8800070933331447382.jpg"/>
+          <p:cNvPr id="41" name="Picture 40" descr="2749247239648488048.jpg"/>
           <p:cNvPicPr>
             <a:picLocks noChangeAspect="1"/>
           </p:cNvPicPr>
@@ -5123,7 +5123,7 @@
       </p:sp>
       <p:pic>
         <p:nvPicPr>
-          <p:cNvPr id="44" name="Picture 43" descr="882755308084976196.jpg"/>
+          <p:cNvPr id="44" name="Picture 43" descr="7116535034098222264.jpg"/>
           <p:cNvPicPr>
             <a:picLocks noChangeAspect="1"/>
           </p:cNvPicPr>

--- a/templates/posts/october/05-10-2026-mon-ig-teachers-day-option-3-wreath.pptx
+++ b/templates/posts/october/05-10-2026-mon-ig-teachers-day-option-3-wreath.pptx
@@ -3706,7 +3706,7 @@
       </p:sp>
       <p:pic>
         <p:nvPicPr>
-          <p:cNvPr id="5" name="Picture 4" descr="5603317114199949942.jpg"/>
+          <p:cNvPr id="5" name="Picture 4" descr="8994635771278737361.jpg"/>
           <p:cNvPicPr>
             <a:picLocks noChangeAspect="1"/>
           </p:cNvPicPr>
@@ -3815,7 +3815,7 @@
       </p:sp>
       <p:pic>
         <p:nvPicPr>
-          <p:cNvPr id="8" name="Picture 7" descr="7830199770994796711.jpg"/>
+          <p:cNvPr id="8" name="Picture 7" descr="3064864148393557809.jpg"/>
           <p:cNvPicPr>
             <a:picLocks noChangeAspect="1"/>
           </p:cNvPicPr>
@@ -3924,7 +3924,7 @@
       </p:sp>
       <p:pic>
         <p:nvPicPr>
-          <p:cNvPr id="11" name="Picture 10" descr="4571667486435294808.jpg"/>
+          <p:cNvPr id="11" name="Picture 10" descr="7815650767561644754.jpg"/>
           <p:cNvPicPr>
             <a:picLocks noChangeAspect="1"/>
           </p:cNvPicPr>
@@ -4033,7 +4033,7 @@
       </p:sp>
       <p:pic>
         <p:nvPicPr>
-          <p:cNvPr id="14" name="Picture 13" descr="9088374418818931136.jpg"/>
+          <p:cNvPr id="14" name="Picture 13" descr="3589319268339702705.jpg"/>
           <p:cNvPicPr>
             <a:picLocks noChangeAspect="1"/>
           </p:cNvPicPr>
@@ -4142,7 +4142,7 @@
       </p:sp>
       <p:pic>
         <p:nvPicPr>
-          <p:cNvPr id="17" name="Picture 16" descr="6594270107413876614.jpg"/>
+          <p:cNvPr id="17" name="Picture 16" descr="3815175066278969693.jpg"/>
           <p:cNvPicPr>
             <a:picLocks noChangeAspect="1"/>
           </p:cNvPicPr>
@@ -4251,7 +4251,7 @@
       </p:sp>
       <p:pic>
         <p:nvPicPr>
-          <p:cNvPr id="20" name="Picture 19" descr="8713409569344051093.jpg"/>
+          <p:cNvPr id="20" name="Picture 19" descr="4614445495298174257.jpg"/>
           <p:cNvPicPr>
             <a:picLocks noChangeAspect="1"/>
           </p:cNvPicPr>
@@ -4360,7 +4360,7 @@
       </p:sp>
       <p:pic>
         <p:nvPicPr>
-          <p:cNvPr id="23" name="Picture 22" descr="55297487836981199.jpg"/>
+          <p:cNvPr id="23" name="Picture 22" descr="8487436485798559110.jpg"/>
           <p:cNvPicPr>
             <a:picLocks noChangeAspect="1"/>
           </p:cNvPicPr>
@@ -4469,7 +4469,7 @@
       </p:sp>
       <p:pic>
         <p:nvPicPr>
-          <p:cNvPr id="26" name="Picture 25" descr="7725558612807332116.jpg"/>
+          <p:cNvPr id="26" name="Picture 25" descr="2456545260107240446.jpg"/>
           <p:cNvPicPr>
             <a:picLocks noChangeAspect="1"/>
           </p:cNvPicPr>
@@ -4578,7 +4578,7 @@
       </p:sp>
       <p:pic>
         <p:nvPicPr>
-          <p:cNvPr id="29" name="Picture 28" descr="891395382056755913.jpg"/>
+          <p:cNvPr id="29" name="Picture 28" descr="9164031694924200788.jpg"/>
           <p:cNvPicPr>
             <a:picLocks noChangeAspect="1"/>
           </p:cNvPicPr>
@@ -4687,7 +4687,7 @@
       </p:sp>
       <p:pic>
         <p:nvPicPr>
-          <p:cNvPr id="32" name="Picture 31" descr="4291221487964845528.jpg"/>
+          <p:cNvPr id="32" name="Picture 31" descr="245352837941254467.jpg"/>
           <p:cNvPicPr>
             <a:picLocks noChangeAspect="1"/>
           </p:cNvPicPr>
@@ -4796,7 +4796,7 @@
       </p:sp>
       <p:pic>
         <p:nvPicPr>
-          <p:cNvPr id="35" name="Picture 34" descr="6542959424271258557.jpg"/>
+          <p:cNvPr id="35" name="Picture 34" descr="7522010873324386665.jpg"/>
           <p:cNvPicPr>
             <a:picLocks noChangeAspect="1"/>
           </p:cNvPicPr>
@@ -4905,7 +4905,7 @@
       </p:sp>
       <p:pic>
         <p:nvPicPr>
-          <p:cNvPr id="38" name="Picture 37" descr="4785911602451428486.jpg"/>
+          <p:cNvPr id="38" name="Picture 37" descr="5925411254870724140.jpg"/>
           <p:cNvPicPr>
             <a:picLocks noChangeAspect="1"/>
           </p:cNvPicPr>
@@ -5014,7 +5014,7 @@
       </p:sp>
       <p:pic>
         <p:nvPicPr>
-          <p:cNvPr id="41" name="Picture 40" descr="2749247239648488048.jpg"/>
+          <p:cNvPr id="41" name="Picture 40" descr="6679412281472379077.jpg"/>
           <p:cNvPicPr>
             <a:picLocks noChangeAspect="1"/>
           </p:cNvPicPr>
@@ -5123,7 +5123,7 @@
       </p:sp>
       <p:pic>
         <p:nvPicPr>
-          <p:cNvPr id="44" name="Picture 43" descr="7116535034098222264.jpg"/>
+          <p:cNvPr id="44" name="Picture 43" descr="3104826297245477543.jpg"/>
           <p:cNvPicPr>
             <a:picLocks noChangeAspect="1"/>
           </p:cNvPicPr>
